--- a/docs/submission/presentation.pptx
+++ b/docs/submission/presentation.pptx
@@ -511,8 +511,9 @@
           <a:p>
             <a:r>
               <a:rPr lang="en-US" dirty="0"/>
-              <a:t>【0:00〜0:05（約5秒）】
-奨学金エージェントです。応募できる奨学金を、探して、確かめて届けます。</a:t>
+              <a:t>【0:00–0:08】
+こんにちは。奨学金エージェントです。【間】
+皆さんは、奨学金の応募に、★間に合わなかった――そんな経験、ありませんか？</a:t>
             </a:r>
             <a:endParaRPr lang="en-US" dirty="0"/>
           </a:p>
@@ -688,8 +689,12 @@
           <a:p>
             <a:r>
               <a:rPr lang="en-US" dirty="0"/>
-              <a:t>【0:05〜0:20（約15秒）】
-奨学金は、高校生から社会人まで、目的もさまざまです。でも情報は散らばっていて、生成AIに聞くと、募集終了のものが混ざります。実測では、素のAIの回答34件のうち12件、約3分の1が募集終了でした。</a:t>
+              <a:t>【0:08–0:33】
+奨学金は、探すだけで大変です。／大学、財団、自治体。情報は、あちこちに散らばっています。
+じゃあ、生成AIに聞けばいい？【間】それが、そうでもないんです。
+素のAIに「応募できる奨学金を全部教えて」と聞くと、34件の答えが返ってきました。
+そのうち★12件。3分の1は、公式ページを見ると、もう募集終了。
+10月の時点で、全体の★半分が、終わっています。</a:t>
             </a:r>
             <a:endParaRPr lang="en-US" dirty="0"/>
           </a:p>
@@ -777,8 +782,12 @@
           <a:p>
             <a:r>
               <a:rPr lang="en-US" dirty="0"/>
-              <a:t>【0:20〜0:35（約15秒）】
-そこで、探すのはAI、応募できるかの判定は、公式ページを読んでコードで行います。確認できないものは隠さず分け、AIの操作は、検査・人間の承認・監査ログで管理します。</a:t>
+              <a:t>【0:33–0:58】
+だから、役割を分けました。
+探すのは、AI。【間】でも、「応募できるか」を決めるのは、★AIではありません。
+公式ページを読んで、条件を、原文の引用つきで抜き出す。／その引用が本物か、コードが確かめて、判定します。
+確認できないものは、★隠さない。「要確認」「未確認」として、分けて出します。
+そして、AIの操作は、検査と、人間の承認と、記録で、守ります。</a:t>
             </a:r>
             <a:endParaRPr lang="en-US" dirty="0"/>
           </a:p>
@@ -866,9 +875,15 @@
           <a:p>
             <a:r>
               <a:rPr lang="en-US" dirty="0"/>
-              <a:t>【0:35〜1:30（約55秒）】
-筑波大学の理工学群、大学3年、目的は学業・生活費。入力して検索します。進み具合が出ます。結果は、応募できる2件、要確認10件、未確認4件、募集終了7件。要確認には、何を確認するかが付きます。入力を、卒業後の社会人・目的は研究に替えると、出る制度が変わり、目的が違うものは別に分かれます。気になるものは保存して、CSVで持ち帰れます。
-（動画を挿入したら、［再生］タブで「自動」または「クリック時」を選ぶ。撮影時は、動画の音声を使うか、ナレーションをこの原稿で読む）</a:t>
+              <a:t>【0:58–1:48】
+では、使ってみます。
+筑波大学、理工学群、大学3年。目的は、学業と生活費。／検索。
+進み具合が出ます。（動画：待ち時間は短縮）
+結果です。応募できるが2件、要確認が10件、未確認が4件、募集終了が7件。
+募集終了は、★終わっていると、はっきり分かる。要確認には、「何を確かめればいいか」まで書いてあります。
+次は、卒業後の社会人。目的は、研究。【間】出てくる制度が、変わります。留学専用のものは、「目的が違う」と、別に分かれます。
+気になるものは、保存して、CSVで持ち帰れます。
+（動画を挿入したら、［再生］タブで「自動」を選ぶ。自分の声を重ねるなら、動画の音量をミュート）</a:t>
             </a:r>
             <a:endParaRPr lang="en-US" dirty="0"/>
           </a:p>
@@ -956,9 +971,12 @@
           <a:p>
             <a:r>
               <a:rPr lang="en-US" dirty="0"/>
-              <a:t>【1:30〜2:10（約40秒）】
-他の人にも見える共有リストへの追加は、高リスクの操作です。依頼すると承認待ちで止まり、画面に確認ダイアログが出ます。許可できるのは本人だけで、AIは許可できません。許可すると1回だけ実行され、操作の記録に、誰が、いつ、何を、なぜ、が残ります。
-（動画を挿入したら、［再生］タブで「自動」または「クリック時」を選ぶ。撮影時は、動画の音声を使うか、ナレーションをこの原稿で読む）</a:t>
+              <a:t>【1:48–2:23】
+もう一つ。AIに、★やらせてはいけないことが、あります。
+他の人にも見える、共有リストへの追加。頼むと――止まります。承認待ち。
+確認ダイアログが出て、許可できるのは、★本人だけ。AIは、許可できません。
+許可すると、1回だけ実行。そして、「誰が、いつ、何を、なぜ」が、記録に残ります。
+（動画を挿入したら、［再生］タブで「自動」を選ぶ。自分の声を重ねるなら、動画の音量をミュート）</a:t>
             </a:r>
             <a:endParaRPr lang="en-US" dirty="0"/>
           </a:p>
@@ -1046,8 +1064,10 @@
           <a:p>
             <a:r>
               <a:rPr lang="en-US" dirty="0"/>
-              <a:t>【2:10〜2:30（約20秒）】
-構成は、Cloud Run上の単一のADKエージェントと、3つのツール。探し方と判定、安全装置はコードが持ち、AIは読み取りに使います。データはFirestore、権限は専用のサービスアカウントで最小限です。</a:t>
+              <a:t>【2:23–2:41】
+構成は、シンプルです。
+Cloud Runの上に、エージェントは1つ。ツールは3つ。
+探し方も、判定も、安全装置も、コード。AIは、★読み取りだけ。権限は、最小限です。</a:t>
             </a:r>
             <a:endParaRPr lang="en-US" dirty="0"/>
           </a:p>
@@ -1135,8 +1155,10 @@
           <a:p>
             <a:r>
               <a:rPr lang="en-US" dirty="0"/>
-              <a:t>【2:30〜2:50（約20秒）】
-評価です。自動テスト176件、adk eval 7ケースが合格。素のAIとの比較では、見つかる件数は同程度で、差は確かさでした。小さな実験なので、大幅に多く見つける、とは言いません。</a:t>
+              <a:t>【2:41–2:55】
+テストは176件、評価は7ケース、すべて合格。
+素のAIと比べて、見つかる数は、同じくらい。違いは、★確かさです。
+小さな実験なので、「大幅に多い」とは、言いません。</a:t>
             </a:r>
             <a:endParaRPr lang="en-US" dirty="0"/>
           </a:p>
@@ -1224,8 +1246,8 @@
           <a:p>
             <a:r>
               <a:rPr lang="en-US" dirty="0"/>
-              <a:t>【2:50〜3:00（約10秒）】
-応募できる奨学金を、間に合ううちに。拡張として、一覧ページの展開と、検索語の自動選択を進めます。ありがとうございました。</a:t>
+              <a:t>【2:55–3:00】
+応募できる奨学金を、★間に合ううちに。【間】ありがとうございました。</a:t>
             </a:r>
             <a:endParaRPr lang="en-US" dirty="0"/>
           </a:p>

--- a/docs/submission/presentation.pptx
+++ b/docs/submission/presentation.pptx
@@ -511,9 +511,10 @@
           <a:p>
             <a:r>
               <a:rPr lang="en-US" dirty="0"/>
-              <a:t>【0:00–0:08】
-こんにちは。奨学金エージェントです。【間】
-皆さんは、奨学金の応募に、★間に合わなかった――そんな経験、ありませんか？</a:t>
+              <a:t>【0:00–0:15】
+皆さんは、GeminiやClaudeのような生成AIに、調べものを頼んだこと、ありますか？
+最近は、Google検索でも、最初にAIのまとめが出て、★便利ですよね。【間】
+でも、生成AIの検索は、万能ではありません。</a:t>
             </a:r>
             <a:endParaRPr lang="en-US" dirty="0"/>
           </a:p>
@@ -689,12 +690,12 @@
           <a:p>
             <a:r>
               <a:rPr lang="en-US" dirty="0"/>
-              <a:t>【0:08–0:33】
-奨学金は、探すだけで大変です。／大学、財団、自治体。情報は、あちこちに散らばっています。
-じゃあ、生成AIに聞けばいい？【間】それが、そうでもないんです。
-素のAIに「応募できる奨学金を全部教えて」と聞くと、34件の答えが返ってきました。
-そのうち★12件。3分の1は、公式ページを見ると、もう募集終了。
-10月の時点で、全体の★半分が、終わっています。</a:t>
+              <a:t>【0:15–0:50】
+例えば、奨学金。
+私は大学生で、給付型の奨学金を探すんですが、AIに探させると、★5年前の募集を拾ってきたり、すぐ見つかるものを漏らしたり。意外と、うまくいきません。【間】
+なぜか？
+奨学金は、大学・財団・自治体のサイトに、散らばっています。AIは、上位数件しか読まない。古い年度や、募集終了を混ぜる。自分が対象外の条件を、見落とす。
+実測では、素のAIが挙げた34件のうち、★12件。3分の1が、公式ページで見ると、もう募集終了でした。</a:t>
             </a:r>
             <a:endParaRPr lang="en-US" dirty="0"/>
           </a:p>
@@ -782,12 +783,12 @@
           <a:p>
             <a:r>
               <a:rPr lang="en-US" dirty="0"/>
-              <a:t>【0:33–0:58】
+              <a:t>【0:50–1:15】
 だから、役割を分けました。
-探すのは、AI。【間】でも、「応募できるか」を決めるのは、★AIではありません。
-公式ページを読んで、条件を、原文の引用つきで抜き出す。／その引用が本物か、コードが確かめて、判定します。
-確認できないものは、★隠さない。「要確認」「未確認」として、分けて出します。
-そして、AIの操作は、検査と、人間の承認と、記録で、守ります。</a:t>
+探すのは、AI。【間】でも、応募できるかの判定は、公式ページを読んだうえで、★コードが行います。
+条件は、原文の引用つきで抜き出して、その引用が本物か、コードが照合。作り話は、判定に使いません。
+応募できる、要確認、未確認、募集終了。確認できないものは、★隠しません。
+高校生から社会人まで、学業・留学・研究・活動に、対応します。</a:t>
             </a:r>
             <a:endParaRPr lang="en-US" dirty="0"/>
           </a:p>
@@ -875,13 +876,13 @@
           <a:p>
             <a:r>
               <a:rPr lang="en-US" dirty="0"/>
-              <a:t>【0:58–1:48】
+              <a:t>【1:15–2:00】
 では、使ってみます。
 筑波大学、理工学群、大学3年。目的は、学業と生活費。／検索。
-進み具合が出ます。（動画：待ち時間は短縮）
+（動画：進み具合が出る。待ち時間は短縮）
 結果です。応募できるが2件、要確認が10件、未確認が4件、募集終了が7件。
 募集終了は、★終わっていると、はっきり分かる。要確認には、「何を確かめればいいか」まで書いてあります。
-次は、卒業後の社会人。目的は、研究。【間】出てくる制度が、変わります。留学専用のものは、「目的が違う」と、別に分かれます。
+次は、卒業後の社会人、目的は研究。【間】出てくる制度が、変わります。
 気になるものは、保存して、CSVで持ち帰れます。
 （動画を挿入したら、［再生］タブで「自動」を選ぶ。自分の声を重ねるなら、動画の音量をミュート）</a:t>
             </a:r>
@@ -971,11 +972,11 @@
           <a:p>
             <a:r>
               <a:rPr lang="en-US" dirty="0"/>
-              <a:t>【1:48–2:23】
+              <a:t>【2:00–2:30】
 もう一つ。AIに、★やらせてはいけないことが、あります。
 他の人にも見える、共有リストへの追加。頼むと――止まります。承認待ち。
-確認ダイアログが出て、許可できるのは、★本人だけ。AIは、許可できません。
-許可すると、1回だけ実行。そして、「誰が、いつ、何を、なぜ」が、記録に残ります。
+許可できるのは、★本人だけ。AIは、許可できません。
+許可すると、1回だけ実行。「誰が、いつ、何を、なぜ」が、記録に残ります。
 （動画を挿入したら、［再生］タブで「自動」を選ぶ。自分の声を重ねるなら、動画の音量をミュート）</a:t>
             </a:r>
             <a:endParaRPr lang="en-US" dirty="0"/>
@@ -1064,10 +1065,9 @@
           <a:p>
             <a:r>
               <a:rPr lang="en-US" dirty="0"/>
-              <a:t>【2:23–2:41】
-構成は、シンプルです。
-Cloud Runの上に、エージェントは1つ。ツールは3つ。
-探し方も、判定も、安全装置も、コード。AIは、★読み取りだけ。権限は、最小限です。</a:t>
+              <a:t>【2:30–2:42】
+構成は、シンプルです。Cloud Runの上に、エージェントは1つ、ツールは3つ。
+探し方も、判定も、安全装置も、コード。AIは、★読み取りだけ。</a:t>
             </a:r>
             <a:endParaRPr lang="en-US" dirty="0"/>
           </a:p>
@@ -1155,7 +1155,7 @@
           <a:p>
             <a:r>
               <a:rPr lang="en-US" dirty="0"/>
-              <a:t>【2:41–2:55】
+              <a:t>【2:42–2:55】
 テストは176件、評価は7ケース、すべて合格。
 素のAIと比べて、見つかる数は、同じくらい。違いは、★確かさです。
 小さな実験なので、「大幅に多い」とは、言いません。</a:t>

--- a/docs/submission/presentation.pptx
+++ b/docs/submission/presentation.pptx
@@ -15,9 +15,10 @@
     <p:sldId id="263" r:id="rId9"/>
     <p:sldId id="264" r:id="rId10"/>
     <p:sldId id="265" r:id="rId11"/>
+    <p:sldId id="266" r:id="rId12"/>
   </p:sldIdLst>
   <p:notesMasterIdLst>
-    <p:notesMasterId r:id="rId12"/>
+    <p:notesMasterId r:id="rId13"/>
   </p:notesMasterIdLst>
   <p:sldSz cx="12192000" cy="6858000"/>
   <p:notesSz cx="6858000" cy="12192000"/>
@@ -644,6 +645,94 @@
 </p:notes>
 </file>
 
+<file path=ppt/notesSlides/notesSlide11.xml><?xml version="1.0" encoding="utf-8"?>
+<p:notes xmlns:a="http://schemas.openxmlformats.org/drawingml/2006/main" xmlns:r="http://schemas.openxmlformats.org/officeDocument/2006/relationships" xmlns:p="http://schemas.openxmlformats.org/presentationml/2006/main">
+  <p:cSld>
+    <p:spTree>
+      <p:nvGrpSpPr>
+        <p:cNvPr id="1" name=""/>
+        <p:cNvGrpSpPr/>
+        <p:nvPr/>
+      </p:nvGrpSpPr>
+      <p:grpSpPr>
+        <a:xfrm>
+          <a:off x="0" y="0"/>
+          <a:ext cx="0" cy="0"/>
+          <a:chOff x="0" y="0"/>
+          <a:chExt cx="0" cy="0"/>
+        </a:xfrm>
+      </p:grpSpPr>
+      <p:sp>
+        <p:nvSpPr>
+          <p:cNvPr id="2" name="Slide Image Placeholder 1"/>
+          <p:cNvSpPr>
+            <a:spLocks noGrp="1" noRot="1" noChangeAspect="1"/>
+          </p:cNvSpPr>
+          <p:nvPr>
+            <p:ph type="sldImg"/>
+          </p:nvPr>
+        </p:nvSpPr>
+        <p:spPr/>
+      </p:sp>
+      <p:sp>
+        <p:nvSpPr>
+          <p:cNvPr id="3" name="Notes Placeholder 2"/>
+          <p:cNvSpPr>
+            <a:spLocks noGrp="1"/>
+          </p:cNvSpPr>
+          <p:nvPr>
+            <p:ph type="body" idx="1"/>
+          </p:nvPr>
+        </p:nvSpPr>
+        <p:spPr/>
+        <p:txBody>
+          <a:bodyPr/>
+          <a:lstStyle/>
+          <a:p>
+            <a:r>
+              <a:rPr lang="en-US" dirty="0"/>
+              <a:t>予備。質問が出たとき用。</a:t>
+            </a:r>
+            <a:endParaRPr lang="en-US" dirty="0"/>
+          </a:p>
+        </p:txBody>
+      </p:sp>
+      <p:sp>
+        <p:nvSpPr>
+          <p:cNvPr id="4" name="Slide Number Placeholder 3"/>
+          <p:cNvSpPr>
+            <a:spLocks noGrp="1"/>
+          </p:cNvSpPr>
+          <p:nvPr>
+            <p:ph type="sldNum" sz="quarter" idx="10"/>
+          </p:nvPr>
+        </p:nvSpPr>
+        <p:spPr/>
+        <p:txBody>
+          <a:bodyPr/>
+          <a:lstStyle/>
+          <a:p>
+            <a:fld id="{F7021451-1387-4CA6-816F-3879F97B5CBC}" type="slidenum">
+              <a:rPr lang="en-US"/>
+              <a:t>11</a:t>
+            </a:fld>
+            <a:endParaRPr lang="en-US"/>
+          </a:p>
+        </p:txBody>
+      </p:sp>
+    </p:spTree>
+    <p:extLst>
+      <p:ext uri="{BB962C8B-B14F-4D97-AF65-F5344CB8AC3E}">
+        <p14:creationId xmlns:p14="http://schemas.microsoft.com/office/powerpoint/2010/main" val="1024086991"/>
+      </p:ext>
+    </p:extLst>
+  </p:cSld>
+  <p:clrMapOvr>
+    <a:masterClrMapping/>
+  </p:clrMapOvr>
+</p:notes>
+</file>
+
 <file path=ppt/notesSlides/notesSlide2.xml><?xml version="1.0" encoding="utf-8"?>
 <p:notes xmlns:a="http://schemas.openxmlformats.org/drawingml/2006/main" xmlns:r="http://schemas.openxmlformats.org/officeDocument/2006/relationships" xmlns:p="http://schemas.openxmlformats.org/presentationml/2006/main">
   <p:cSld>
@@ -690,12 +779,10 @@
           <a:p>
             <a:r>
               <a:rPr lang="en-US" dirty="0"/>
-              <a:t>【0:15–0:50】
+              <a:t>【0:15–0:32】
 例えば、奨学金。
 私は大学生で、給付型の奨学金を探すんですが、AIに探させると、★5年前の募集を拾ってきたり、すぐ見つかるものを漏らしたり。意外と、うまくいきません。【間】
-なぜか？
-奨学金は、大学・財団・自治体のサイトに、散らばっています。AIは、上位数件しか読まない。古い年度や、募集終了を混ぜる。自分が対象外の条件を、見落とす。
-実測では、素のAIが挙げた34件のうち、★12件。3分の1が、公式ページで見ると、もう募集終了でした。</a:t>
+なぜか？</a:t>
             </a:r>
             <a:endParaRPr lang="en-US" dirty="0"/>
           </a:p>
@@ -783,12 +870,9 @@
           <a:p>
             <a:r>
               <a:rPr lang="en-US" dirty="0"/>
-              <a:t>【0:50–1:15】
-だから、役割を分けました。
-探すのは、AI。【間】でも、応募できるかの判定は、公式ページを読んだうえで、★コードが行います。
-条件は、原文の引用つきで抜き出して、その引用が本物か、コードが照合。作り話は、判定に使いません。
-応募できる、要確認、未確認、募集終了。確認できないものは、★隠しません。
-高校生から社会人まで、学業・留学・研究・活動に、対応します。</a:t>
+              <a:t>【0:32–0:50】
+奨学金は、大学・財団・自治体のサイトに、散らばっています。AIは、上位数件しか読まない。古い年度や、募集終了を混ぜる。自分が対象外の条件を、見落とす。
+実測では、素のAIが挙げた34件のうち、★12件。3分の1が、公式ページで見ると、もう募集終了でした。</a:t>
             </a:r>
             <a:endParaRPr lang="en-US" dirty="0"/>
           </a:p>
@@ -876,15 +960,12 @@
           <a:p>
             <a:r>
               <a:rPr lang="en-US" dirty="0"/>
-              <a:t>【1:15–2:00】
-では、使ってみます。
-筑波大学、理工学群、大学3年。目的は、学業と生活費。／検索。
-（動画：進み具合が出る。待ち時間は短縮）
-結果です。応募できるが2件、要確認が10件、未確認が4件、募集終了が7件。
-募集終了は、★終わっていると、はっきり分かる。要確認には、「何を確かめればいいか」まで書いてあります。
-次は、卒業後の社会人、目的は研究。【間】出てくる制度が、変わります。
-気になるものは、保存して、CSVで持ち帰れます。
-（動画を挿入したら、［再生］タブで「自動」を選ぶ。自分の声を重ねるなら、動画の音量をミュート）</a:t>
+              <a:t>【0:50–1:15】
+だから、役割を分けました。
+探すのは、AI。【間】でも、応募できるかの判定は、公式ページを読んだうえで、★コードが行います。
+条件は、原文の引用つきで抜き出して、その引用が本物か、コードが照合。作り話は、判定に使いません。
+応募できる、要確認、未確認、募集終了。確認できないものは、★隠しません。
+高校生から社会人まで、学業・留学・研究・活動に、対応します。</a:t>
             </a:r>
             <a:endParaRPr lang="en-US" dirty="0"/>
           </a:p>
@@ -972,11 +1053,14 @@
           <a:p>
             <a:r>
               <a:rPr lang="en-US" dirty="0"/>
-              <a:t>【2:00–2:30】
-もう一つ。AIに、★やらせてはいけないことが、あります。
-他の人にも見える、共有リストへの追加。頼むと――止まります。承認待ち。
-許可できるのは、★本人だけ。AIは、許可できません。
-許可すると、1回だけ実行。「誰が、いつ、何を、なぜ」が、記録に残ります。
+              <a:t>【1:15–2:00】
+では、使ってみます。
+筑波大学、理工学群、大学3年。目的は、学業と生活費。／検索。
+（動画：進み具合が出る。待ち時間は短縮）
+結果です。応募できるが2件、要確認が10件、未確認が4件、募集終了が7件。
+募集終了は、★終わっていると、はっきり分かる。要確認には、「何を確かめればいいか」まで書いてあります。
+次は、卒業後の社会人、目的は研究。【間】出てくる制度が、変わります。
+気になるものは、保存して、CSVで持ち帰れます。
 （動画を挿入したら、［再生］タブで「自動」を選ぶ。自分の声を重ねるなら、動画の音量をミュート）</a:t>
             </a:r>
             <a:endParaRPr lang="en-US" dirty="0"/>
@@ -1065,9 +1149,12 @@
           <a:p>
             <a:r>
               <a:rPr lang="en-US" dirty="0"/>
-              <a:t>【2:30–2:42】
-構成は、シンプルです。Cloud Runの上に、エージェントは1つ、ツールは3つ。
-探し方も、判定も、安全装置も、コード。AIは、★読み取りだけ。</a:t>
+              <a:t>【2:00–2:30】
+もう一つ。AIに、★やらせてはいけないことが、あります。
+他の人にも見える、共有リストへの追加。頼むと――止まります。承認待ち。
+許可できるのは、★本人だけ。AIは、許可できません。
+許可すると、1回だけ実行。「誰が、いつ、何を、なぜ」が、記録に残ります。
+（動画を挿入したら、［再生］タブで「自動」を選ぶ。自分の声を重ねるなら、動画の音量をミュート）</a:t>
             </a:r>
             <a:endParaRPr lang="en-US" dirty="0"/>
           </a:p>
@@ -1155,10 +1242,9 @@
           <a:p>
             <a:r>
               <a:rPr lang="en-US" dirty="0"/>
-              <a:t>【2:42–2:55】
-テストは176件、評価は7ケース、すべて合格。
-素のAIと比べて、見つかる数は、同じくらい。違いは、★確かさです。
-小さな実験なので、「大幅に多い」とは、言いません。</a:t>
+              <a:t>【2:30–2:42】
+構成は、シンプルです。Cloud Runの上に、エージェントは1つ、ツールは3つ。
+探し方も、判定も、安全装置も、コード。AIは、★読み取りだけ。</a:t>
             </a:r>
             <a:endParaRPr lang="en-US" dirty="0"/>
           </a:p>
@@ -1246,8 +1332,10 @@
           <a:p>
             <a:r>
               <a:rPr lang="en-US" dirty="0"/>
-              <a:t>【2:55–3:00】
-応募できる奨学金を、★間に合ううちに。【間】ありがとうございました。</a:t>
+              <a:t>【2:42–2:55】
+テストは176件、評価は7ケース、すべて合格。
+素のAIと比べて、見つかる数は、同じくらい。違いは、★確かさです。
+小さな実験なので、「大幅に多い」とは、言いません。</a:t>
             </a:r>
             <a:endParaRPr lang="en-US" dirty="0"/>
           </a:p>
@@ -1335,7 +1423,8 @@
           <a:p>
             <a:r>
               <a:rPr lang="en-US" dirty="0"/>
-              <a:t>予備。質問が出たとき用。</a:t>
+              <a:t>【2:55–3:00】
+応募できる奨学金を、★間に合ううちに。【間】ありがとうございました。</a:t>
             </a:r>
             <a:endParaRPr lang="en-US" dirty="0"/>
           </a:p>
@@ -1985,8 +2074,8 @@
         </p:nvSpPr>
         <p:spPr>
           <a:xfrm>
-            <a:off x="731520" y="1097280"/>
-            <a:ext cx="10515600" cy="365760"/>
+            <a:off x="731520" y="1188720"/>
+            <a:ext cx="10789920" cy="3108960"/>
           </a:xfrm>
           <a:prstGeom prst="rect">
             <a:avLst/>
@@ -2002,46 +2091,24 @@
               <a:buNone/>
             </a:pPr>
             <a:r>
-              <a:rPr lang="en-US" sz="1600" dirty="0">
-                <a:solidFill>
-                  <a:srgbClr val="CADCFC"/>
+              <a:rPr lang="en-US" sz="5600" b="1" dirty="0">
+                <a:solidFill>
+                  <a:schemeClr val="bg1"/>
                 </a:solidFill>
                 <a:latin typeface="Yu Gothic" pitchFamily="34" charset="0"/>
                 <a:ea typeface="Yu Gothic" pitchFamily="34" charset="-122"/>
                 <a:cs typeface="Yu Gothic" pitchFamily="34" charset="-120"/>
               </a:rPr>
-              <a:t>第5回 Agentic AI Hackathon with Google Cloud</a:t>
-            </a:r>
-            <a:endParaRPr lang="en-US" sz="1600" dirty="0"/>
-          </a:p>
-        </p:txBody>
-      </p:sp>
-      <p:sp>
-        <p:nvSpPr>
-          <p:cNvPr id="3" name="Text 1"/>
-          <p:cNvSpPr txBox="1"/>
-          <p:nvPr/>
-        </p:nvSpPr>
-        <p:spPr>
-          <a:xfrm>
-            <a:off x="731520" y="1828800"/>
-            <a:ext cx="10515600" cy="1188720"/>
-          </a:xfrm>
-          <a:prstGeom prst="rect">
-            <a:avLst/>
-          </a:prstGeom>
-          <a:noFill/>
-          <a:ln/>
-        </p:spPr>
-        <p:txBody>
-          <a:bodyPr wrap="square" lIns="0" tIns="0" rIns="0" bIns="0" rtlCol="0" anchor="ctr"/>
-          <a:lstStyle/>
+              <a:t>生成AIに、</a:t>
+            </a:r>
+            <a:endParaRPr lang="en-US" sz="5600" dirty="0"/>
+          </a:p>
           <a:p>
             <a:pPr indent="0" marL="0">
               <a:buNone/>
             </a:pPr>
             <a:r>
-              <a:rPr lang="en-US" sz="6000" b="1" dirty="0">
+              <a:rPr lang="en-US" sz="5600" b="1" dirty="0">
                 <a:solidFill>
                   <a:schemeClr val="bg1"/>
                 </a:solidFill>
@@ -2049,88 +2116,39 @@
                 <a:ea typeface="Yu Gothic" pitchFamily="34" charset="-122"/>
                 <a:cs typeface="Yu Gothic" pitchFamily="34" charset="-120"/>
               </a:rPr>
-              <a:t>奨学金エージェント</a:t>
-            </a:r>
-            <a:endParaRPr lang="en-US" sz="6000" dirty="0"/>
-          </a:p>
-        </p:txBody>
-      </p:sp>
-      <p:sp>
-        <p:nvSpPr>
-          <p:cNvPr id="4" name="Text 2"/>
-          <p:cNvSpPr txBox="1"/>
-          <p:nvPr/>
-        </p:nvSpPr>
-        <p:spPr>
-          <a:xfrm>
-            <a:off x="731520" y="3154680"/>
-            <a:ext cx="10515600" cy="640080"/>
-          </a:xfrm>
-          <a:prstGeom prst="rect">
-            <a:avLst/>
-          </a:prstGeom>
-          <a:noFill/>
-          <a:ln/>
-        </p:spPr>
-        <p:txBody>
-          <a:bodyPr wrap="square" lIns="0" tIns="0" rIns="0" bIns="0" rtlCol="0" anchor="ctr"/>
-          <a:lstStyle/>
+              <a:t>調べものを頼んだこと、</a:t>
+            </a:r>
+            <a:endParaRPr lang="en-US" sz="5600" dirty="0"/>
+          </a:p>
           <a:p>
             <a:pPr indent="0" marL="0">
               <a:buNone/>
             </a:pPr>
             <a:r>
-              <a:rPr lang="en-US" sz="2800" dirty="0">
-                <a:solidFill>
-                  <a:srgbClr val="EADDFF"/>
+              <a:rPr lang="en-US" sz="5600" b="1" dirty="0">
+                <a:solidFill>
+                  <a:schemeClr val="bg1"/>
                 </a:solidFill>
                 <a:latin typeface="Yu Gothic" pitchFamily="34" charset="0"/>
                 <a:ea typeface="Yu Gothic" pitchFamily="34" charset="-122"/>
                 <a:cs typeface="Yu Gothic" pitchFamily="34" charset="-120"/>
               </a:rPr>
-              <a:t>応募できる奨学金・助成金を、探して「確かめて」届ける</a:t>
-            </a:r>
-            <a:endParaRPr lang="en-US" sz="2800" dirty="0"/>
-          </a:p>
-        </p:txBody>
-      </p:sp>
-      <p:sp>
-        <p:nvSpPr>
-          <p:cNvPr id="5" name="チップ1"/>
-          <p:cNvSpPr/>
-          <p:nvPr/>
-        </p:nvSpPr>
-        <p:spPr>
-          <a:xfrm>
-            <a:off x="731520" y="4297680"/>
-            <a:ext cx="2560320" cy="502920"/>
-          </a:xfrm>
-          <a:prstGeom prst="roundRect">
-            <a:avLst>
-              <a:gd name="adj" fmla="val 49091"/>
-            </a:avLst>
-          </a:prstGeom>
-          <a:solidFill>
-            <a:srgbClr val="381E72"/>
-          </a:solidFill>
-          <a:ln w="12700">
-            <a:solidFill>
-              <a:srgbClr val="6750A4"/>
-            </a:solidFill>
-            <a:prstDash val="solid"/>
-          </a:ln>
-        </p:spPr>
-      </p:sp>
-      <p:sp>
-        <p:nvSpPr>
-          <p:cNvPr id="6" name="Text 4"/>
+              <a:t>ありますか？</a:t>
+            </a:r>
+            <a:endParaRPr lang="en-US" sz="5600" dirty="0"/>
+          </a:p>
+        </p:txBody>
+      </p:sp>
+      <p:sp>
+        <p:nvSpPr>
+          <p:cNvPr id="3" name="Text 1"/>
           <p:cNvSpPr txBox="1"/>
           <p:nvPr/>
         </p:nvSpPr>
         <p:spPr>
           <a:xfrm>
-            <a:off x="731520" y="4297680"/>
-            <a:ext cx="2560320" cy="502920"/>
+            <a:off x="731520" y="4846320"/>
+            <a:ext cx="7315200" cy="548640"/>
           </a:xfrm>
           <a:prstGeom prst="rect">
             <a:avLst/>
@@ -2142,11 +2160,11 @@
           <a:bodyPr wrap="square" lIns="0" tIns="0" rIns="0" bIns="0" rtlCol="0" anchor="ctr"/>
           <a:lstStyle/>
           <a:p>
-            <a:pPr algn="ctr" indent="0" marL="0">
+            <a:pPr indent="0" marL="0">
               <a:buNone/>
             </a:pPr>
             <a:r>
-              <a:rPr lang="en-US" sz="1600" dirty="0">
+              <a:rPr lang="en-US" sz="2800" b="1" dirty="0">
                 <a:solidFill>
                   <a:srgbClr val="EADDFF"/>
                 </a:solidFill>
@@ -2154,49 +2172,22 @@
                 <a:ea typeface="Yu Gothic" pitchFamily="34" charset="-122"/>
                 <a:cs typeface="Yu Gothic" pitchFamily="34" charset="-120"/>
               </a:rPr>
-              <a:t>高校生〜社会人</a:t>
-            </a:r>
-            <a:endParaRPr lang="en-US" sz="1600" dirty="0"/>
-          </a:p>
-        </p:txBody>
-      </p:sp>
-      <p:sp>
-        <p:nvSpPr>
-          <p:cNvPr id="7" name="チップ2"/>
-          <p:cNvSpPr/>
-          <p:nvPr/>
-        </p:nvSpPr>
-        <p:spPr>
-          <a:xfrm>
-            <a:off x="3520440" y="4297680"/>
-            <a:ext cx="4754880" cy="502920"/>
-          </a:xfrm>
-          <a:prstGeom prst="roundRect">
-            <a:avLst>
-              <a:gd name="adj" fmla="val 49091"/>
-            </a:avLst>
-          </a:prstGeom>
-          <a:solidFill>
-            <a:srgbClr val="381E72"/>
-          </a:solidFill>
-          <a:ln w="12700">
-            <a:solidFill>
-              <a:srgbClr val="6750A4"/>
-            </a:solidFill>
-            <a:prstDash val="solid"/>
-          </a:ln>
-        </p:spPr>
-      </p:sp>
-      <p:sp>
-        <p:nvSpPr>
-          <p:cNvPr id="8" name="Text 6"/>
+              <a:t>奨学金エージェント</a:t>
+            </a:r>
+            <a:endParaRPr lang="en-US" sz="2800" dirty="0"/>
+          </a:p>
+        </p:txBody>
+      </p:sp>
+      <p:sp>
+        <p:nvSpPr>
+          <p:cNvPr id="4" name="Text 2"/>
           <p:cNvSpPr txBox="1"/>
           <p:nvPr/>
         </p:nvSpPr>
         <p:spPr>
           <a:xfrm>
-            <a:off x="3520440" y="4297680"/>
-            <a:ext cx="4754880" cy="502920"/>
+            <a:off x="731520" y="5440680"/>
+            <a:ext cx="10789920" cy="365760"/>
           </a:xfrm>
           <a:prstGeom prst="rect">
             <a:avLst/>
@@ -2208,87 +2199,21 @@
           <a:bodyPr wrap="square" lIns="0" tIns="0" rIns="0" bIns="0" rtlCol="0" anchor="ctr"/>
           <a:lstStyle/>
           <a:p>
-            <a:pPr algn="ctr" indent="0" marL="0">
+            <a:pPr indent="0" marL="0">
               <a:buNone/>
             </a:pPr>
             <a:r>
-              <a:rPr lang="en-US" sz="1600" dirty="0">
-                <a:solidFill>
-                  <a:srgbClr val="EADDFF"/>
+              <a:rPr lang="en-US" sz="1400" dirty="0">
+                <a:solidFill>
+                  <a:srgbClr val="CADCFC"/>
                 </a:solidFill>
                 <a:latin typeface="Yu Gothic" pitchFamily="34" charset="0"/>
                 <a:ea typeface="Yu Gothic" pitchFamily="34" charset="-122"/>
                 <a:cs typeface="Yu Gothic" pitchFamily="34" charset="-120"/>
               </a:rPr>
-              <a:t>学業・留学・研究・プロジェクト</a:t>
-            </a:r>
-            <a:endParaRPr lang="en-US" sz="1600" dirty="0"/>
-          </a:p>
-        </p:txBody>
-      </p:sp>
-      <p:sp>
-        <p:nvSpPr>
-          <p:cNvPr id="9" name="チップ3"/>
-          <p:cNvSpPr/>
-          <p:nvPr/>
-        </p:nvSpPr>
-        <p:spPr>
-          <a:xfrm>
-            <a:off x="8503920" y="4297680"/>
-            <a:ext cx="2834640" cy="502920"/>
-          </a:xfrm>
-          <a:prstGeom prst="roundRect">
-            <a:avLst>
-              <a:gd name="adj" fmla="val 49091"/>
-            </a:avLst>
-          </a:prstGeom>
-          <a:solidFill>
-            <a:srgbClr val="381E72"/>
-          </a:solidFill>
-          <a:ln w="12700">
-            <a:solidFill>
-              <a:srgbClr val="6750A4"/>
-            </a:solidFill>
-            <a:prstDash val="solid"/>
-          </a:ln>
-        </p:spPr>
-      </p:sp>
-      <p:sp>
-        <p:nvSpPr>
-          <p:cNvPr id="10" name="Text 8"/>
-          <p:cNvSpPr txBox="1"/>
-          <p:nvPr/>
-        </p:nvSpPr>
-        <p:spPr>
-          <a:xfrm>
-            <a:off x="8503920" y="4297680"/>
-            <a:ext cx="2834640" cy="502920"/>
-          </a:xfrm>
-          <a:prstGeom prst="rect">
-            <a:avLst/>
-          </a:prstGeom>
-          <a:noFill/>
-          <a:ln/>
-        </p:spPr>
-        <p:txBody>
-          <a:bodyPr wrap="square" lIns="0" tIns="0" rIns="0" bIns="0" rtlCol="0" anchor="ctr"/>
-          <a:lstStyle/>
-          <a:p>
-            <a:pPr algn="ctr" indent="0" marL="0">
-              <a:buNone/>
-            </a:pPr>
-            <a:r>
-              <a:rPr lang="en-US" sz="1600" dirty="0">
-                <a:solidFill>
-                  <a:srgbClr val="EADDFF"/>
-                </a:solidFill>
-                <a:latin typeface="Yu Gothic" pitchFamily="34" charset="0"/>
-                <a:ea typeface="Yu Gothic" pitchFamily="34" charset="-122"/>
-                <a:cs typeface="Yu Gothic" pitchFamily="34" charset="-120"/>
-              </a:rPr>
-              <a:t>公式ページで確認</a:t>
-            </a:r>
-            <a:endParaRPr lang="en-US" sz="1600" dirty="0"/>
+              <a:t>応募できる奨学金を、探して「確かめて」届ける　｜　第5回 Agentic AI Hackathon with Google Cloud</a:t>
+            </a:r>
+            <a:endParaRPr lang="en-US" sz="1400" dirty="0"/>
           </a:p>
         </p:txBody>
       </p:sp>
@@ -2394,7 +2319,7 @@
                   <a:schemeClr val="tx2"/>
                 </a:solidFill>
               </a:rPr>
-              <a:t>付録: 安全装置と人間の承認</a:t>
+              <a:t>付録: 検索の流れ（探すのは AI、判定はコード）</a:t>
             </a:r>
             <a:endParaRPr lang="en-US" sz="3400" dirty="0"/>
           </a:p>
@@ -2402,7 +2327,7 @@
       </p:sp>
       <p:pic>
         <p:nvPicPr>
-          <p:cNvPr id="3" name="付録: 安全装置と人間の承認" descr="C:\Users\shohe\Agentic AI Hackathon\.claude\worktrees\progress-check-3e6fdb\docs\submission\architecture_safety.png">    </p:cNvPr>
+          <p:cNvPr id="3" name="付録: 検索の流れ（探すのは AI、判定はコード）" descr="C:\Users\shohe\Agentic AI Hackathon\.claude\worktrees\progress-check-3e6fdb\docs\submission\architecture_pipeline.png">    </p:cNvPr>
           <p:cNvPicPr>
             <a:picLocks noChangeAspect="1"/>
           </p:cNvPicPr>
@@ -2417,7 +2342,7 @@
         <p:spPr>
           <a:xfrm>
             <a:off x="1737360" y="1371600"/>
-            <a:ext cx="8595360" cy="4727448"/>
+            <a:ext cx="8595360" cy="4837176"/>
           </a:xfrm>
           <a:prstGeom prst="rect">
             <a:avLst/>
@@ -2464,6 +2389,138 @@
             <a:fld id="{F7021451-1387-4CA6-816F-3879F97B5CBC}" type="slidenum">
               <a:rPr b="0" lang="en-US"/>
               <a:t>10</a:t>
+            </a:fld>
+            <a:endParaRPr lang="en-US"/>
+          </a:p>
+        </p:txBody>
+      </p:sp>
+    </p:spTree>
+  </p:cSld>
+  <p:clrMapOvr>
+    <a:masterClrMapping/>
+  </p:clrMapOvr>
+</p:sld>
+</file>
+
+<file path=ppt/slides/slide11.xml><?xml version="1.0" encoding="utf-8"?>
+<p:sld xmlns:a="http://schemas.openxmlformats.org/drawingml/2006/main" xmlns:r="http://schemas.openxmlformats.org/officeDocument/2006/relationships" xmlns:p="http://schemas.openxmlformats.org/presentationml/2006/main">
+  <p:cSld name="Slide 11">
+    <p:spTree>
+      <p:nvGrpSpPr>
+        <p:cNvPr id="1" name=""/>
+        <p:cNvGrpSpPr/>
+        <p:nvPr/>
+      </p:nvGrpSpPr>
+      <p:grpSpPr>
+        <a:xfrm>
+          <a:off x="0" y="0"/>
+          <a:ext cx="0" cy="0"/>
+          <a:chOff x="0" y="0"/>
+          <a:chExt cx="0" cy="0"/>
+        </a:xfrm>
+      </p:grpSpPr>
+      <p:sp>
+        <p:nvSpPr>
+          <p:cNvPr id="2" name="Text 1"/>
+          <p:cNvSpPr/>
+          <p:nvPr>
+            <p:ph idx="101" type="title" hasCustomPrompt="1"/>
+          </p:nvPr>
+        </p:nvSpPr>
+        <p:spPr>
+          <a:xfrm>
+            <a:off x="548640" y="365760"/>
+            <a:ext cx="11064240" cy="868680"/>
+          </a:xfrm>
+          <a:prstGeom prst="rect">
+            <a:avLst/>
+          </a:prstGeom>
+          <a:noFill/>
+          <a:ln/>
+        </p:spPr>
+        <p:txBody>
+          <a:bodyPr wrap="square" lIns="0" tIns="0" rIns="0" bIns="0" rtlCol="0" anchor="ctr"/>
+          <a:lstStyle/>
+          <a:p>
+            <a:pPr algn="l" indent="0" marL="0">
+              <a:buNone/>
+            </a:pPr>
+            <a:r>
+              <a:rPr lang="en-US" sz="3400" b="1" dirty="0">
+                <a:solidFill>
+                  <a:schemeClr val="tx2"/>
+                </a:solidFill>
+              </a:rPr>
+              <a:t>付録: 安全装置と人間の承認</a:t>
+            </a:r>
+            <a:endParaRPr lang="en-US" sz="3400" dirty="0"/>
+          </a:p>
+        </p:txBody>
+      </p:sp>
+      <p:pic>
+        <p:nvPicPr>
+          <p:cNvPr id="3" name="付録: 安全装置と人間の承認" descr="C:\Users\shohe\Agentic AI Hackathon\.claude\worktrees\progress-check-3e6fdb\docs\submission\architecture_safety.png">    </p:cNvPr>
+          <p:cNvPicPr>
+            <a:picLocks noChangeAspect="1"/>
+          </p:cNvPicPr>
+          <p:nvPr/>
+        </p:nvPicPr>
+        <p:blipFill>
+          <a:blip r:embed="rId1"/>
+          <a:stretch>
+            <a:fillRect/>
+          </a:stretch>
+        </p:blipFill>
+        <p:spPr>
+          <a:xfrm>
+            <a:off x="1737360" y="1371600"/>
+            <a:ext cx="8595360" cy="4727448"/>
+          </a:xfrm>
+          <a:prstGeom prst="rect">
+            <a:avLst/>
+          </a:prstGeom>
+        </p:spPr>
+      </p:pic>
+      <p:sp>
+        <p:nvSpPr>
+          <p:cNvPr id="25" name="Slide Number Placeholder 0"/>
+          <p:cNvSpPr>
+            <a:spLocks noGrp="1"/>
+          </p:cNvSpPr>
+          <p:nvPr>
+            <p:ph type="sldNum" sz="quarter" idx="4294967295"/>
+          </p:nvPr>
+        </p:nvSpPr>
+        <p:spPr>
+          <a:xfrm>
+            <a:off x="11155680" y="6400800"/>
+            <a:ext cx="731520" cy="274320"/>
+          </a:xfrm>
+          <a:prstGeom prst="rect">
+            <a:avLst/>
+          </a:prstGeom>
+          <a:extLst>
+            <a:ext uri="{C572A759-6A51-4108-AA02-DFA0A04FC94B}">
+              <ma14:wrappingTextBoxFlag xmlns:ma14="http://schemas.microsoft.com/office/mac/drawingml/2011/main" val="0"/>
+            </a:ext>
+          </a:extLst>
+        </p:spPr>
+        <p:txBody>
+          <a:bodyPr/>
+          <a:lstStyle>
+            <a:lvl1pPr>
+              <a:defRPr sz="1000">
+                <a:solidFill>
+                  <a:schemeClr val="accent6"/>
+                </a:solidFill>
+              </a:defRPr>
+            </a:lvl1pPr>
+          </a:lstStyle>
+          <a:p>
+            <a:pPr algn="r"/>
+            <a:fld id="{F7021451-1387-4CA6-816F-3879F97B5CBC}" type="slidenum">
+              <a:rPr b="0" lang="en-US"/>
+              <a:t>11</a:t>
             </a:fld>
             <a:endParaRPr lang="en-US"/>
           </a:p>
@@ -2526,7 +2583,7 @@
                   <a:schemeClr val="tx2"/>
                 </a:solidFill>
               </a:rPr>
-              <a:t>生成AIに「全部教えて」と聞くと、募集終了が混ざる</a:t>
+              <a:t>大学生の私が、AIに奨学金を探させると…</a:t>
             </a:r>
             <a:endParaRPr lang="en-US" sz="3400" dirty="0"/>
           </a:p>
@@ -2534,18 +2591,18 @@
       </p:sp>
       <p:sp>
         <p:nvSpPr>
-          <p:cNvPr id="3" name="数字カード1"/>
+          <p:cNvPr id="3" name="体験カード1"/>
           <p:cNvSpPr/>
           <p:nvPr/>
         </p:nvSpPr>
         <p:spPr>
           <a:xfrm>
-            <a:off x="548640" y="1463040"/>
-            <a:ext cx="5120640" cy="2148840"/>
+            <a:off x="548640" y="1554480"/>
+            <a:ext cx="11064240" cy="1554480"/>
           </a:xfrm>
           <a:prstGeom prst="roundRect">
             <a:avLst>
-              <a:gd name="adj" fmla="val 6383"/>
+              <a:gd name="adj" fmla="val 8824"/>
             </a:avLst>
           </a:prstGeom>
           <a:solidFill>
@@ -2561,14 +2618,63 @@
       </p:sp>
       <p:sp>
         <p:nvSpPr>
-          <p:cNvPr id="4" name="Text 2"/>
+          <p:cNvPr id="4" name="体験アイコン1 円"/>
+          <p:cNvSpPr/>
+          <p:nvPr/>
+        </p:nvSpPr>
+        <p:spPr>
+          <a:xfrm>
+            <a:off x="914400" y="1874520"/>
+            <a:ext cx="914400" cy="914400"/>
+          </a:xfrm>
+          <a:prstGeom prst="ellipse">
+            <a:avLst/>
+          </a:prstGeom>
+          <a:solidFill>
+            <a:schemeClr val="accent5"/>
+          </a:solidFill>
+          <a:ln w="12700">
+            <a:solidFill>
+              <a:schemeClr val="accent5"/>
+            </a:solidFill>
+            <a:prstDash val="solid"/>
+          </a:ln>
+        </p:spPr>
+      </p:sp>
+      <p:pic>
+        <p:nvPicPr>
+          <p:cNvPr id="5" name="体験アイコン1" descr="preencoded.png">    </p:cNvPr>
+          <p:cNvPicPr>
+            <a:picLocks noChangeAspect="1"/>
+          </p:cNvPicPr>
+          <p:nvPr/>
+        </p:nvPicPr>
+        <p:blipFill>
+          <a:blip r:embed="rId1"/>
+          <a:stretch>
+            <a:fillRect/>
+          </a:stretch>
+        </p:blipFill>
+        <p:spPr>
+          <a:xfrm>
+            <a:off x="1152144" y="2112264"/>
+            <a:ext cx="438912" cy="438912"/>
+          </a:xfrm>
+          <a:prstGeom prst="rect">
+            <a:avLst/>
+          </a:prstGeom>
+        </p:spPr>
+      </p:pic>
+      <p:sp>
+        <p:nvSpPr>
+          <p:cNvPr id="6" name="Text 3"/>
           <p:cNvSpPr txBox="1"/>
           <p:nvPr/>
         </p:nvSpPr>
         <p:spPr>
           <a:xfrm>
-            <a:off x="822960" y="1600200"/>
-            <a:ext cx="4572000" cy="1097280"/>
+            <a:off x="2194560" y="1554480"/>
+            <a:ext cx="9144000" cy="1554480"/>
           </a:xfrm>
           <a:prstGeom prst="rect">
             <a:avLst/>
@@ -2584,73 +2690,34 @@
               <a:buNone/>
             </a:pPr>
             <a:r>
-              <a:rPr lang="en-US" sz="6000" b="1" dirty="0">
-                <a:solidFill>
-                  <a:schemeClr val="accent5"/>
+              <a:rPr lang="en-US" sz="3600" b="1" dirty="0">
+                <a:solidFill>
+                  <a:schemeClr val="tx1"/>
                 </a:solidFill>
                 <a:latin typeface="Yu Gothic" pitchFamily="34" charset="0"/>
                 <a:ea typeface="Yu Gothic" pitchFamily="34" charset="-122"/>
                 <a:cs typeface="Yu Gothic" pitchFamily="34" charset="-120"/>
               </a:rPr>
-              <a:t>12 / 34件</a:t>
-            </a:r>
-            <a:endParaRPr lang="en-US" sz="6000" dirty="0"/>
-          </a:p>
-        </p:txBody>
-      </p:sp>
-      <p:sp>
-        <p:nvSpPr>
-          <p:cNvPr id="5" name="Text 3"/>
-          <p:cNvSpPr txBox="1"/>
-          <p:nvPr/>
-        </p:nvSpPr>
-        <p:spPr>
-          <a:xfrm>
-            <a:off x="822960" y="2743200"/>
-            <a:ext cx="4572000" cy="731520"/>
-          </a:xfrm>
-          <a:prstGeom prst="rect">
-            <a:avLst/>
-          </a:prstGeom>
-          <a:noFill/>
-          <a:ln/>
-        </p:spPr>
-        <p:txBody>
-          <a:bodyPr wrap="square" lIns="0" tIns="0" rIns="0" bIns="0" rtlCol="0" anchor="ctr"/>
-          <a:lstStyle/>
-          <a:p>
-            <a:pPr indent="0" marL="0">
-              <a:buNone/>
-            </a:pPr>
-            <a:r>
-              <a:rPr lang="en-US" sz="1600" dirty="0">
-                <a:solidFill>
-                  <a:schemeClr val="tx1"/>
-                </a:solidFill>
-                <a:latin typeface="Yu Gothic" pitchFamily="34" charset="0"/>
-                <a:ea typeface="Yu Gothic" pitchFamily="34" charset="-122"/>
-                <a:cs typeface="Yu Gothic" pitchFamily="34" charset="-120"/>
-              </a:rPr>
-              <a:t>素のAIが挙げた回答のうち、公式ページで見ると募集終了だったもの</a:t>
-            </a:r>
-            <a:endParaRPr lang="en-US" sz="1600" dirty="0"/>
-          </a:p>
-        </p:txBody>
-      </p:sp>
-      <p:sp>
-        <p:nvSpPr>
-          <p:cNvPr id="6" name="数字カード2"/>
+              <a:t>5年前の募集を、拾ってくる</a:t>
+            </a:r>
+            <a:endParaRPr lang="en-US" sz="3600" dirty="0"/>
+          </a:p>
+        </p:txBody>
+      </p:sp>
+      <p:sp>
+        <p:nvSpPr>
+          <p:cNvPr id="7" name="体験カード2"/>
           <p:cNvSpPr/>
           <p:nvPr/>
         </p:nvSpPr>
         <p:spPr>
           <a:xfrm>
-            <a:off x="548640" y="3840480"/>
-            <a:ext cx="5120640" cy="2148840"/>
+            <a:off x="548640" y="3337560"/>
+            <a:ext cx="11064240" cy="1554480"/>
           </a:xfrm>
           <a:prstGeom prst="roundRect">
             <a:avLst>
-              <a:gd name="adj" fmla="val 6383"/>
+              <a:gd name="adj" fmla="val 8824"/>
             </a:avLst>
           </a:prstGeom>
           <a:solidFill>
@@ -2666,102 +2733,24 @@
       </p:sp>
       <p:sp>
         <p:nvSpPr>
-          <p:cNvPr id="7" name="Text 5"/>
-          <p:cNvSpPr txBox="1"/>
-          <p:nvPr/>
-        </p:nvSpPr>
-        <p:spPr>
-          <a:xfrm>
-            <a:off x="822960" y="3977640"/>
-            <a:ext cx="4572000" cy="1097280"/>
-          </a:xfrm>
-          <a:prstGeom prst="rect">
-            <a:avLst/>
-          </a:prstGeom>
-          <a:noFill/>
-          <a:ln/>
-        </p:spPr>
-        <p:txBody>
-          <a:bodyPr wrap="square" lIns="0" tIns="0" rIns="0" bIns="0" rtlCol="0" anchor="ctr"/>
-          <a:lstStyle/>
-          <a:p>
-            <a:pPr indent="0" marL="0">
-              <a:buNone/>
-            </a:pPr>
-            <a:r>
-              <a:rPr lang="en-US" sz="6000" b="1" dirty="0">
-                <a:solidFill>
-                  <a:schemeClr val="accent1"/>
-                </a:solidFill>
-                <a:latin typeface="Yu Gothic" pitchFamily="34" charset="0"/>
-                <a:ea typeface="Yu Gothic" pitchFamily="34" charset="-122"/>
-                <a:cs typeface="Yu Gothic" pitchFamily="34" charset="-120"/>
-              </a:rPr>
-              <a:t>約半数</a:t>
-            </a:r>
-            <a:endParaRPr lang="en-US" sz="6000" dirty="0"/>
-          </a:p>
-        </p:txBody>
-      </p:sp>
-      <p:sp>
-        <p:nvSpPr>
-          <p:cNvPr id="8" name="Text 6"/>
-          <p:cNvSpPr txBox="1"/>
-          <p:nvPr/>
-        </p:nvSpPr>
-        <p:spPr>
-          <a:xfrm>
-            <a:off x="822960" y="5120640"/>
-            <a:ext cx="4572000" cy="731520"/>
-          </a:xfrm>
-          <a:prstGeom prst="rect">
-            <a:avLst/>
-          </a:prstGeom>
-          <a:noFill/>
-          <a:ln/>
-        </p:spPr>
-        <p:txBody>
-          <a:bodyPr wrap="square" lIns="0" tIns="0" rIns="0" bIns="0" rtlCol="0" anchor="ctr"/>
-          <a:lstStyle/>
-          <a:p>
-            <a:pPr indent="0" marL="0">
-              <a:buNone/>
-            </a:pPr>
-            <a:r>
-              <a:rPr lang="en-US" sz="1600" dirty="0">
-                <a:solidFill>
-                  <a:schemeClr val="tx1"/>
-                </a:solidFill>
-                <a:latin typeface="Yu Gothic" pitchFamily="34" charset="0"/>
-                <a:ea typeface="Yu Gothic" pitchFamily="34" charset="-122"/>
-                <a:cs typeface="Yu Gothic" pitchFamily="34" charset="-120"/>
-              </a:rPr>
-              <a:t>10月時点で、すでに募集終了だった奨学金（29件中14件を公式要項で照合）</a:t>
-            </a:r>
-            <a:endParaRPr lang="en-US" sz="1600" dirty="0"/>
-          </a:p>
-        </p:txBody>
-      </p:sp>
-      <p:sp>
-        <p:nvSpPr>
-          <p:cNvPr id="9" name="穴1アイコン 円"/>
+          <p:cNvPr id="8" name="体験アイコン2 円"/>
           <p:cNvSpPr/>
           <p:nvPr/>
         </p:nvSpPr>
         <p:spPr>
           <a:xfrm>
-            <a:off x="6217920" y="1554480"/>
-            <a:ext cx="731520" cy="731520"/>
+            <a:off x="914400" y="3657600"/>
+            <a:ext cx="914400" cy="914400"/>
           </a:xfrm>
           <a:prstGeom prst="ellipse">
             <a:avLst/>
           </a:prstGeom>
           <a:solidFill>
-            <a:schemeClr val="accent1"/>
+            <a:schemeClr val="accent5"/>
           </a:solidFill>
           <a:ln w="12700">
             <a:solidFill>
-              <a:schemeClr val="accent1"/>
+              <a:schemeClr val="accent5"/>
             </a:solidFill>
             <a:prstDash val="solid"/>
           </a:ln>
@@ -2769,134 +2758,7 @@
       </p:sp>
       <p:pic>
         <p:nvPicPr>
-          <p:cNvPr id="10" name="穴1アイコン" descr="preencoded.png">    </p:cNvPr>
-          <p:cNvPicPr>
-            <a:picLocks noChangeAspect="1"/>
-          </p:cNvPicPr>
-          <p:nvPr/>
-        </p:nvPicPr>
-        <p:blipFill>
-          <a:blip r:embed="rId1"/>
-          <a:stretch>
-            <a:fillRect/>
-          </a:stretch>
-        </p:blipFill>
-        <p:spPr>
-          <a:xfrm>
-            <a:off x="6408115" y="1744675"/>
-            <a:ext cx="351130" cy="351130"/>
-          </a:xfrm>
-          <a:prstGeom prst="rect">
-            <a:avLst/>
-          </a:prstGeom>
-        </p:spPr>
-      </p:pic>
-      <p:sp>
-        <p:nvSpPr>
-          <p:cNvPr id="11" name="Text 8"/>
-          <p:cNvSpPr txBox="1"/>
-          <p:nvPr/>
-        </p:nvSpPr>
-        <p:spPr>
-          <a:xfrm>
-            <a:off x="7132320" y="1463040"/>
-            <a:ext cx="4572000" cy="548640"/>
-          </a:xfrm>
-          <a:prstGeom prst="rect">
-            <a:avLst/>
-          </a:prstGeom>
-          <a:noFill/>
-          <a:ln/>
-        </p:spPr>
-        <p:txBody>
-          <a:bodyPr wrap="square" lIns="0" tIns="0" rIns="0" bIns="0" rtlCol="0" anchor="ctr"/>
-          <a:lstStyle/>
-          <a:p>
-            <a:pPr indent="0" marL="0">
-              <a:buNone/>
-            </a:pPr>
-            <a:r>
-              <a:rPr lang="en-US" sz="2200" b="1" dirty="0">
-                <a:solidFill>
-                  <a:schemeClr val="tx1"/>
-                </a:solidFill>
-                <a:latin typeface="Yu Gothic" pitchFamily="34" charset="0"/>
-                <a:ea typeface="Yu Gothic" pitchFamily="34" charset="-122"/>
-                <a:cs typeface="Yu Gothic" pitchFamily="34" charset="-120"/>
-              </a:rPr>
-              <a:t>上位数件しか読まない</a:t>
-            </a:r>
-            <a:endParaRPr lang="en-US" sz="2200" dirty="0"/>
-          </a:p>
-        </p:txBody>
-      </p:sp>
-      <p:sp>
-        <p:nvSpPr>
-          <p:cNvPr id="12" name="Text 9"/>
-          <p:cNvSpPr txBox="1"/>
-          <p:nvPr/>
-        </p:nvSpPr>
-        <p:spPr>
-          <a:xfrm>
-            <a:off x="7132320" y="2011680"/>
-            <a:ext cx="4572000" cy="411480"/>
-          </a:xfrm>
-          <a:prstGeom prst="rect">
-            <a:avLst/>
-          </a:prstGeom>
-          <a:noFill/>
-          <a:ln/>
-        </p:spPr>
-        <p:txBody>
-          <a:bodyPr wrap="square" lIns="0" tIns="0" rIns="0" bIns="0" rtlCol="0" anchor="ctr"/>
-          <a:lstStyle/>
-          <a:p>
-            <a:pPr indent="0" marL="0">
-              <a:buNone/>
-            </a:pPr>
-            <a:r>
-              <a:rPr lang="en-US" sz="1600" dirty="0">
-                <a:solidFill>
-                  <a:schemeClr val="accent6"/>
-                </a:solidFill>
-                <a:latin typeface="Yu Gothic" pitchFamily="34" charset="0"/>
-                <a:ea typeface="Yu Gothic" pitchFamily="34" charset="-122"/>
-                <a:cs typeface="Yu Gothic" pitchFamily="34" charset="-120"/>
-              </a:rPr>
-              <a:t>漏れる</a:t>
-            </a:r>
-            <a:endParaRPr lang="en-US" sz="1600" dirty="0"/>
-          </a:p>
-        </p:txBody>
-      </p:sp>
-      <p:sp>
-        <p:nvSpPr>
-          <p:cNvPr id="13" name="穴2アイコン 円"/>
-          <p:cNvSpPr/>
-          <p:nvPr/>
-        </p:nvSpPr>
-        <p:spPr>
-          <a:xfrm>
-            <a:off x="6217920" y="2697480"/>
-            <a:ext cx="731520" cy="731520"/>
-          </a:xfrm>
-          <a:prstGeom prst="ellipse">
-            <a:avLst/>
-          </a:prstGeom>
-          <a:solidFill>
-            <a:schemeClr val="accent1"/>
-          </a:solidFill>
-          <a:ln w="12700">
-            <a:solidFill>
-              <a:schemeClr val="accent1"/>
-            </a:solidFill>
-            <a:prstDash val="solid"/>
-          </a:ln>
-        </p:spPr>
-      </p:sp>
-      <p:pic>
-        <p:nvPicPr>
-          <p:cNvPr id="14" name="穴2アイコン" descr="preencoded.png">    </p:cNvPr>
+          <p:cNvPr id="9" name="体験アイコン2" descr="preencoded.png">    </p:cNvPr>
           <p:cNvPicPr>
             <a:picLocks noChangeAspect="1"/>
           </p:cNvPicPr>
@@ -2910,8 +2772,8 @@
         </p:blipFill>
         <p:spPr>
           <a:xfrm>
-            <a:off x="6408115" y="2887675"/>
-            <a:ext cx="351130" cy="351130"/>
+            <a:off x="1152144" y="3895344"/>
+            <a:ext cx="438912" cy="438912"/>
           </a:xfrm>
           <a:prstGeom prst="rect">
             <a:avLst/>
@@ -2920,14 +2782,14 @@
       </p:pic>
       <p:sp>
         <p:nvSpPr>
-          <p:cNvPr id="15" name="Text 11"/>
+          <p:cNvPr id="10" name="Text 6"/>
           <p:cNvSpPr txBox="1"/>
           <p:nvPr/>
         </p:nvSpPr>
         <p:spPr>
           <a:xfrm>
-            <a:off x="7132320" y="2606040"/>
-            <a:ext cx="4572000" cy="548640"/>
+            <a:off x="2194560" y="3337560"/>
+            <a:ext cx="9144000" cy="1554480"/>
           </a:xfrm>
           <a:prstGeom prst="rect">
             <a:avLst/>
@@ -2943,7 +2805,7 @@
               <a:buNone/>
             </a:pPr>
             <a:r>
-              <a:rPr lang="en-US" sz="2200" b="1" dirty="0">
+              <a:rPr lang="en-US" sz="3600" b="1" dirty="0">
                 <a:solidFill>
                   <a:schemeClr val="tx1"/>
                 </a:solidFill>
@@ -2951,22 +2813,22 @@
                 <a:ea typeface="Yu Gothic" pitchFamily="34" charset="-122"/>
                 <a:cs typeface="Yu Gothic" pitchFamily="34" charset="-120"/>
               </a:rPr>
-              <a:t>古い年度・募集終了を混ぜる</a:t>
-            </a:r>
-            <a:endParaRPr lang="en-US" sz="2200" dirty="0"/>
-          </a:p>
-        </p:txBody>
-      </p:sp>
-      <p:sp>
-        <p:nvSpPr>
-          <p:cNvPr id="16" name="Text 12"/>
+              <a:t>すぐ見つかるものを、漏らす</a:t>
+            </a:r>
+            <a:endParaRPr lang="en-US" sz="3600" dirty="0"/>
+          </a:p>
+        </p:txBody>
+      </p:sp>
+      <p:sp>
+        <p:nvSpPr>
+          <p:cNvPr id="11" name="Text 7"/>
           <p:cNvSpPr txBox="1"/>
           <p:nvPr/>
         </p:nvSpPr>
         <p:spPr>
           <a:xfrm>
-            <a:off x="7132320" y="3154680"/>
-            <a:ext cx="4572000" cy="411480"/>
+            <a:off x="548640" y="5349240"/>
+            <a:ext cx="11064240" cy="731520"/>
           </a:xfrm>
           <a:prstGeom prst="rect">
             <a:avLst/>
@@ -2982,271 +2844,17 @@
               <a:buNone/>
             </a:pPr>
             <a:r>
-              <a:rPr lang="en-US" sz="1600" dirty="0">
-                <a:solidFill>
-                  <a:schemeClr val="accent6"/>
+              <a:rPr lang="en-US" sz="2800" b="1" dirty="0">
+                <a:solidFill>
+                  <a:schemeClr val="accent1"/>
                 </a:solidFill>
                 <a:latin typeface="Yu Gothic" pitchFamily="34" charset="0"/>
                 <a:ea typeface="Yu Gothic" pitchFamily="34" charset="-122"/>
                 <a:cs typeface="Yu Gothic" pitchFamily="34" charset="-120"/>
               </a:rPr>
-              <a:t>間に合わない</a:t>
-            </a:r>
-            <a:endParaRPr lang="en-US" sz="1600" dirty="0"/>
-          </a:p>
-        </p:txBody>
-      </p:sp>
-      <p:sp>
-        <p:nvSpPr>
-          <p:cNvPr id="17" name="穴3アイコン 円"/>
-          <p:cNvSpPr/>
-          <p:nvPr/>
-        </p:nvSpPr>
-        <p:spPr>
-          <a:xfrm>
-            <a:off x="6217920" y="3840480"/>
-            <a:ext cx="731520" cy="731520"/>
-          </a:xfrm>
-          <a:prstGeom prst="ellipse">
-            <a:avLst/>
-          </a:prstGeom>
-          <a:solidFill>
-            <a:schemeClr val="accent1"/>
-          </a:solidFill>
-          <a:ln w="12700">
-            <a:solidFill>
-              <a:schemeClr val="accent1"/>
-            </a:solidFill>
-            <a:prstDash val="solid"/>
-          </a:ln>
-        </p:spPr>
-      </p:sp>
-      <p:pic>
-        <p:nvPicPr>
-          <p:cNvPr id="18" name="穴3アイコン" descr="preencoded.png">    </p:cNvPr>
-          <p:cNvPicPr>
-            <a:picLocks noChangeAspect="1"/>
-          </p:cNvPicPr>
-          <p:nvPr/>
-        </p:nvPicPr>
-        <p:blipFill>
-          <a:blip r:embed="rId3"/>
-          <a:stretch>
-            <a:fillRect/>
-          </a:stretch>
-        </p:blipFill>
-        <p:spPr>
-          <a:xfrm>
-            <a:off x="6408115" y="4030675"/>
-            <a:ext cx="351130" cy="351130"/>
-          </a:xfrm>
-          <a:prstGeom prst="rect">
-            <a:avLst/>
-          </a:prstGeom>
-        </p:spPr>
-      </p:pic>
-      <p:sp>
-        <p:nvSpPr>
-          <p:cNvPr id="19" name="Text 14"/>
-          <p:cNvSpPr txBox="1"/>
-          <p:nvPr/>
-        </p:nvSpPr>
-        <p:spPr>
-          <a:xfrm>
-            <a:off x="7132320" y="3749040"/>
-            <a:ext cx="4572000" cy="548640"/>
-          </a:xfrm>
-          <a:prstGeom prst="rect">
-            <a:avLst/>
-          </a:prstGeom>
-          <a:noFill/>
-          <a:ln/>
-        </p:spPr>
-        <p:txBody>
-          <a:bodyPr wrap="square" lIns="0" tIns="0" rIns="0" bIns="0" rtlCol="0" anchor="ctr"/>
-          <a:lstStyle/>
-          <a:p>
-            <a:pPr indent="0" marL="0">
-              <a:buNone/>
-            </a:pPr>
-            <a:r>
-              <a:rPr lang="en-US" sz="2200" b="1" dirty="0">
-                <a:solidFill>
-                  <a:schemeClr val="tx1"/>
-                </a:solidFill>
-                <a:latin typeface="Yu Gothic" pitchFamily="34" charset="0"/>
-                <a:ea typeface="Yu Gothic" pitchFamily="34" charset="-122"/>
-                <a:cs typeface="Yu Gothic" pitchFamily="34" charset="-120"/>
-              </a:rPr>
-              <a:t>自分が対象外の条件を見落とす</a:t>
-            </a:r>
-            <a:endParaRPr lang="en-US" sz="2200" dirty="0"/>
-          </a:p>
-        </p:txBody>
-      </p:sp>
-      <p:sp>
-        <p:nvSpPr>
-          <p:cNvPr id="20" name="Text 15"/>
-          <p:cNvSpPr txBox="1"/>
-          <p:nvPr/>
-        </p:nvSpPr>
-        <p:spPr>
-          <a:xfrm>
-            <a:off x="7132320" y="4297680"/>
-            <a:ext cx="4572000" cy="411480"/>
-          </a:xfrm>
-          <a:prstGeom prst="rect">
-            <a:avLst/>
-          </a:prstGeom>
-          <a:noFill/>
-          <a:ln/>
-        </p:spPr>
-        <p:txBody>
-          <a:bodyPr wrap="square" lIns="0" tIns="0" rIns="0" bIns="0" rtlCol="0" anchor="ctr"/>
-          <a:lstStyle/>
-          <a:p>
-            <a:pPr indent="0" marL="0">
-              <a:buNone/>
-            </a:pPr>
-            <a:r>
-              <a:rPr lang="en-US" sz="1600" dirty="0">
-                <a:solidFill>
-                  <a:schemeClr val="accent6"/>
-                </a:solidFill>
-                <a:latin typeface="Yu Gothic" pitchFamily="34" charset="0"/>
-                <a:ea typeface="Yu Gothic" pitchFamily="34" charset="-122"/>
-                <a:cs typeface="Yu Gothic" pitchFamily="34" charset="-120"/>
-              </a:rPr>
-              <a:t>学年・地域・卒業後・使途</a:t>
-            </a:r>
-            <a:endParaRPr lang="en-US" sz="1600" dirty="0"/>
-          </a:p>
-        </p:txBody>
-      </p:sp>
-      <p:sp>
-        <p:nvSpPr>
-          <p:cNvPr id="21" name="穴4アイコン 円"/>
-          <p:cNvSpPr/>
-          <p:nvPr/>
-        </p:nvSpPr>
-        <p:spPr>
-          <a:xfrm>
-            <a:off x="6217920" y="4983480"/>
-            <a:ext cx="731520" cy="731520"/>
-          </a:xfrm>
-          <a:prstGeom prst="ellipse">
-            <a:avLst/>
-          </a:prstGeom>
-          <a:solidFill>
-            <a:schemeClr val="accent1"/>
-          </a:solidFill>
-          <a:ln w="12700">
-            <a:solidFill>
-              <a:schemeClr val="accent1"/>
-            </a:solidFill>
-            <a:prstDash val="solid"/>
-          </a:ln>
-        </p:spPr>
-      </p:sp>
-      <p:pic>
-        <p:nvPicPr>
-          <p:cNvPr id="22" name="穴4アイコン" descr="preencoded.png">    </p:cNvPr>
-          <p:cNvPicPr>
-            <a:picLocks noChangeAspect="1"/>
-          </p:cNvPicPr>
-          <p:nvPr/>
-        </p:nvPicPr>
-        <p:blipFill>
-          <a:blip r:embed="rId4"/>
-          <a:stretch>
-            <a:fillRect/>
-          </a:stretch>
-        </p:blipFill>
-        <p:spPr>
-          <a:xfrm>
-            <a:off x="6408115" y="5173675"/>
-            <a:ext cx="351130" cy="351130"/>
-          </a:xfrm>
-          <a:prstGeom prst="rect">
-            <a:avLst/>
-          </a:prstGeom>
-        </p:spPr>
-      </p:pic>
-      <p:sp>
-        <p:nvSpPr>
-          <p:cNvPr id="23" name="Text 17"/>
-          <p:cNvSpPr txBox="1"/>
-          <p:nvPr/>
-        </p:nvSpPr>
-        <p:spPr>
-          <a:xfrm>
-            <a:off x="7132320" y="4892040"/>
-            <a:ext cx="4572000" cy="548640"/>
-          </a:xfrm>
-          <a:prstGeom prst="rect">
-            <a:avLst/>
-          </a:prstGeom>
-          <a:noFill/>
-          <a:ln/>
-        </p:spPr>
-        <p:txBody>
-          <a:bodyPr wrap="square" lIns="0" tIns="0" rIns="0" bIns="0" rtlCol="0" anchor="ctr"/>
-          <a:lstStyle/>
-          <a:p>
-            <a:pPr indent="0" marL="0">
-              <a:buNone/>
-            </a:pPr>
-            <a:r>
-              <a:rPr lang="en-US" sz="2200" b="1" dirty="0">
-                <a:solidFill>
-                  <a:schemeClr val="tx1"/>
-                </a:solidFill>
-                <a:latin typeface="Yu Gothic" pitchFamily="34" charset="0"/>
-                <a:ea typeface="Yu Gothic" pitchFamily="34" charset="-122"/>
-                <a:cs typeface="Yu Gothic" pitchFamily="34" charset="-120"/>
-              </a:rPr>
-              <a:t>「全部」と言えない</a:t>
-            </a:r>
-            <a:endParaRPr lang="en-US" sz="2200" dirty="0"/>
-          </a:p>
-        </p:txBody>
-      </p:sp>
-      <p:sp>
-        <p:nvSpPr>
-          <p:cNvPr id="24" name="Text 18"/>
-          <p:cNvSpPr txBox="1"/>
-          <p:nvPr/>
-        </p:nvSpPr>
-        <p:spPr>
-          <a:xfrm>
-            <a:off x="7132320" y="5440680"/>
-            <a:ext cx="4572000" cy="411480"/>
-          </a:xfrm>
-          <a:prstGeom prst="rect">
-            <a:avLst/>
-          </a:prstGeom>
-          <a:noFill/>
-          <a:ln/>
-        </p:spPr>
-        <p:txBody>
-          <a:bodyPr wrap="square" lIns="0" tIns="0" rIns="0" bIns="0" rtlCol="0" anchor="ctr"/>
-          <a:lstStyle/>
-          <a:p>
-            <a:pPr indent="0" marL="0">
-              <a:buNone/>
-            </a:pPr>
-            <a:r>
-              <a:rPr lang="en-US" sz="1600" dirty="0">
-                <a:solidFill>
-                  <a:schemeClr val="accent6"/>
-                </a:solidFill>
-                <a:latin typeface="Yu Gothic" pitchFamily="34" charset="0"/>
-                <a:ea typeface="Yu Gothic" pitchFamily="34" charset="-122"/>
-                <a:cs typeface="Yu Gothic" pitchFamily="34" charset="-120"/>
-              </a:rPr>
-              <a:t>どこまで探したか分からない</a:t>
-            </a:r>
-            <a:endParaRPr lang="en-US" sz="1600" dirty="0"/>
+              <a:t>意外と、うまくいきません。なぜか？</a:t>
+            </a:r>
+            <a:endParaRPr lang="en-US" sz="2800" dirty="0"/>
           </a:p>
         </p:txBody>
       </p:sp>
@@ -3352,7 +2960,7 @@
                   <a:schemeClr val="tx2"/>
                 </a:solidFill>
               </a:rPr>
-              <a:t>探すのは AI、判定は「公式ページを読んだ」コード</a:t>
+              <a:t>素のAIの回答34件のうち、12件は募集終了</a:t>
             </a:r>
             <a:endParaRPr lang="en-US" sz="3400" dirty="0"/>
           </a:p>
@@ -3360,18 +2968,18 @@
       </p:sp>
       <p:sp>
         <p:nvSpPr>
-          <p:cNvPr id="3" name="カード1"/>
+          <p:cNvPr id="3" name="数字カード1"/>
           <p:cNvSpPr/>
           <p:nvPr/>
         </p:nvSpPr>
         <p:spPr>
           <a:xfrm>
-            <a:off x="548640" y="1508760"/>
-            <a:ext cx="3566160" cy="4480560"/>
+            <a:off x="548640" y="1463040"/>
+            <a:ext cx="5120640" cy="2148840"/>
           </a:xfrm>
           <a:prstGeom prst="roundRect">
             <a:avLst>
-              <a:gd name="adj" fmla="val 3846"/>
+              <a:gd name="adj" fmla="val 6383"/>
             </a:avLst>
           </a:prstGeom>
           <a:solidFill>
@@ -3387,63 +2995,14 @@
       </p:sp>
       <p:sp>
         <p:nvSpPr>
-          <p:cNvPr id="4" name="アイコン1 円"/>
-          <p:cNvSpPr/>
-          <p:nvPr/>
-        </p:nvSpPr>
-        <p:spPr>
-          <a:xfrm>
-            <a:off x="868680" y="1783080"/>
-            <a:ext cx="868680" cy="868680"/>
-          </a:xfrm>
-          <a:prstGeom prst="ellipse">
-            <a:avLst/>
-          </a:prstGeom>
-          <a:solidFill>
-            <a:schemeClr val="accent2"/>
-          </a:solidFill>
-          <a:ln w="12700">
-            <a:solidFill>
-              <a:schemeClr val="accent2"/>
-            </a:solidFill>
-            <a:prstDash val="solid"/>
-          </a:ln>
-        </p:spPr>
-      </p:sp>
-      <p:pic>
-        <p:nvPicPr>
-          <p:cNvPr id="5" name="アイコン1" descr="preencoded.png">    </p:cNvPr>
-          <p:cNvPicPr>
-            <a:picLocks noChangeAspect="1"/>
-          </p:cNvPicPr>
-          <p:nvPr/>
-        </p:nvPicPr>
-        <p:blipFill>
-          <a:blip r:embed="rId1"/>
-          <a:stretch>
-            <a:fillRect/>
-          </a:stretch>
-        </p:blipFill>
-        <p:spPr>
-          <a:xfrm>
-            <a:off x="1094537" y="2008937"/>
-            <a:ext cx="416966" cy="416966"/>
-          </a:xfrm>
-          <a:prstGeom prst="rect">
-            <a:avLst/>
-          </a:prstGeom>
-        </p:spPr>
-      </p:pic>
-      <p:sp>
-        <p:nvSpPr>
-          <p:cNvPr id="6" name="Text 3"/>
+          <p:cNvPr id="4" name="Text 2"/>
           <p:cNvSpPr txBox="1"/>
           <p:nvPr/>
         </p:nvSpPr>
         <p:spPr>
           <a:xfrm>
-            <a:off x="868680" y="2880360"/>
-            <a:ext cx="3017520" cy="548640"/>
+            <a:off x="822960" y="1600200"/>
+            <a:ext cx="4572000" cy="1097280"/>
           </a:xfrm>
           <a:prstGeom prst="rect">
             <a:avLst/>
@@ -3459,30 +3018,30 @@
               <a:buNone/>
             </a:pPr>
             <a:r>
-              <a:rPr lang="en-US" sz="2400" b="1" dirty="0">
-                <a:solidFill>
-                  <a:schemeClr val="tx2"/>
+              <a:rPr lang="en-US" sz="6000" b="1" dirty="0">
+                <a:solidFill>
+                  <a:schemeClr val="accent5"/>
                 </a:solidFill>
                 <a:latin typeface="Yu Gothic" pitchFamily="34" charset="0"/>
                 <a:ea typeface="Yu Gothic" pitchFamily="34" charset="-122"/>
                 <a:cs typeface="Yu Gothic" pitchFamily="34" charset="-120"/>
               </a:rPr>
-              <a:t>確かめる</a:t>
-            </a:r>
-            <a:endParaRPr lang="en-US" sz="2400" dirty="0"/>
-          </a:p>
-        </p:txBody>
-      </p:sp>
-      <p:sp>
-        <p:nvSpPr>
-          <p:cNvPr id="7" name="Text 4"/>
+              <a:t>12 / 34件</a:t>
+            </a:r>
+            <a:endParaRPr lang="en-US" sz="6000" dirty="0"/>
+          </a:p>
+        </p:txBody>
+      </p:sp>
+      <p:sp>
+        <p:nvSpPr>
+          <p:cNvPr id="5" name="Text 3"/>
           <p:cNvSpPr txBox="1"/>
           <p:nvPr/>
         </p:nvSpPr>
         <p:spPr>
           <a:xfrm>
-            <a:off x="822960" y="3566160"/>
-            <a:ext cx="3154680" cy="2286000"/>
+            <a:off x="822960" y="2743200"/>
+            <a:ext cx="4572000" cy="731520"/>
           </a:xfrm>
           <a:prstGeom prst="rect">
             <a:avLst/>
@@ -3491,78 +3050,41 @@
           <a:ln/>
         </p:spPr>
         <p:txBody>
-          <a:bodyPr wrap="square" lIns="0" tIns="0" rIns="0" bIns="0" rtlCol="0" anchor="t"/>
-          <a:lstStyle/>
-          <a:p>
-            <a:pPr marL="342900" indent="-342900">
-              <a:spcAft>
-                <a:spcPts val="800"/>
-              </a:spcAft>
-              <a:buSzPct val="100000"/>
-              <a:buChar char="•"/>
+          <a:bodyPr wrap="square" lIns="0" tIns="0" rIns="0" bIns="0" rtlCol="0" anchor="ctr"/>
+          <a:lstStyle/>
+          <a:p>
+            <a:pPr indent="0" marL="0">
+              <a:buNone/>
             </a:pPr>
             <a:r>
               <a:rPr lang="en-US" sz="1600" dirty="0">
                 <a:solidFill>
                   <a:schemeClr val="tx1"/>
                 </a:solidFill>
-              </a:rPr>
-              <a:t>Google 検索で候補を集める</a:t>
+                <a:latin typeface="Yu Gothic" pitchFamily="34" charset="0"/>
+                <a:ea typeface="Yu Gothic" pitchFamily="34" charset="-122"/>
+                <a:cs typeface="Yu Gothic" pitchFamily="34" charset="-120"/>
+              </a:rPr>
+              <a:t>素のAIが挙げた回答のうち、公式ページで見ると募集終了だったもの</a:t>
             </a:r>
             <a:endParaRPr lang="en-US" sz="1600" dirty="0"/>
           </a:p>
-          <a:p>
-            <a:pPr marL="342900" indent="-342900">
-              <a:spcAft>
-                <a:spcPts val="800"/>
-              </a:spcAft>
-              <a:buSzPct val="100000"/>
-              <a:buChar char="•"/>
-            </a:pPr>
-            <a:r>
-              <a:rPr lang="en-US" sz="1600" dirty="0">
-                <a:solidFill>
-                  <a:schemeClr val="tx1"/>
-                </a:solidFill>
-              </a:rPr>
-              <a:t>公式ページを読み、条件を引用つきで抜く</a:t>
-            </a:r>
-            <a:endParaRPr lang="en-US" sz="1600" dirty="0"/>
-          </a:p>
-          <a:p>
-            <a:pPr marL="342900" indent="-342900">
-              <a:spcAft>
-                <a:spcPts val="800"/>
-              </a:spcAft>
-              <a:buSzPct val="100000"/>
-              <a:buChar char="•"/>
-            </a:pPr>
-            <a:r>
-              <a:rPr lang="en-US" sz="1600" dirty="0">
-                <a:solidFill>
-                  <a:schemeClr val="tx1"/>
-                </a:solidFill>
-              </a:rPr>
-              <a:t>引用が原文にあるか、コードで照合</a:t>
-            </a:r>
-            <a:endParaRPr lang="en-US" sz="1600" dirty="0"/>
-          </a:p>
-        </p:txBody>
-      </p:sp>
-      <p:sp>
-        <p:nvSpPr>
-          <p:cNvPr id="8" name="カード2"/>
+        </p:txBody>
+      </p:sp>
+      <p:sp>
+        <p:nvSpPr>
+          <p:cNvPr id="6" name="数字カード2"/>
           <p:cNvSpPr/>
           <p:nvPr/>
         </p:nvSpPr>
         <p:spPr>
           <a:xfrm>
-            <a:off x="4297680" y="1508760"/>
-            <a:ext cx="3566160" cy="4480560"/>
+            <a:off x="548640" y="3840480"/>
+            <a:ext cx="5120640" cy="2148840"/>
           </a:xfrm>
           <a:prstGeom prst="roundRect">
             <a:avLst>
-              <a:gd name="adj" fmla="val 3846"/>
+              <a:gd name="adj" fmla="val 6383"/>
             </a:avLst>
           </a:prstGeom>
           <a:solidFill>
@@ -3578,14 +3100,92 @@
       </p:sp>
       <p:sp>
         <p:nvSpPr>
-          <p:cNvPr id="9" name="アイコン2 円"/>
+          <p:cNvPr id="7" name="Text 5"/>
+          <p:cNvSpPr txBox="1"/>
+          <p:nvPr/>
+        </p:nvSpPr>
+        <p:spPr>
+          <a:xfrm>
+            <a:off x="822960" y="3977640"/>
+            <a:ext cx="4572000" cy="1097280"/>
+          </a:xfrm>
+          <a:prstGeom prst="rect">
+            <a:avLst/>
+          </a:prstGeom>
+          <a:noFill/>
+          <a:ln/>
+        </p:spPr>
+        <p:txBody>
+          <a:bodyPr wrap="square" lIns="0" tIns="0" rIns="0" bIns="0" rtlCol="0" anchor="ctr"/>
+          <a:lstStyle/>
+          <a:p>
+            <a:pPr indent="0" marL="0">
+              <a:buNone/>
+            </a:pPr>
+            <a:r>
+              <a:rPr lang="en-US" sz="6000" b="1" dirty="0">
+                <a:solidFill>
+                  <a:schemeClr val="accent1"/>
+                </a:solidFill>
+                <a:latin typeface="Yu Gothic" pitchFamily="34" charset="0"/>
+                <a:ea typeface="Yu Gothic" pitchFamily="34" charset="-122"/>
+                <a:cs typeface="Yu Gothic" pitchFamily="34" charset="-120"/>
+              </a:rPr>
+              <a:t>約半数</a:t>
+            </a:r>
+            <a:endParaRPr lang="en-US" sz="6000" dirty="0"/>
+          </a:p>
+        </p:txBody>
+      </p:sp>
+      <p:sp>
+        <p:nvSpPr>
+          <p:cNvPr id="8" name="Text 6"/>
+          <p:cNvSpPr txBox="1"/>
+          <p:nvPr/>
+        </p:nvSpPr>
+        <p:spPr>
+          <a:xfrm>
+            <a:off x="822960" y="5120640"/>
+            <a:ext cx="4572000" cy="731520"/>
+          </a:xfrm>
+          <a:prstGeom prst="rect">
+            <a:avLst/>
+          </a:prstGeom>
+          <a:noFill/>
+          <a:ln/>
+        </p:spPr>
+        <p:txBody>
+          <a:bodyPr wrap="square" lIns="0" tIns="0" rIns="0" bIns="0" rtlCol="0" anchor="ctr"/>
+          <a:lstStyle/>
+          <a:p>
+            <a:pPr indent="0" marL="0">
+              <a:buNone/>
+            </a:pPr>
+            <a:r>
+              <a:rPr lang="en-US" sz="1600" dirty="0">
+                <a:solidFill>
+                  <a:schemeClr val="tx1"/>
+                </a:solidFill>
+                <a:latin typeface="Yu Gothic" pitchFamily="34" charset="0"/>
+                <a:ea typeface="Yu Gothic" pitchFamily="34" charset="-122"/>
+                <a:cs typeface="Yu Gothic" pitchFamily="34" charset="-120"/>
+              </a:rPr>
+              <a:t>10月時点で、すでに募集終了だった奨学金（29件中14件を公式要項で照合）</a:t>
+            </a:r>
+            <a:endParaRPr lang="en-US" sz="1600" dirty="0"/>
+          </a:p>
+        </p:txBody>
+      </p:sp>
+      <p:sp>
+        <p:nvSpPr>
+          <p:cNvPr id="9" name="穴1アイコン 円"/>
           <p:cNvSpPr/>
           <p:nvPr/>
         </p:nvSpPr>
         <p:spPr>
           <a:xfrm>
-            <a:off x="4617720" y="1783080"/>
-            <a:ext cx="868680" cy="868680"/>
+            <a:off x="6217920" y="1554480"/>
+            <a:ext cx="731520" cy="731520"/>
           </a:xfrm>
           <a:prstGeom prst="ellipse">
             <a:avLst/>
@@ -3603,7 +3203,134 @@
       </p:sp>
       <p:pic>
         <p:nvPicPr>
-          <p:cNvPr id="10" name="アイコン2" descr="preencoded.png">    </p:cNvPr>
+          <p:cNvPr id="10" name="穴1アイコン" descr="preencoded.png">    </p:cNvPr>
+          <p:cNvPicPr>
+            <a:picLocks noChangeAspect="1"/>
+          </p:cNvPicPr>
+          <p:nvPr/>
+        </p:nvPicPr>
+        <p:blipFill>
+          <a:blip r:embed="rId1"/>
+          <a:stretch>
+            <a:fillRect/>
+          </a:stretch>
+        </p:blipFill>
+        <p:spPr>
+          <a:xfrm>
+            <a:off x="6408115" y="1744675"/>
+            <a:ext cx="351130" cy="351130"/>
+          </a:xfrm>
+          <a:prstGeom prst="rect">
+            <a:avLst/>
+          </a:prstGeom>
+        </p:spPr>
+      </p:pic>
+      <p:sp>
+        <p:nvSpPr>
+          <p:cNvPr id="11" name="Text 8"/>
+          <p:cNvSpPr txBox="1"/>
+          <p:nvPr/>
+        </p:nvSpPr>
+        <p:spPr>
+          <a:xfrm>
+            <a:off x="7132320" y="1463040"/>
+            <a:ext cx="4572000" cy="548640"/>
+          </a:xfrm>
+          <a:prstGeom prst="rect">
+            <a:avLst/>
+          </a:prstGeom>
+          <a:noFill/>
+          <a:ln/>
+        </p:spPr>
+        <p:txBody>
+          <a:bodyPr wrap="square" lIns="0" tIns="0" rIns="0" bIns="0" rtlCol="0" anchor="ctr"/>
+          <a:lstStyle/>
+          <a:p>
+            <a:pPr indent="0" marL="0">
+              <a:buNone/>
+            </a:pPr>
+            <a:r>
+              <a:rPr lang="en-US" sz="2200" b="1" dirty="0">
+                <a:solidFill>
+                  <a:schemeClr val="tx1"/>
+                </a:solidFill>
+                <a:latin typeface="Yu Gothic" pitchFamily="34" charset="0"/>
+                <a:ea typeface="Yu Gothic" pitchFamily="34" charset="-122"/>
+                <a:cs typeface="Yu Gothic" pitchFamily="34" charset="-120"/>
+              </a:rPr>
+              <a:t>上位数件しか読まない</a:t>
+            </a:r>
+            <a:endParaRPr lang="en-US" sz="2200" dirty="0"/>
+          </a:p>
+        </p:txBody>
+      </p:sp>
+      <p:sp>
+        <p:nvSpPr>
+          <p:cNvPr id="12" name="Text 9"/>
+          <p:cNvSpPr txBox="1"/>
+          <p:nvPr/>
+        </p:nvSpPr>
+        <p:spPr>
+          <a:xfrm>
+            <a:off x="7132320" y="2011680"/>
+            <a:ext cx="4572000" cy="411480"/>
+          </a:xfrm>
+          <a:prstGeom prst="rect">
+            <a:avLst/>
+          </a:prstGeom>
+          <a:noFill/>
+          <a:ln/>
+        </p:spPr>
+        <p:txBody>
+          <a:bodyPr wrap="square" lIns="0" tIns="0" rIns="0" bIns="0" rtlCol="0" anchor="ctr"/>
+          <a:lstStyle/>
+          <a:p>
+            <a:pPr indent="0" marL="0">
+              <a:buNone/>
+            </a:pPr>
+            <a:r>
+              <a:rPr lang="en-US" sz="1600" dirty="0">
+                <a:solidFill>
+                  <a:schemeClr val="accent6"/>
+                </a:solidFill>
+                <a:latin typeface="Yu Gothic" pitchFamily="34" charset="0"/>
+                <a:ea typeface="Yu Gothic" pitchFamily="34" charset="-122"/>
+                <a:cs typeface="Yu Gothic" pitchFamily="34" charset="-120"/>
+              </a:rPr>
+              <a:t>漏れる</a:t>
+            </a:r>
+            <a:endParaRPr lang="en-US" sz="1600" dirty="0"/>
+          </a:p>
+        </p:txBody>
+      </p:sp>
+      <p:sp>
+        <p:nvSpPr>
+          <p:cNvPr id="13" name="穴2アイコン 円"/>
+          <p:cNvSpPr/>
+          <p:nvPr/>
+        </p:nvSpPr>
+        <p:spPr>
+          <a:xfrm>
+            <a:off x="6217920" y="2697480"/>
+            <a:ext cx="731520" cy="731520"/>
+          </a:xfrm>
+          <a:prstGeom prst="ellipse">
+            <a:avLst/>
+          </a:prstGeom>
+          <a:solidFill>
+            <a:schemeClr val="accent1"/>
+          </a:solidFill>
+          <a:ln w="12700">
+            <a:solidFill>
+              <a:schemeClr val="accent1"/>
+            </a:solidFill>
+            <a:prstDash val="solid"/>
+          </a:ln>
+        </p:spPr>
+      </p:sp>
+      <p:pic>
+        <p:nvPicPr>
+          <p:cNvPr id="14" name="穴2アイコン" descr="preencoded.png">    </p:cNvPr>
           <p:cNvPicPr>
             <a:picLocks noChangeAspect="1"/>
           </p:cNvPicPr>
@@ -3617,8 +3344,8 @@
         </p:blipFill>
         <p:spPr>
           <a:xfrm>
-            <a:off x="4843577" y="2008937"/>
-            <a:ext cx="416966" cy="416966"/>
+            <a:off x="6408115" y="2887675"/>
+            <a:ext cx="351130" cy="351130"/>
           </a:xfrm>
           <a:prstGeom prst="rect">
             <a:avLst/>
@@ -3627,14 +3354,14 @@
       </p:pic>
       <p:sp>
         <p:nvSpPr>
-          <p:cNvPr id="11" name="Text 7"/>
+          <p:cNvPr id="15" name="Text 11"/>
           <p:cNvSpPr txBox="1"/>
           <p:nvPr/>
         </p:nvSpPr>
         <p:spPr>
           <a:xfrm>
-            <a:off x="4617720" y="2880360"/>
-            <a:ext cx="3017520" cy="548640"/>
+            <a:off x="7132320" y="2606040"/>
+            <a:ext cx="4572000" cy="548640"/>
           </a:xfrm>
           <a:prstGeom prst="rect">
             <a:avLst/>
@@ -3650,30 +3377,30 @@
               <a:buNone/>
             </a:pPr>
             <a:r>
-              <a:rPr lang="en-US" sz="2400" b="1" dirty="0">
-                <a:solidFill>
-                  <a:schemeClr val="tx2"/>
+              <a:rPr lang="en-US" sz="2200" b="1" dirty="0">
+                <a:solidFill>
+                  <a:schemeClr val="tx1"/>
                 </a:solidFill>
                 <a:latin typeface="Yu Gothic" pitchFamily="34" charset="0"/>
                 <a:ea typeface="Yu Gothic" pitchFamily="34" charset="-122"/>
                 <a:cs typeface="Yu Gothic" pitchFamily="34" charset="-120"/>
               </a:rPr>
-              <a:t>隠さず分ける</a:t>
-            </a:r>
-            <a:endParaRPr lang="en-US" sz="2400" dirty="0"/>
-          </a:p>
-        </p:txBody>
-      </p:sp>
-      <p:sp>
-        <p:nvSpPr>
-          <p:cNvPr id="12" name="Text 8"/>
+              <a:t>古い年度・募集終了を混ぜる</a:t>
+            </a:r>
+            <a:endParaRPr lang="en-US" sz="2200" dirty="0"/>
+          </a:p>
+        </p:txBody>
+      </p:sp>
+      <p:sp>
+        <p:nvSpPr>
+          <p:cNvPr id="16" name="Text 12"/>
           <p:cNvSpPr txBox="1"/>
           <p:nvPr/>
         </p:nvSpPr>
         <p:spPr>
           <a:xfrm>
-            <a:off x="4572000" y="3566160"/>
-            <a:ext cx="3154680" cy="2286000"/>
+            <a:off x="7132320" y="3154680"/>
+            <a:ext cx="4572000" cy="411480"/>
           </a:xfrm>
           <a:prstGeom prst="rect">
             <a:avLst/>
@@ -3682,119 +3409,55 @@
           <a:ln/>
         </p:spPr>
         <p:txBody>
-          <a:bodyPr wrap="square" lIns="0" tIns="0" rIns="0" bIns="0" rtlCol="0" anchor="t"/>
-          <a:lstStyle/>
-          <a:p>
-            <a:pPr marL="342900" indent="-342900">
-              <a:spcAft>
-                <a:spcPts val="800"/>
-              </a:spcAft>
-              <a:buSzPct val="100000"/>
-              <a:buChar char="•"/>
+          <a:bodyPr wrap="square" lIns="0" tIns="0" rIns="0" bIns="0" rtlCol="0" anchor="ctr"/>
+          <a:lstStyle/>
+          <a:p>
+            <a:pPr indent="0" marL="0">
+              <a:buNone/>
             </a:pPr>
             <a:r>
               <a:rPr lang="en-US" sz="1600" dirty="0">
                 <a:solidFill>
-                  <a:schemeClr val="tx1"/>
-                </a:solidFill>
-              </a:rPr>
-              <a:t>応募できる／要確認</a:t>
+                  <a:schemeClr val="accent6"/>
+                </a:solidFill>
+                <a:latin typeface="Yu Gothic" pitchFamily="34" charset="0"/>
+                <a:ea typeface="Yu Gothic" pitchFamily="34" charset="-122"/>
+                <a:cs typeface="Yu Gothic" pitchFamily="34" charset="-120"/>
+              </a:rPr>
+              <a:t>間に合わない</a:t>
             </a:r>
             <a:endParaRPr lang="en-US" sz="1600" dirty="0"/>
           </a:p>
-          <a:p>
-            <a:pPr marL="342900" indent="-342900">
-              <a:spcAft>
-                <a:spcPts val="800"/>
-              </a:spcAft>
-              <a:buSzPct val="100000"/>
-              <a:buChar char="•"/>
-            </a:pPr>
-            <a:r>
-              <a:rPr lang="en-US" sz="1600" dirty="0">
-                <a:solidFill>
-                  <a:schemeClr val="tx1"/>
-                </a:solidFill>
-              </a:rPr>
-              <a:t>目的が違う／未確認／募集終了</a:t>
-            </a:r>
-            <a:endParaRPr lang="en-US" sz="1600" dirty="0"/>
-          </a:p>
-          <a:p>
-            <a:pPr marL="342900" indent="-342900">
-              <a:spcAft>
-                <a:spcPts val="800"/>
-              </a:spcAft>
-              <a:buSzPct val="100000"/>
-              <a:buChar char="•"/>
-            </a:pPr>
-            <a:r>
-              <a:rPr lang="en-US" sz="1600" dirty="0">
-                <a:solidFill>
-                  <a:schemeClr val="tx1"/>
-                </a:solidFill>
-              </a:rPr>
-              <a:t>確認できない条件は「合っている」と言わない</a:t>
-            </a:r>
-            <a:endParaRPr lang="en-US" sz="1600" dirty="0"/>
-          </a:p>
-        </p:txBody>
-      </p:sp>
-      <p:sp>
-        <p:nvSpPr>
-          <p:cNvPr id="13" name="カード3"/>
+        </p:txBody>
+      </p:sp>
+      <p:sp>
+        <p:nvSpPr>
+          <p:cNvPr id="17" name="穴3アイコン 円"/>
           <p:cNvSpPr/>
           <p:nvPr/>
         </p:nvSpPr>
         <p:spPr>
           <a:xfrm>
-            <a:off x="8046720" y="1508760"/>
-            <a:ext cx="3566160" cy="4480560"/>
-          </a:xfrm>
-          <a:prstGeom prst="roundRect">
-            <a:avLst>
-              <a:gd name="adj" fmla="val 3846"/>
-            </a:avLst>
+            <a:off x="6217920" y="3840480"/>
+            <a:ext cx="731520" cy="731520"/>
+          </a:xfrm>
+          <a:prstGeom prst="ellipse">
+            <a:avLst/>
           </a:prstGeom>
           <a:solidFill>
-            <a:schemeClr val="bg2"/>
+            <a:schemeClr val="accent1"/>
           </a:solidFill>
           <a:ln w="12700">
             <a:solidFill>
-              <a:schemeClr val="bg2"/>
+              <a:schemeClr val="accent1"/>
             </a:solidFill>
             <a:prstDash val="solid"/>
           </a:ln>
         </p:spPr>
       </p:sp>
-      <p:sp>
-        <p:nvSpPr>
-          <p:cNvPr id="14" name="アイコン3 円"/>
-          <p:cNvSpPr/>
-          <p:nvPr/>
-        </p:nvSpPr>
-        <p:spPr>
-          <a:xfrm>
-            <a:off x="8366760" y="1783080"/>
-            <a:ext cx="868680" cy="868680"/>
-          </a:xfrm>
-          <a:prstGeom prst="ellipse">
-            <a:avLst/>
-          </a:prstGeom>
-          <a:solidFill>
-            <a:schemeClr val="accent3"/>
-          </a:solidFill>
-          <a:ln w="12700">
-            <a:solidFill>
-              <a:schemeClr val="accent3"/>
-            </a:solidFill>
-            <a:prstDash val="solid"/>
-          </a:ln>
-        </p:spPr>
-      </p:sp>
       <p:pic>
         <p:nvPicPr>
-          <p:cNvPr id="15" name="アイコン3" descr="preencoded.png">    </p:cNvPr>
+          <p:cNvPr id="18" name="穴3アイコン" descr="preencoded.png">    </p:cNvPr>
           <p:cNvPicPr>
             <a:picLocks noChangeAspect="1"/>
           </p:cNvPicPr>
@@ -3808,8 +3471,8 @@
         </p:blipFill>
         <p:spPr>
           <a:xfrm>
-            <a:off x="8592617" y="2008937"/>
-            <a:ext cx="416966" cy="416966"/>
+            <a:off x="6408115" y="4030675"/>
+            <a:ext cx="351130" cy="351130"/>
           </a:xfrm>
           <a:prstGeom prst="rect">
             <a:avLst/>
@@ -3818,14 +3481,14 @@
       </p:pic>
       <p:sp>
         <p:nvSpPr>
-          <p:cNvPr id="16" name="Text 11"/>
+          <p:cNvPr id="19" name="Text 14"/>
           <p:cNvSpPr txBox="1"/>
           <p:nvPr/>
         </p:nvSpPr>
         <p:spPr>
           <a:xfrm>
-            <a:off x="8366760" y="2880360"/>
-            <a:ext cx="3017520" cy="548640"/>
+            <a:off x="7132320" y="3749040"/>
+            <a:ext cx="4572000" cy="548640"/>
           </a:xfrm>
           <a:prstGeom prst="rect">
             <a:avLst/>
@@ -3841,30 +3504,30 @@
               <a:buNone/>
             </a:pPr>
             <a:r>
-              <a:rPr lang="en-US" sz="2400" b="1" dirty="0">
-                <a:solidFill>
-                  <a:schemeClr val="tx2"/>
+              <a:rPr lang="en-US" sz="2200" b="1" dirty="0">
+                <a:solidFill>
+                  <a:schemeClr val="tx1"/>
                 </a:solidFill>
                 <a:latin typeface="Yu Gothic" pitchFamily="34" charset="0"/>
                 <a:ea typeface="Yu Gothic" pitchFamily="34" charset="-122"/>
                 <a:cs typeface="Yu Gothic" pitchFamily="34" charset="-120"/>
               </a:rPr>
-              <a:t>AI の操作を管理する</a:t>
-            </a:r>
-            <a:endParaRPr lang="en-US" sz="2400" dirty="0"/>
-          </a:p>
-        </p:txBody>
-      </p:sp>
-      <p:sp>
-        <p:nvSpPr>
-          <p:cNvPr id="17" name="Text 12"/>
+              <a:t>自分が対象外の条件を見落とす</a:t>
+            </a:r>
+            <a:endParaRPr lang="en-US" sz="2200" dirty="0"/>
+          </a:p>
+        </p:txBody>
+      </p:sp>
+      <p:sp>
+        <p:nvSpPr>
+          <p:cNvPr id="20" name="Text 15"/>
           <p:cNvSpPr txBox="1"/>
           <p:nvPr/>
         </p:nvSpPr>
         <p:spPr>
           <a:xfrm>
-            <a:off x="8321040" y="3566160"/>
-            <a:ext cx="3154680" cy="2286000"/>
+            <a:off x="7132320" y="4297680"/>
+            <a:ext cx="4572000" cy="411480"/>
           </a:xfrm>
           <a:prstGeom prst="rect">
             <a:avLst/>
@@ -3873,59 +3536,149 @@
           <a:ln/>
         </p:spPr>
         <p:txBody>
-          <a:bodyPr wrap="square" lIns="0" tIns="0" rIns="0" bIns="0" rtlCol="0" anchor="t"/>
-          <a:lstStyle/>
-          <a:p>
-            <a:pPr marL="342900" indent="-342900">
-              <a:spcAft>
-                <a:spcPts val="800"/>
-              </a:spcAft>
-              <a:buSzPct val="100000"/>
-              <a:buChar char="•"/>
+          <a:bodyPr wrap="square" lIns="0" tIns="0" rIns="0" bIns="0" rtlCol="0" anchor="ctr"/>
+          <a:lstStyle/>
+          <a:p>
+            <a:pPr indent="0" marL="0">
+              <a:buNone/>
             </a:pPr>
             <a:r>
               <a:rPr lang="en-US" sz="1600" dirty="0">
                 <a:solidFill>
+                  <a:schemeClr val="accent6"/>
+                </a:solidFill>
+                <a:latin typeface="Yu Gothic" pitchFamily="34" charset="0"/>
+                <a:ea typeface="Yu Gothic" pitchFamily="34" charset="-122"/>
+                <a:cs typeface="Yu Gothic" pitchFamily="34" charset="-120"/>
+              </a:rPr>
+              <a:t>学年・地域・卒業後・使途</a:t>
+            </a:r>
+            <a:endParaRPr lang="en-US" sz="1600" dirty="0"/>
+          </a:p>
+        </p:txBody>
+      </p:sp>
+      <p:sp>
+        <p:nvSpPr>
+          <p:cNvPr id="21" name="穴4アイコン 円"/>
+          <p:cNvSpPr/>
+          <p:nvPr/>
+        </p:nvSpPr>
+        <p:spPr>
+          <a:xfrm>
+            <a:off x="6217920" y="4983480"/>
+            <a:ext cx="731520" cy="731520"/>
+          </a:xfrm>
+          <a:prstGeom prst="ellipse">
+            <a:avLst/>
+          </a:prstGeom>
+          <a:solidFill>
+            <a:schemeClr val="accent1"/>
+          </a:solidFill>
+          <a:ln w="12700">
+            <a:solidFill>
+              <a:schemeClr val="accent1"/>
+            </a:solidFill>
+            <a:prstDash val="solid"/>
+          </a:ln>
+        </p:spPr>
+      </p:sp>
+      <p:pic>
+        <p:nvPicPr>
+          <p:cNvPr id="22" name="穴4アイコン" descr="preencoded.png">    </p:cNvPr>
+          <p:cNvPicPr>
+            <a:picLocks noChangeAspect="1"/>
+          </p:cNvPicPr>
+          <p:nvPr/>
+        </p:nvPicPr>
+        <p:blipFill>
+          <a:blip r:embed="rId4"/>
+          <a:stretch>
+            <a:fillRect/>
+          </a:stretch>
+        </p:blipFill>
+        <p:spPr>
+          <a:xfrm>
+            <a:off x="6408115" y="5173675"/>
+            <a:ext cx="351130" cy="351130"/>
+          </a:xfrm>
+          <a:prstGeom prst="rect">
+            <a:avLst/>
+          </a:prstGeom>
+        </p:spPr>
+      </p:pic>
+      <p:sp>
+        <p:nvSpPr>
+          <p:cNvPr id="23" name="Text 17"/>
+          <p:cNvSpPr txBox="1"/>
+          <p:nvPr/>
+        </p:nvSpPr>
+        <p:spPr>
+          <a:xfrm>
+            <a:off x="7132320" y="4892040"/>
+            <a:ext cx="4572000" cy="548640"/>
+          </a:xfrm>
+          <a:prstGeom prst="rect">
+            <a:avLst/>
+          </a:prstGeom>
+          <a:noFill/>
+          <a:ln/>
+        </p:spPr>
+        <p:txBody>
+          <a:bodyPr wrap="square" lIns="0" tIns="0" rIns="0" bIns="0" rtlCol="0" anchor="ctr"/>
+          <a:lstStyle/>
+          <a:p>
+            <a:pPr indent="0" marL="0">
+              <a:buNone/>
+            </a:pPr>
+            <a:r>
+              <a:rPr lang="en-US" sz="2200" b="1" dirty="0">
+                <a:solidFill>
                   <a:schemeClr val="tx1"/>
                 </a:solidFill>
-              </a:rPr>
-              <a:t>実行前の検査、実行後の記録</a:t>
-            </a:r>
-            <a:endParaRPr lang="en-US" sz="1600" dirty="0"/>
-          </a:p>
-          <a:p>
-            <a:pPr marL="342900" indent="-342900">
-              <a:spcAft>
-                <a:spcPts val="800"/>
-              </a:spcAft>
-              <a:buSzPct val="100000"/>
-              <a:buChar char="•"/>
+                <a:latin typeface="Yu Gothic" pitchFamily="34" charset="0"/>
+                <a:ea typeface="Yu Gothic" pitchFamily="34" charset="-122"/>
+                <a:cs typeface="Yu Gothic" pitchFamily="34" charset="-120"/>
+              </a:rPr>
+              <a:t>「全部」と言えない</a:t>
+            </a:r>
+            <a:endParaRPr lang="en-US" sz="2200" dirty="0"/>
+          </a:p>
+        </p:txBody>
+      </p:sp>
+      <p:sp>
+        <p:nvSpPr>
+          <p:cNvPr id="24" name="Text 18"/>
+          <p:cNvSpPr txBox="1"/>
+          <p:nvPr/>
+        </p:nvSpPr>
+        <p:spPr>
+          <a:xfrm>
+            <a:off x="7132320" y="5440680"/>
+            <a:ext cx="4572000" cy="411480"/>
+          </a:xfrm>
+          <a:prstGeom prst="rect">
+            <a:avLst/>
+          </a:prstGeom>
+          <a:noFill/>
+          <a:ln/>
+        </p:spPr>
+        <p:txBody>
+          <a:bodyPr wrap="square" lIns="0" tIns="0" rIns="0" bIns="0" rtlCol="0" anchor="ctr"/>
+          <a:lstStyle/>
+          <a:p>
+            <a:pPr indent="0" marL="0">
+              <a:buNone/>
             </a:pPr>
             <a:r>
               <a:rPr lang="en-US" sz="1600" dirty="0">
                 <a:solidFill>
-                  <a:schemeClr val="tx1"/>
-                </a:solidFill>
-              </a:rPr>
-              <a:t>他の人に影響する操作は、本人の許可まで停止</a:t>
-            </a:r>
-            <a:endParaRPr lang="en-US" sz="1600" dirty="0"/>
-          </a:p>
-          <a:p>
-            <a:pPr marL="342900" indent="-342900">
-              <a:spcAft>
-                <a:spcPts val="800"/>
-              </a:spcAft>
-              <a:buSzPct val="100000"/>
-              <a:buChar char="•"/>
-            </a:pPr>
-            <a:r>
-              <a:rPr lang="en-US" sz="1600" dirty="0">
-                <a:solidFill>
-                  <a:schemeClr val="tx1"/>
-                </a:solidFill>
-              </a:rPr>
-              <a:t>AI は許可の操作を持たない</a:t>
+                  <a:schemeClr val="accent6"/>
+                </a:solidFill>
+                <a:latin typeface="Yu Gothic" pitchFamily="34" charset="0"/>
+                <a:ea typeface="Yu Gothic" pitchFamily="34" charset="-122"/>
+                <a:cs typeface="Yu Gothic" pitchFamily="34" charset="-120"/>
+              </a:rPr>
+              <a:t>どこまで探したか分からない</a:t>
             </a:r>
             <a:endParaRPr lang="en-US" sz="1600" dirty="0"/>
           </a:p>
@@ -4033,7 +3786,7 @@
                   <a:schemeClr val="tx2"/>
                 </a:solidFill>
               </a:rPr>
-              <a:t>デモ①  条件を入れると、確かめた結果が出る</a:t>
+              <a:t>探すのは AI、判定は「公式ページを読んだ」コード</a:t>
             </a:r>
             <a:endParaRPr lang="en-US" sz="3400" dirty="0"/>
           </a:p>
@@ -4041,147 +3794,18 @@
       </p:sp>
       <p:sp>
         <p:nvSpPr>
-          <p:cNvPr id="3" name="動画の枠（この上に動画を挿入）"/>
+          <p:cNvPr id="3" name="カード1"/>
           <p:cNvSpPr/>
           <p:nvPr/>
         </p:nvSpPr>
         <p:spPr>
           <a:xfrm>
-            <a:off x="548640" y="1417320"/>
-            <a:ext cx="7863840" cy="4425696"/>
+            <a:off x="548640" y="1508760"/>
+            <a:ext cx="3566160" cy="4480560"/>
           </a:xfrm>
           <a:prstGeom prst="roundRect">
             <a:avLst>
-              <a:gd name="adj" fmla="val 2479"/>
-            </a:avLst>
-          </a:prstGeom>
-          <a:solidFill>
-            <a:srgbClr val="EFEAF3"/>
-          </a:solidFill>
-          <a:ln w="19050">
-            <a:solidFill>
-              <a:srgbClr val="CAC4D0"/>
-            </a:solidFill>
-            <a:prstDash val="dash"/>
-          </a:ln>
-        </p:spPr>
-      </p:sp>
-      <p:pic>
-        <p:nvPicPr>
-          <p:cNvPr id="4" name="再生アイコン" descr="preencoded.png">    </p:cNvPr>
-          <p:cNvPicPr>
-            <a:picLocks noChangeAspect="1"/>
-          </p:cNvPicPr>
-          <p:nvPr/>
-        </p:nvPicPr>
-        <p:blipFill>
-          <a:blip r:embed="rId1"/>
-          <a:stretch>
-            <a:fillRect/>
-          </a:stretch>
-        </p:blipFill>
-        <p:spPr>
-          <a:xfrm>
-            <a:off x="4069080" y="2926080"/>
-            <a:ext cx="822960" cy="822960"/>
-          </a:xfrm>
-          <a:prstGeom prst="rect">
-            <a:avLst/>
-          </a:prstGeom>
-        </p:spPr>
-      </p:pic>
-      <p:sp>
-        <p:nvSpPr>
-          <p:cNvPr id="5" name="Text 2"/>
-          <p:cNvSpPr txBox="1"/>
-          <p:nvPr/>
-        </p:nvSpPr>
-        <p:spPr>
-          <a:xfrm>
-            <a:off x="548640" y="3840480"/>
-            <a:ext cx="7863840" cy="457200"/>
-          </a:xfrm>
-          <a:prstGeom prst="rect">
-            <a:avLst/>
-          </a:prstGeom>
-          <a:noFill/>
-          <a:ln/>
-        </p:spPr>
-        <p:txBody>
-          <a:bodyPr wrap="square" lIns="0" tIns="0" rIns="0" bIns="0" rtlCol="0" anchor="ctr"/>
-          <a:lstStyle/>
-          <a:p>
-            <a:pPr algn="ctr" indent="0" marL="0">
-              <a:buNone/>
-            </a:pPr>
-            <a:r>
-              <a:rPr lang="en-US" sz="2000" b="1" dirty="0">
-                <a:solidFill>
-                  <a:schemeClr val="accent1"/>
-                </a:solidFill>
-                <a:latin typeface="Yu Gothic" pitchFamily="34" charset="0"/>
-                <a:ea typeface="Yu Gothic" pitchFamily="34" charset="-122"/>
-                <a:cs typeface="Yu Gothic" pitchFamily="34" charset="-120"/>
-              </a:rPr>
-              <a:t>ここにデモ動画を挿入</a:t>
-            </a:r>
-            <a:endParaRPr lang="en-US" sz="2000" dirty="0"/>
-          </a:p>
-        </p:txBody>
-      </p:sp>
-      <p:sp>
-        <p:nvSpPr>
-          <p:cNvPr id="6" name="Text 3"/>
-          <p:cNvSpPr txBox="1"/>
-          <p:nvPr/>
-        </p:nvSpPr>
-        <p:spPr>
-          <a:xfrm>
-            <a:off x="1097280" y="4343400"/>
-            <a:ext cx="6766560" cy="640080"/>
-          </a:xfrm>
-          <a:prstGeom prst="rect">
-            <a:avLst/>
-          </a:prstGeom>
-          <a:noFill/>
-          <a:ln/>
-        </p:spPr>
-        <p:txBody>
-          <a:bodyPr wrap="square" lIns="0" tIns="0" rIns="0" bIns="0" rtlCol="0" anchor="ctr"/>
-          <a:lstStyle/>
-          <a:p>
-            <a:pPr algn="ctr" indent="0" marL="0">
-              <a:buNone/>
-            </a:pPr>
-            <a:r>
-              <a:rPr lang="en-US" sz="1200" dirty="0">
-                <a:solidFill>
-                  <a:schemeClr val="accent6"/>
-                </a:solidFill>
-                <a:latin typeface="Yu Gothic" pitchFamily="34" charset="0"/>
-                <a:ea typeface="Yu Gothic" pitchFamily="34" charset="-122"/>
-                <a:cs typeface="Yu Gothic" pitchFamily="34" charset="-120"/>
-              </a:rPr>
-              <a:t>［挿入］→［ビデオ］→［このコンピューター上のビデオ］。この枠に重ねて、サイズを合わせる（枠は削除してよい）</a:t>
-            </a:r>
-            <a:endParaRPr lang="en-US" sz="1200" dirty="0"/>
-          </a:p>
-        </p:txBody>
-      </p:sp>
-      <p:sp>
-        <p:nvSpPr>
-          <p:cNvPr id="7" name="ポイントの枠"/>
-          <p:cNvSpPr/>
-          <p:nvPr/>
-        </p:nvSpPr>
-        <p:spPr>
-          <a:xfrm>
-            <a:off x="8686800" y="1417320"/>
-            <a:ext cx="2953512" cy="4425696"/>
-          </a:xfrm>
-          <a:prstGeom prst="roundRect">
-            <a:avLst>
-              <a:gd name="adj" fmla="val 4644"/>
+              <a:gd name="adj" fmla="val 3846"/>
             </a:avLst>
           </a:prstGeom>
           <a:solidFill>
@@ -4197,14 +3821,63 @@
       </p:sp>
       <p:sp>
         <p:nvSpPr>
-          <p:cNvPr id="8" name="Text 5"/>
+          <p:cNvPr id="4" name="アイコン1 円"/>
+          <p:cNvSpPr/>
+          <p:nvPr/>
+        </p:nvSpPr>
+        <p:spPr>
+          <a:xfrm>
+            <a:off x="868680" y="1783080"/>
+            <a:ext cx="868680" cy="868680"/>
+          </a:xfrm>
+          <a:prstGeom prst="ellipse">
+            <a:avLst/>
+          </a:prstGeom>
+          <a:solidFill>
+            <a:schemeClr val="accent2"/>
+          </a:solidFill>
+          <a:ln w="12700">
+            <a:solidFill>
+              <a:schemeClr val="accent2"/>
+            </a:solidFill>
+            <a:prstDash val="solid"/>
+          </a:ln>
+        </p:spPr>
+      </p:sp>
+      <p:pic>
+        <p:nvPicPr>
+          <p:cNvPr id="5" name="アイコン1" descr="preencoded.png">    </p:cNvPr>
+          <p:cNvPicPr>
+            <a:picLocks noChangeAspect="1"/>
+          </p:cNvPicPr>
+          <p:nvPr/>
+        </p:nvPicPr>
+        <p:blipFill>
+          <a:blip r:embed="rId1"/>
+          <a:stretch>
+            <a:fillRect/>
+          </a:stretch>
+        </p:blipFill>
+        <p:spPr>
+          <a:xfrm>
+            <a:off x="1094537" y="2008937"/>
+            <a:ext cx="416966" cy="416966"/>
+          </a:xfrm>
+          <a:prstGeom prst="rect">
+            <a:avLst/>
+          </a:prstGeom>
+        </p:spPr>
+      </p:pic>
+      <p:sp>
+        <p:nvSpPr>
+          <p:cNvPr id="6" name="Text 3"/>
           <p:cNvSpPr txBox="1"/>
           <p:nvPr/>
         </p:nvSpPr>
         <p:spPr>
           <a:xfrm>
-            <a:off x="8961120" y="1645920"/>
-            <a:ext cx="2468880" cy="411480"/>
+            <a:off x="868680" y="2880360"/>
+            <a:ext cx="3017520" cy="548640"/>
           </a:xfrm>
           <a:prstGeom prst="rect">
             <a:avLst/>
@@ -4220,7 +3893,7 @@
               <a:buNone/>
             </a:pPr>
             <a:r>
-              <a:rPr lang="en-US" sz="1800" b="1" dirty="0">
+              <a:rPr lang="en-US" sz="2400" b="1" dirty="0">
                 <a:solidFill>
                   <a:schemeClr val="tx2"/>
                 </a:solidFill>
@@ -4228,22 +3901,22 @@
                 <a:ea typeface="Yu Gothic" pitchFamily="34" charset="-122"/>
                 <a:cs typeface="Yu Gothic" pitchFamily="34" charset="-120"/>
               </a:rPr>
-              <a:t>見てほしいところ</a:t>
-            </a:r>
-            <a:endParaRPr lang="en-US" sz="1800" dirty="0"/>
-          </a:p>
-        </p:txBody>
-      </p:sp>
-      <p:sp>
-        <p:nvSpPr>
-          <p:cNvPr id="9" name="Text 6"/>
+              <a:t>確かめる</a:t>
+            </a:r>
+            <a:endParaRPr lang="en-US" sz="2400" dirty="0"/>
+          </a:p>
+        </p:txBody>
+      </p:sp>
+      <p:sp>
+        <p:nvSpPr>
+          <p:cNvPr id="7" name="Text 4"/>
           <p:cNvSpPr txBox="1"/>
           <p:nvPr/>
         </p:nvSpPr>
         <p:spPr>
           <a:xfrm>
-            <a:off x="8961120" y="2194560"/>
-            <a:ext cx="2468880" cy="3474720"/>
+            <a:off x="822960" y="3566160"/>
+            <a:ext cx="3154680" cy="2286000"/>
           </a:xfrm>
           <a:prstGeom prst="rect">
             <a:avLst/>
@@ -4263,14 +3936,14 @@
               <a:buChar char="•"/>
             </a:pPr>
             <a:r>
-              <a:rPr lang="en-US" sz="1400" dirty="0">
+              <a:rPr lang="en-US" sz="1600" dirty="0">
                 <a:solidFill>
                   <a:schemeClr val="tx1"/>
                 </a:solidFill>
               </a:rPr>
-              <a:t>立場・地域・目的を入力</a:t>
-            </a:r>
-            <a:endParaRPr lang="en-US" sz="1400" dirty="0"/>
+              <a:t>Google 検索で候補を集める</a:t>
+            </a:r>
+            <a:endParaRPr lang="en-US" sz="1600" dirty="0"/>
           </a:p>
           <a:p>
             <a:pPr marL="342900" indent="-342900">
@@ -4281,14 +3954,14 @@
               <a:buChar char="•"/>
             </a:pPr>
             <a:r>
-              <a:rPr lang="en-US" sz="1400" dirty="0">
+              <a:rPr lang="en-US" sz="1600" dirty="0">
                 <a:solidFill>
                   <a:schemeClr val="tx1"/>
                 </a:solidFill>
               </a:rPr>
-              <a:t>検索中の経過表示</a:t>
-            </a:r>
-            <a:endParaRPr lang="en-US" sz="1400" dirty="0"/>
+              <a:t>公式ページを読み、条件を引用つきで抜く</a:t>
+            </a:r>
+            <a:endParaRPr lang="en-US" sz="1600" dirty="0"/>
           </a:p>
           <a:p>
             <a:pPr marL="342900" indent="-342900">
@@ -4299,15 +3972,152 @@
               <a:buChar char="•"/>
             </a:pPr>
             <a:r>
-              <a:rPr lang="en-US" sz="1400" dirty="0">
+              <a:rPr lang="en-US" sz="1600" dirty="0">
                 <a:solidFill>
                   <a:schemeClr val="tx1"/>
                 </a:solidFill>
               </a:rPr>
-              <a:t>応募できる／要確認／未確認／募集終了</a:t>
-            </a:r>
-            <a:endParaRPr lang="en-US" sz="1400" dirty="0"/>
-          </a:p>
+              <a:t>引用が原文にあるか、コードで照合</a:t>
+            </a:r>
+            <a:endParaRPr lang="en-US" sz="1600" dirty="0"/>
+          </a:p>
+        </p:txBody>
+      </p:sp>
+      <p:sp>
+        <p:nvSpPr>
+          <p:cNvPr id="8" name="カード2"/>
+          <p:cNvSpPr/>
+          <p:nvPr/>
+        </p:nvSpPr>
+        <p:spPr>
+          <a:xfrm>
+            <a:off x="4297680" y="1508760"/>
+            <a:ext cx="3566160" cy="4480560"/>
+          </a:xfrm>
+          <a:prstGeom prst="roundRect">
+            <a:avLst>
+              <a:gd name="adj" fmla="val 3846"/>
+            </a:avLst>
+          </a:prstGeom>
+          <a:solidFill>
+            <a:schemeClr val="bg2"/>
+          </a:solidFill>
+          <a:ln w="12700">
+            <a:solidFill>
+              <a:schemeClr val="bg2"/>
+            </a:solidFill>
+            <a:prstDash val="solid"/>
+          </a:ln>
+        </p:spPr>
+      </p:sp>
+      <p:sp>
+        <p:nvSpPr>
+          <p:cNvPr id="9" name="アイコン2 円"/>
+          <p:cNvSpPr/>
+          <p:nvPr/>
+        </p:nvSpPr>
+        <p:spPr>
+          <a:xfrm>
+            <a:off x="4617720" y="1783080"/>
+            <a:ext cx="868680" cy="868680"/>
+          </a:xfrm>
+          <a:prstGeom prst="ellipse">
+            <a:avLst/>
+          </a:prstGeom>
+          <a:solidFill>
+            <a:schemeClr val="accent1"/>
+          </a:solidFill>
+          <a:ln w="12700">
+            <a:solidFill>
+              <a:schemeClr val="accent1"/>
+            </a:solidFill>
+            <a:prstDash val="solid"/>
+          </a:ln>
+        </p:spPr>
+      </p:sp>
+      <p:pic>
+        <p:nvPicPr>
+          <p:cNvPr id="10" name="アイコン2" descr="preencoded.png">    </p:cNvPr>
+          <p:cNvPicPr>
+            <a:picLocks noChangeAspect="1"/>
+          </p:cNvPicPr>
+          <p:nvPr/>
+        </p:nvPicPr>
+        <p:blipFill>
+          <a:blip r:embed="rId2"/>
+          <a:stretch>
+            <a:fillRect/>
+          </a:stretch>
+        </p:blipFill>
+        <p:spPr>
+          <a:xfrm>
+            <a:off x="4843577" y="2008937"/>
+            <a:ext cx="416966" cy="416966"/>
+          </a:xfrm>
+          <a:prstGeom prst="rect">
+            <a:avLst/>
+          </a:prstGeom>
+        </p:spPr>
+      </p:pic>
+      <p:sp>
+        <p:nvSpPr>
+          <p:cNvPr id="11" name="Text 7"/>
+          <p:cNvSpPr txBox="1"/>
+          <p:nvPr/>
+        </p:nvSpPr>
+        <p:spPr>
+          <a:xfrm>
+            <a:off x="4617720" y="2880360"/>
+            <a:ext cx="3017520" cy="548640"/>
+          </a:xfrm>
+          <a:prstGeom prst="rect">
+            <a:avLst/>
+          </a:prstGeom>
+          <a:noFill/>
+          <a:ln/>
+        </p:spPr>
+        <p:txBody>
+          <a:bodyPr wrap="square" lIns="0" tIns="0" rIns="0" bIns="0" rtlCol="0" anchor="ctr"/>
+          <a:lstStyle/>
+          <a:p>
+            <a:pPr indent="0" marL="0">
+              <a:buNone/>
+            </a:pPr>
+            <a:r>
+              <a:rPr lang="en-US" sz="2400" b="1" dirty="0">
+                <a:solidFill>
+                  <a:schemeClr val="tx2"/>
+                </a:solidFill>
+                <a:latin typeface="Yu Gothic" pitchFamily="34" charset="0"/>
+                <a:ea typeface="Yu Gothic" pitchFamily="34" charset="-122"/>
+                <a:cs typeface="Yu Gothic" pitchFamily="34" charset="-120"/>
+              </a:rPr>
+              <a:t>隠さず分ける</a:t>
+            </a:r>
+            <a:endParaRPr lang="en-US" sz="2400" dirty="0"/>
+          </a:p>
+        </p:txBody>
+      </p:sp>
+      <p:sp>
+        <p:nvSpPr>
+          <p:cNvPr id="12" name="Text 8"/>
+          <p:cNvSpPr txBox="1"/>
+          <p:nvPr/>
+        </p:nvSpPr>
+        <p:spPr>
+          <a:xfrm>
+            <a:off x="4572000" y="3566160"/>
+            <a:ext cx="3154680" cy="2286000"/>
+          </a:xfrm>
+          <a:prstGeom prst="rect">
+            <a:avLst/>
+          </a:prstGeom>
+          <a:noFill/>
+          <a:ln/>
+        </p:spPr>
+        <p:txBody>
+          <a:bodyPr wrap="square" lIns="0" tIns="0" rIns="0" bIns="0" rtlCol="0" anchor="t"/>
+          <a:lstStyle/>
           <a:p>
             <a:pPr marL="342900" indent="-342900">
               <a:spcAft>
@@ -4317,14 +4127,14 @@
               <a:buChar char="•"/>
             </a:pPr>
             <a:r>
-              <a:rPr lang="en-US" sz="1400" dirty="0">
+              <a:rPr lang="en-US" sz="1600" dirty="0">
                 <a:solidFill>
                   <a:schemeClr val="tx1"/>
                 </a:solidFill>
               </a:rPr>
-              <a:t>「確認すること」の表示</a:t>
-            </a:r>
-            <a:endParaRPr lang="en-US" sz="1400" dirty="0"/>
+              <a:t>応募できる／要確認</a:t>
+            </a:r>
+            <a:endParaRPr lang="en-US" sz="1600" dirty="0"/>
           </a:p>
           <a:p>
             <a:pPr marL="342900" indent="-342900">
@@ -4335,14 +4145,14 @@
               <a:buChar char="•"/>
             </a:pPr>
             <a:r>
-              <a:rPr lang="en-US" sz="1400" dirty="0">
+              <a:rPr lang="en-US" sz="1600" dirty="0">
                 <a:solidFill>
                   <a:schemeClr val="tx1"/>
                 </a:solidFill>
               </a:rPr>
-              <a:t>立場・目的を替えて再検索</a:t>
-            </a:r>
-            <a:endParaRPr lang="en-US" sz="1400" dirty="0"/>
+              <a:t>目的が違う／未確認／募集終了</a:t>
+            </a:r>
+            <a:endParaRPr lang="en-US" sz="1600" dirty="0"/>
           </a:p>
           <a:p>
             <a:pPr marL="342900" indent="-342900">
@@ -4353,14 +4163,205 @@
               <a:buChar char="•"/>
             </a:pPr>
             <a:r>
-              <a:rPr lang="en-US" sz="1400" dirty="0">
+              <a:rPr lang="en-US" sz="1600" dirty="0">
                 <a:solidFill>
                   <a:schemeClr val="tx1"/>
                 </a:solidFill>
               </a:rPr>
-              <a:t>保存とCSV</a:t>
-            </a:r>
-            <a:endParaRPr lang="en-US" sz="1400" dirty="0"/>
+              <a:t>確認できない条件は「合っている」と言わない</a:t>
+            </a:r>
+            <a:endParaRPr lang="en-US" sz="1600" dirty="0"/>
+          </a:p>
+        </p:txBody>
+      </p:sp>
+      <p:sp>
+        <p:nvSpPr>
+          <p:cNvPr id="13" name="カード3"/>
+          <p:cNvSpPr/>
+          <p:nvPr/>
+        </p:nvSpPr>
+        <p:spPr>
+          <a:xfrm>
+            <a:off x="8046720" y="1508760"/>
+            <a:ext cx="3566160" cy="4480560"/>
+          </a:xfrm>
+          <a:prstGeom prst="roundRect">
+            <a:avLst>
+              <a:gd name="adj" fmla="val 3846"/>
+            </a:avLst>
+          </a:prstGeom>
+          <a:solidFill>
+            <a:schemeClr val="bg2"/>
+          </a:solidFill>
+          <a:ln w="12700">
+            <a:solidFill>
+              <a:schemeClr val="bg2"/>
+            </a:solidFill>
+            <a:prstDash val="solid"/>
+          </a:ln>
+        </p:spPr>
+      </p:sp>
+      <p:sp>
+        <p:nvSpPr>
+          <p:cNvPr id="14" name="アイコン3 円"/>
+          <p:cNvSpPr/>
+          <p:nvPr/>
+        </p:nvSpPr>
+        <p:spPr>
+          <a:xfrm>
+            <a:off x="8366760" y="1783080"/>
+            <a:ext cx="868680" cy="868680"/>
+          </a:xfrm>
+          <a:prstGeom prst="ellipse">
+            <a:avLst/>
+          </a:prstGeom>
+          <a:solidFill>
+            <a:schemeClr val="accent3"/>
+          </a:solidFill>
+          <a:ln w="12700">
+            <a:solidFill>
+              <a:schemeClr val="accent3"/>
+            </a:solidFill>
+            <a:prstDash val="solid"/>
+          </a:ln>
+        </p:spPr>
+      </p:sp>
+      <p:pic>
+        <p:nvPicPr>
+          <p:cNvPr id="15" name="アイコン3" descr="preencoded.png">    </p:cNvPr>
+          <p:cNvPicPr>
+            <a:picLocks noChangeAspect="1"/>
+          </p:cNvPicPr>
+          <p:nvPr/>
+        </p:nvPicPr>
+        <p:blipFill>
+          <a:blip r:embed="rId3"/>
+          <a:stretch>
+            <a:fillRect/>
+          </a:stretch>
+        </p:blipFill>
+        <p:spPr>
+          <a:xfrm>
+            <a:off x="8592617" y="2008937"/>
+            <a:ext cx="416966" cy="416966"/>
+          </a:xfrm>
+          <a:prstGeom prst="rect">
+            <a:avLst/>
+          </a:prstGeom>
+        </p:spPr>
+      </p:pic>
+      <p:sp>
+        <p:nvSpPr>
+          <p:cNvPr id="16" name="Text 11"/>
+          <p:cNvSpPr txBox="1"/>
+          <p:nvPr/>
+        </p:nvSpPr>
+        <p:spPr>
+          <a:xfrm>
+            <a:off x="8366760" y="2880360"/>
+            <a:ext cx="3017520" cy="548640"/>
+          </a:xfrm>
+          <a:prstGeom prst="rect">
+            <a:avLst/>
+          </a:prstGeom>
+          <a:noFill/>
+          <a:ln/>
+        </p:spPr>
+        <p:txBody>
+          <a:bodyPr wrap="square" lIns="0" tIns="0" rIns="0" bIns="0" rtlCol="0" anchor="ctr"/>
+          <a:lstStyle/>
+          <a:p>
+            <a:pPr indent="0" marL="0">
+              <a:buNone/>
+            </a:pPr>
+            <a:r>
+              <a:rPr lang="en-US" sz="2400" b="1" dirty="0">
+                <a:solidFill>
+                  <a:schemeClr val="tx2"/>
+                </a:solidFill>
+                <a:latin typeface="Yu Gothic" pitchFamily="34" charset="0"/>
+                <a:ea typeface="Yu Gothic" pitchFamily="34" charset="-122"/>
+                <a:cs typeface="Yu Gothic" pitchFamily="34" charset="-120"/>
+              </a:rPr>
+              <a:t>AI の操作を管理する</a:t>
+            </a:r>
+            <a:endParaRPr lang="en-US" sz="2400" dirty="0"/>
+          </a:p>
+        </p:txBody>
+      </p:sp>
+      <p:sp>
+        <p:nvSpPr>
+          <p:cNvPr id="17" name="Text 12"/>
+          <p:cNvSpPr txBox="1"/>
+          <p:nvPr/>
+        </p:nvSpPr>
+        <p:spPr>
+          <a:xfrm>
+            <a:off x="8321040" y="3566160"/>
+            <a:ext cx="3154680" cy="2286000"/>
+          </a:xfrm>
+          <a:prstGeom prst="rect">
+            <a:avLst/>
+          </a:prstGeom>
+          <a:noFill/>
+          <a:ln/>
+        </p:spPr>
+        <p:txBody>
+          <a:bodyPr wrap="square" lIns="0" tIns="0" rIns="0" bIns="0" rtlCol="0" anchor="t"/>
+          <a:lstStyle/>
+          <a:p>
+            <a:pPr marL="342900" indent="-342900">
+              <a:spcAft>
+                <a:spcPts val="800"/>
+              </a:spcAft>
+              <a:buSzPct val="100000"/>
+              <a:buChar char="•"/>
+            </a:pPr>
+            <a:r>
+              <a:rPr lang="en-US" sz="1600" dirty="0">
+                <a:solidFill>
+                  <a:schemeClr val="tx1"/>
+                </a:solidFill>
+              </a:rPr>
+              <a:t>実行前の検査、実行後の記録</a:t>
+            </a:r>
+            <a:endParaRPr lang="en-US" sz="1600" dirty="0"/>
+          </a:p>
+          <a:p>
+            <a:pPr marL="342900" indent="-342900">
+              <a:spcAft>
+                <a:spcPts val="800"/>
+              </a:spcAft>
+              <a:buSzPct val="100000"/>
+              <a:buChar char="•"/>
+            </a:pPr>
+            <a:r>
+              <a:rPr lang="en-US" sz="1600" dirty="0">
+                <a:solidFill>
+                  <a:schemeClr val="tx1"/>
+                </a:solidFill>
+              </a:rPr>
+              <a:t>他の人に影響する操作は、本人の許可まで停止</a:t>
+            </a:r>
+            <a:endParaRPr lang="en-US" sz="1600" dirty="0"/>
+          </a:p>
+          <a:p>
+            <a:pPr marL="342900" indent="-342900">
+              <a:spcAft>
+                <a:spcPts val="800"/>
+              </a:spcAft>
+              <a:buSzPct val="100000"/>
+              <a:buChar char="•"/>
+            </a:pPr>
+            <a:r>
+              <a:rPr lang="en-US" sz="1600" dirty="0">
+                <a:solidFill>
+                  <a:schemeClr val="tx1"/>
+                </a:solidFill>
+              </a:rPr>
+              <a:t>AI は許可の操作を持たない</a:t>
+            </a:r>
+            <a:endParaRPr lang="en-US" sz="1600" dirty="0"/>
           </a:p>
         </p:txBody>
       </p:sp>
@@ -4466,7 +4467,7 @@
                   <a:schemeClr val="tx2"/>
                 </a:solidFill>
               </a:rPr>
-              <a:t>デモ②  本人が許可するまで、動かない</a:t>
+              <a:t>デモ①  条件を入れると、確かめた結果が出る</a:t>
             </a:r>
             <a:endParaRPr lang="en-US" sz="3400" dirty="0"/>
           </a:p>
@@ -4701,7 +4702,7 @@
                   <a:schemeClr val="tx1"/>
                 </a:solidFill>
               </a:rPr>
-              <a:t>共有リストへの追加を依頼</a:t>
+              <a:t>立場・地域・目的を入力</a:t>
             </a:r>
             <a:endParaRPr lang="en-US" sz="1400" dirty="0"/>
           </a:p>
@@ -4719,7 +4720,7 @@
                   <a:schemeClr val="tx1"/>
                 </a:solidFill>
               </a:rPr>
-              <a:t>承認待ちで止まる</a:t>
+              <a:t>検索中の経過表示</a:t>
             </a:r>
             <a:endParaRPr lang="en-US" sz="1400" dirty="0"/>
           </a:p>
@@ -4737,7 +4738,7 @@
                   <a:schemeClr val="tx1"/>
                 </a:solidFill>
               </a:rPr>
-              <a:t>確認ダイアログ（押せるのは本人だけ）</a:t>
+              <a:t>応募できる／要確認／未確認／募集終了</a:t>
             </a:r>
             <a:endParaRPr lang="en-US" sz="1400" dirty="0"/>
           </a:p>
@@ -4755,7 +4756,7 @@
                   <a:schemeClr val="tx1"/>
                 </a:solidFill>
               </a:rPr>
-              <a:t>許可すると、1回だけ実行</a:t>
+              <a:t>「確認すること」の表示</a:t>
             </a:r>
             <a:endParaRPr lang="en-US" sz="1400" dirty="0"/>
           </a:p>
@@ -4773,7 +4774,25 @@
                   <a:schemeClr val="tx1"/>
                 </a:solidFill>
               </a:rPr>
-              <a:t>操作の記録（誰が・いつ・何を・なぜ）</a:t>
+              <a:t>立場・目的を替えて再検索</a:t>
+            </a:r>
+            <a:endParaRPr lang="en-US" sz="1400" dirty="0"/>
+          </a:p>
+          <a:p>
+            <a:pPr marL="342900" indent="-342900">
+              <a:spcAft>
+                <a:spcPts val="800"/>
+              </a:spcAft>
+              <a:buSzPct val="100000"/>
+              <a:buChar char="•"/>
+            </a:pPr>
+            <a:r>
+              <a:rPr lang="en-US" sz="1400" dirty="0">
+                <a:solidFill>
+                  <a:schemeClr val="tx1"/>
+                </a:solidFill>
+              </a:rPr>
+              <a:t>保存とCSV</a:t>
             </a:r>
             <a:endParaRPr lang="en-US" sz="1400" dirty="0"/>
           </a:p>
@@ -4881,15 +4900,42 @@
                   <a:schemeClr val="tx2"/>
                 </a:solidFill>
               </a:rPr>
-              <a:t>しくみ: 1つのエージェントと、コードの安全装置</a:t>
+              <a:t>デモ②  本人が許可するまで、動かない</a:t>
             </a:r>
             <a:endParaRPr lang="en-US" sz="3400" dirty="0"/>
           </a:p>
         </p:txBody>
+      </p:sp>
+      <p:sp>
+        <p:nvSpPr>
+          <p:cNvPr id="3" name="動画の枠（この上に動画を挿入）"/>
+          <p:cNvSpPr/>
+          <p:nvPr/>
+        </p:nvSpPr>
+        <p:spPr>
+          <a:xfrm>
+            <a:off x="548640" y="1417320"/>
+            <a:ext cx="7863840" cy="4425696"/>
+          </a:xfrm>
+          <a:prstGeom prst="roundRect">
+            <a:avLst>
+              <a:gd name="adj" fmla="val 2479"/>
+            </a:avLst>
+          </a:prstGeom>
+          <a:solidFill>
+            <a:srgbClr val="EFEAF3"/>
+          </a:solidFill>
+          <a:ln w="19050">
+            <a:solidFill>
+              <a:srgbClr val="CAC4D0"/>
+            </a:solidFill>
+            <a:prstDash val="dash"/>
+          </a:ln>
+        </p:spPr>
       </p:sp>
       <p:pic>
         <p:nvPicPr>
-          <p:cNvPr id="3" name="図1 全体像" descr="C:\Users\shohe\Agentic AI Hackathon\.claude\worktrees\progress-check-3e6fdb\docs\submission\architecture.png">    </p:cNvPr>
+          <p:cNvPr id="4" name="再生アイコン" descr="preencoded.png">    </p:cNvPr>
           <p:cNvPicPr>
             <a:picLocks noChangeAspect="1"/>
           </p:cNvPicPr>
@@ -4903,8 +4949,8 @@
         </p:blipFill>
         <p:spPr>
           <a:xfrm>
-            <a:off x="548640" y="1371600"/>
-            <a:ext cx="8074152" cy="4846320"/>
+            <a:off x="4069080" y="2926080"/>
+            <a:ext cx="822960" cy="822960"/>
           </a:xfrm>
           <a:prstGeom prst="rect">
             <a:avLst/>
@@ -4913,63 +4959,119 @@
       </p:pic>
       <p:sp>
         <p:nvSpPr>
-          <p:cNvPr id="4" name="要点アイコン1 円"/>
+          <p:cNvPr id="5" name="Text 2"/>
+          <p:cNvSpPr txBox="1"/>
+          <p:nvPr/>
+        </p:nvSpPr>
+        <p:spPr>
+          <a:xfrm>
+            <a:off x="548640" y="3840480"/>
+            <a:ext cx="7863840" cy="457200"/>
+          </a:xfrm>
+          <a:prstGeom prst="rect">
+            <a:avLst/>
+          </a:prstGeom>
+          <a:noFill/>
+          <a:ln/>
+        </p:spPr>
+        <p:txBody>
+          <a:bodyPr wrap="square" lIns="0" tIns="0" rIns="0" bIns="0" rtlCol="0" anchor="ctr"/>
+          <a:lstStyle/>
+          <a:p>
+            <a:pPr algn="ctr" indent="0" marL="0">
+              <a:buNone/>
+            </a:pPr>
+            <a:r>
+              <a:rPr lang="en-US" sz="2000" b="1" dirty="0">
+                <a:solidFill>
+                  <a:schemeClr val="accent1"/>
+                </a:solidFill>
+                <a:latin typeface="Yu Gothic" pitchFamily="34" charset="0"/>
+                <a:ea typeface="Yu Gothic" pitchFamily="34" charset="-122"/>
+                <a:cs typeface="Yu Gothic" pitchFamily="34" charset="-120"/>
+              </a:rPr>
+              <a:t>ここにデモ動画を挿入</a:t>
+            </a:r>
+            <a:endParaRPr lang="en-US" sz="2000" dirty="0"/>
+          </a:p>
+        </p:txBody>
+      </p:sp>
+      <p:sp>
+        <p:nvSpPr>
+          <p:cNvPr id="6" name="Text 3"/>
+          <p:cNvSpPr txBox="1"/>
+          <p:nvPr/>
+        </p:nvSpPr>
+        <p:spPr>
+          <a:xfrm>
+            <a:off x="1097280" y="4343400"/>
+            <a:ext cx="6766560" cy="640080"/>
+          </a:xfrm>
+          <a:prstGeom prst="rect">
+            <a:avLst/>
+          </a:prstGeom>
+          <a:noFill/>
+          <a:ln/>
+        </p:spPr>
+        <p:txBody>
+          <a:bodyPr wrap="square" lIns="0" tIns="0" rIns="0" bIns="0" rtlCol="0" anchor="ctr"/>
+          <a:lstStyle/>
+          <a:p>
+            <a:pPr algn="ctr" indent="0" marL="0">
+              <a:buNone/>
+            </a:pPr>
+            <a:r>
+              <a:rPr lang="en-US" sz="1200" dirty="0">
+                <a:solidFill>
+                  <a:schemeClr val="accent6"/>
+                </a:solidFill>
+                <a:latin typeface="Yu Gothic" pitchFamily="34" charset="0"/>
+                <a:ea typeface="Yu Gothic" pitchFamily="34" charset="-122"/>
+                <a:cs typeface="Yu Gothic" pitchFamily="34" charset="-120"/>
+              </a:rPr>
+              <a:t>［挿入］→［ビデオ］→［このコンピューター上のビデオ］。この枠に重ねて、サイズを合わせる（枠は削除してよい）</a:t>
+            </a:r>
+            <a:endParaRPr lang="en-US" sz="1200" dirty="0"/>
+          </a:p>
+        </p:txBody>
+      </p:sp>
+      <p:sp>
+        <p:nvSpPr>
+          <p:cNvPr id="7" name="ポイントの枠"/>
           <p:cNvSpPr/>
           <p:nvPr/>
         </p:nvSpPr>
         <p:spPr>
           <a:xfrm>
-            <a:off x="9144000" y="1463040"/>
-            <a:ext cx="640080" cy="640080"/>
-          </a:xfrm>
-          <a:prstGeom prst="ellipse">
-            <a:avLst/>
+            <a:off x="8686800" y="1417320"/>
+            <a:ext cx="2953512" cy="4425696"/>
+          </a:xfrm>
+          <a:prstGeom prst="roundRect">
+            <a:avLst>
+              <a:gd name="adj" fmla="val 4644"/>
+            </a:avLst>
           </a:prstGeom>
           <a:solidFill>
-            <a:schemeClr val="accent2"/>
+            <a:schemeClr val="bg2"/>
           </a:solidFill>
           <a:ln w="12700">
             <a:solidFill>
-              <a:schemeClr val="accent2"/>
+              <a:schemeClr val="bg2"/>
             </a:solidFill>
             <a:prstDash val="solid"/>
           </a:ln>
         </p:spPr>
       </p:sp>
-      <p:pic>
-        <p:nvPicPr>
-          <p:cNvPr id="5" name="要点アイコン1" descr="preencoded.png">    </p:cNvPr>
-          <p:cNvPicPr>
-            <a:picLocks noChangeAspect="1"/>
-          </p:cNvPicPr>
-          <p:nvPr/>
-        </p:nvPicPr>
-        <p:blipFill>
-          <a:blip r:embed="rId2"/>
-          <a:stretch>
-            <a:fillRect/>
-          </a:stretch>
-        </p:blipFill>
-        <p:spPr>
-          <a:xfrm>
-            <a:off x="9310421" y="1629461"/>
-            <a:ext cx="307238" cy="307238"/>
-          </a:xfrm>
-          <a:prstGeom prst="rect">
-            <a:avLst/>
-          </a:prstGeom>
-        </p:spPr>
-      </p:pic>
-      <p:sp>
-        <p:nvSpPr>
-          <p:cNvPr id="6" name="Text 2"/>
+      <p:sp>
+        <p:nvSpPr>
+          <p:cNvPr id="8" name="Text 5"/>
           <p:cNvSpPr txBox="1"/>
           <p:nvPr/>
         </p:nvSpPr>
         <p:spPr>
           <a:xfrm>
-            <a:off x="9921240" y="1417320"/>
-            <a:ext cx="1737360" cy="731520"/>
+            <a:off x="8961120" y="1645920"/>
+            <a:ext cx="2468880" cy="411480"/>
           </a:xfrm>
           <a:prstGeom prst="rect">
             <a:avLst/>
@@ -4985,7 +5087,7 @@
               <a:buNone/>
             </a:pPr>
             <a:r>
-              <a:rPr lang="en-US" sz="1500" b="1" dirty="0">
+              <a:rPr lang="en-US" sz="1800" b="1" dirty="0">
                 <a:solidFill>
                   <a:schemeClr val="tx2"/>
                 </a:solidFill>
@@ -4993,22 +5095,22 @@
                 <a:ea typeface="Yu Gothic" pitchFamily="34" charset="-122"/>
                 <a:cs typeface="Yu Gothic" pitchFamily="34" charset="-120"/>
               </a:rPr>
-              <a:t>AI は読み取りだけ</a:t>
-            </a:r>
-            <a:endParaRPr lang="en-US" sz="1500" dirty="0"/>
-          </a:p>
-        </p:txBody>
-      </p:sp>
-      <p:sp>
-        <p:nvSpPr>
-          <p:cNvPr id="7" name="Text 3"/>
+              <a:t>見てほしいところ</a:t>
+            </a:r>
+            <a:endParaRPr lang="en-US" sz="1800" dirty="0"/>
+          </a:p>
+        </p:txBody>
+      </p:sp>
+      <p:sp>
+        <p:nvSpPr>
+          <p:cNvPr id="9" name="Text 6"/>
           <p:cNvSpPr txBox="1"/>
           <p:nvPr/>
         </p:nvSpPr>
         <p:spPr>
           <a:xfrm>
-            <a:off x="9144000" y="2194560"/>
-            <a:ext cx="2514600" cy="640080"/>
+            <a:off x="8961120" y="2194560"/>
+            <a:ext cx="2468880" cy="3474720"/>
           </a:xfrm>
           <a:prstGeom prst="rect">
             <a:avLst/>
@@ -5020,275 +5122,94 @@
           <a:bodyPr wrap="square" lIns="0" tIns="0" rIns="0" bIns="0" rtlCol="0" anchor="t"/>
           <a:lstStyle/>
           <a:p>
-            <a:pPr indent="0" marL="0">
-              <a:buNone/>
-            </a:pPr>
-            <a:r>
-              <a:rPr lang="en-US" sz="1200" dirty="0">
-                <a:solidFill>
-                  <a:schemeClr val="accent6"/>
-                </a:solidFill>
-                <a:latin typeface="Yu Gothic" pitchFamily="34" charset="0"/>
-                <a:ea typeface="Yu Gothic" pitchFamily="34" charset="-122"/>
-                <a:cs typeface="Yu Gothic" pitchFamily="34" charset="-120"/>
-              </a:rPr>
-              <a:t>エージェントは1つ。ツールは3つ</a:t>
-            </a:r>
-            <a:endParaRPr lang="en-US" sz="1200" dirty="0"/>
-          </a:p>
-        </p:txBody>
-      </p:sp>
-      <p:sp>
-        <p:nvSpPr>
-          <p:cNvPr id="8" name="要点アイコン2 円"/>
-          <p:cNvSpPr/>
-          <p:nvPr/>
-        </p:nvSpPr>
-        <p:spPr>
-          <a:xfrm>
-            <a:off x="9144000" y="3063240"/>
-            <a:ext cx="640080" cy="640080"/>
-          </a:xfrm>
-          <a:prstGeom prst="ellipse">
-            <a:avLst/>
-          </a:prstGeom>
-          <a:solidFill>
-            <a:schemeClr val="accent1"/>
-          </a:solidFill>
-          <a:ln w="12700">
-            <a:solidFill>
-              <a:schemeClr val="accent1"/>
-            </a:solidFill>
-            <a:prstDash val="solid"/>
-          </a:ln>
-        </p:spPr>
-      </p:sp>
-      <p:pic>
-        <p:nvPicPr>
-          <p:cNvPr id="9" name="要点アイコン2" descr="preencoded.png">    </p:cNvPr>
-          <p:cNvPicPr>
-            <a:picLocks noChangeAspect="1"/>
-          </p:cNvPicPr>
-          <p:nvPr/>
-        </p:nvPicPr>
-        <p:blipFill>
-          <a:blip r:embed="rId3"/>
-          <a:stretch>
-            <a:fillRect/>
-          </a:stretch>
-        </p:blipFill>
-        <p:spPr>
-          <a:xfrm>
-            <a:off x="9310421" y="3229661"/>
-            <a:ext cx="307238" cy="307238"/>
-          </a:xfrm>
-          <a:prstGeom prst="rect">
-            <a:avLst/>
-          </a:prstGeom>
-        </p:spPr>
-      </p:pic>
-      <p:sp>
-        <p:nvSpPr>
-          <p:cNvPr id="10" name="Text 5"/>
-          <p:cNvSpPr txBox="1"/>
-          <p:nvPr/>
-        </p:nvSpPr>
-        <p:spPr>
-          <a:xfrm>
-            <a:off x="9921240" y="3017520"/>
-            <a:ext cx="1737360" cy="731520"/>
-          </a:xfrm>
-          <a:prstGeom prst="rect">
-            <a:avLst/>
-          </a:prstGeom>
-          <a:noFill/>
-          <a:ln/>
-        </p:spPr>
-        <p:txBody>
-          <a:bodyPr wrap="square" lIns="0" tIns="0" rIns="0" bIns="0" rtlCol="0" anchor="ctr"/>
-          <a:lstStyle/>
-          <a:p>
-            <a:pPr indent="0" marL="0">
-              <a:buNone/>
-            </a:pPr>
-            <a:r>
-              <a:rPr lang="en-US" sz="1500" b="1" dirty="0">
-                <a:solidFill>
-                  <a:schemeClr val="tx2"/>
-                </a:solidFill>
-                <a:latin typeface="Yu Gothic" pitchFamily="34" charset="0"/>
-                <a:ea typeface="Yu Gothic" pitchFamily="34" charset="-122"/>
-                <a:cs typeface="Yu Gothic" pitchFamily="34" charset="-120"/>
-              </a:rPr>
-              <a:t>判定・安全はコード</a:t>
-            </a:r>
-            <a:endParaRPr lang="en-US" sz="1500" dirty="0"/>
-          </a:p>
-        </p:txBody>
-      </p:sp>
-      <p:sp>
-        <p:nvSpPr>
-          <p:cNvPr id="11" name="Text 6"/>
-          <p:cNvSpPr txBox="1"/>
-          <p:nvPr/>
-        </p:nvSpPr>
-        <p:spPr>
-          <a:xfrm>
-            <a:off x="9144000" y="3794760"/>
-            <a:ext cx="2514600" cy="640080"/>
-          </a:xfrm>
-          <a:prstGeom prst="rect">
-            <a:avLst/>
-          </a:prstGeom>
-          <a:noFill/>
-          <a:ln/>
-        </p:spPr>
-        <p:txBody>
-          <a:bodyPr wrap="square" lIns="0" tIns="0" rIns="0" bIns="0" rtlCol="0" anchor="t"/>
-          <a:lstStyle/>
-          <a:p>
-            <a:pPr indent="0" marL="0">
-              <a:buNone/>
-            </a:pPr>
-            <a:r>
-              <a:rPr lang="en-US" sz="1200" dirty="0">
-                <a:solidFill>
-                  <a:schemeClr val="accent6"/>
-                </a:solidFill>
-                <a:latin typeface="Yu Gothic" pitchFamily="34" charset="0"/>
-                <a:ea typeface="Yu Gothic" pitchFamily="34" charset="-122"/>
-                <a:cs typeface="Yu Gothic" pitchFamily="34" charset="-120"/>
-              </a:rPr>
-              <a:t>検査・承認・監査ログ・上限</a:t>
-            </a:r>
-            <a:endParaRPr lang="en-US" sz="1200" dirty="0"/>
-          </a:p>
-        </p:txBody>
-      </p:sp>
-      <p:sp>
-        <p:nvSpPr>
-          <p:cNvPr id="12" name="要点アイコン3 円"/>
-          <p:cNvSpPr/>
-          <p:nvPr/>
-        </p:nvSpPr>
-        <p:spPr>
-          <a:xfrm>
-            <a:off x="9144000" y="4663440"/>
-            <a:ext cx="640080" cy="640080"/>
-          </a:xfrm>
-          <a:prstGeom prst="ellipse">
-            <a:avLst/>
-          </a:prstGeom>
-          <a:solidFill>
-            <a:schemeClr val="accent3"/>
-          </a:solidFill>
-          <a:ln w="12700">
-            <a:solidFill>
-              <a:schemeClr val="accent3"/>
-            </a:solidFill>
-            <a:prstDash val="solid"/>
-          </a:ln>
-        </p:spPr>
-      </p:sp>
-      <p:pic>
-        <p:nvPicPr>
-          <p:cNvPr id="13" name="要点アイコン3" descr="preencoded.png">    </p:cNvPr>
-          <p:cNvPicPr>
-            <a:picLocks noChangeAspect="1"/>
-          </p:cNvPicPr>
-          <p:nvPr/>
-        </p:nvPicPr>
-        <p:blipFill>
-          <a:blip r:embed="rId4"/>
-          <a:stretch>
-            <a:fillRect/>
-          </a:stretch>
-        </p:blipFill>
-        <p:spPr>
-          <a:xfrm>
-            <a:off x="9310421" y="4829861"/>
-            <a:ext cx="307238" cy="307238"/>
-          </a:xfrm>
-          <a:prstGeom prst="rect">
-            <a:avLst/>
-          </a:prstGeom>
-        </p:spPr>
-      </p:pic>
-      <p:sp>
-        <p:nvSpPr>
-          <p:cNvPr id="14" name="Text 8"/>
-          <p:cNvSpPr txBox="1"/>
-          <p:nvPr/>
-        </p:nvSpPr>
-        <p:spPr>
-          <a:xfrm>
-            <a:off x="9921240" y="4617720"/>
-            <a:ext cx="1737360" cy="731520"/>
-          </a:xfrm>
-          <a:prstGeom prst="rect">
-            <a:avLst/>
-          </a:prstGeom>
-          <a:noFill/>
-          <a:ln/>
-        </p:spPr>
-        <p:txBody>
-          <a:bodyPr wrap="square" lIns="0" tIns="0" rIns="0" bIns="0" rtlCol="0" anchor="ctr"/>
-          <a:lstStyle/>
-          <a:p>
-            <a:pPr indent="0" marL="0">
-              <a:buNone/>
-            </a:pPr>
-            <a:r>
-              <a:rPr lang="en-US" sz="1500" b="1" dirty="0">
-                <a:solidFill>
-                  <a:schemeClr val="tx2"/>
-                </a:solidFill>
-                <a:latin typeface="Yu Gothic" pitchFamily="34" charset="0"/>
-                <a:ea typeface="Yu Gothic" pitchFamily="34" charset="-122"/>
-                <a:cs typeface="Yu Gothic" pitchFamily="34" charset="-120"/>
-              </a:rPr>
-              <a:t>最小権限</a:t>
-            </a:r>
-            <a:endParaRPr lang="en-US" sz="1500" dirty="0"/>
-          </a:p>
-        </p:txBody>
-      </p:sp>
-      <p:sp>
-        <p:nvSpPr>
-          <p:cNvPr id="15" name="Text 9"/>
-          <p:cNvSpPr txBox="1"/>
-          <p:nvPr/>
-        </p:nvSpPr>
-        <p:spPr>
-          <a:xfrm>
-            <a:off x="9144000" y="5394960"/>
-            <a:ext cx="2514600" cy="640080"/>
-          </a:xfrm>
-          <a:prstGeom prst="rect">
-            <a:avLst/>
-          </a:prstGeom>
-          <a:noFill/>
-          <a:ln/>
-        </p:spPr>
-        <p:txBody>
-          <a:bodyPr wrap="square" lIns="0" tIns="0" rIns="0" bIns="0" rtlCol="0" anchor="t"/>
-          <a:lstStyle/>
-          <a:p>
-            <a:pPr indent="0" marL="0">
-              <a:buNone/>
-            </a:pPr>
-            <a:r>
-              <a:rPr lang="en-US" sz="1200" dirty="0">
-                <a:solidFill>
-                  <a:schemeClr val="accent6"/>
-                </a:solidFill>
-                <a:latin typeface="Yu Gothic" pitchFamily="34" charset="0"/>
-                <a:ea typeface="Yu Gothic" pitchFamily="34" charset="-122"/>
-                <a:cs typeface="Yu Gothic" pitchFamily="34" charset="-120"/>
-              </a:rPr>
-              <a:t>専用アカウント・最大1インスタンス</a:t>
-            </a:r>
-            <a:endParaRPr lang="en-US" sz="1200" dirty="0"/>
+            <a:pPr marL="342900" indent="-342900">
+              <a:spcAft>
+                <a:spcPts val="800"/>
+              </a:spcAft>
+              <a:buSzPct val="100000"/>
+              <a:buChar char="•"/>
+            </a:pPr>
+            <a:r>
+              <a:rPr lang="en-US" sz="1400" dirty="0">
+                <a:solidFill>
+                  <a:schemeClr val="tx1"/>
+                </a:solidFill>
+              </a:rPr>
+              <a:t>共有リストへの追加を依頼</a:t>
+            </a:r>
+            <a:endParaRPr lang="en-US" sz="1400" dirty="0"/>
+          </a:p>
+          <a:p>
+            <a:pPr marL="342900" indent="-342900">
+              <a:spcAft>
+                <a:spcPts val="800"/>
+              </a:spcAft>
+              <a:buSzPct val="100000"/>
+              <a:buChar char="•"/>
+            </a:pPr>
+            <a:r>
+              <a:rPr lang="en-US" sz="1400" dirty="0">
+                <a:solidFill>
+                  <a:schemeClr val="tx1"/>
+                </a:solidFill>
+              </a:rPr>
+              <a:t>承認待ちで止まる</a:t>
+            </a:r>
+            <a:endParaRPr lang="en-US" sz="1400" dirty="0"/>
+          </a:p>
+          <a:p>
+            <a:pPr marL="342900" indent="-342900">
+              <a:spcAft>
+                <a:spcPts val="800"/>
+              </a:spcAft>
+              <a:buSzPct val="100000"/>
+              <a:buChar char="•"/>
+            </a:pPr>
+            <a:r>
+              <a:rPr lang="en-US" sz="1400" dirty="0">
+                <a:solidFill>
+                  <a:schemeClr val="tx1"/>
+                </a:solidFill>
+              </a:rPr>
+              <a:t>確認ダイアログ（押せるのは本人だけ）</a:t>
+            </a:r>
+            <a:endParaRPr lang="en-US" sz="1400" dirty="0"/>
+          </a:p>
+          <a:p>
+            <a:pPr marL="342900" indent="-342900">
+              <a:spcAft>
+                <a:spcPts val="800"/>
+              </a:spcAft>
+              <a:buSzPct val="100000"/>
+              <a:buChar char="•"/>
+            </a:pPr>
+            <a:r>
+              <a:rPr lang="en-US" sz="1400" dirty="0">
+                <a:solidFill>
+                  <a:schemeClr val="tx1"/>
+                </a:solidFill>
+              </a:rPr>
+              <a:t>許可すると、1回だけ実行</a:t>
+            </a:r>
+            <a:endParaRPr lang="en-US" sz="1400" dirty="0"/>
+          </a:p>
+          <a:p>
+            <a:pPr marL="342900" indent="-342900">
+              <a:spcAft>
+                <a:spcPts val="800"/>
+              </a:spcAft>
+              <a:buSzPct val="100000"/>
+              <a:buChar char="•"/>
+            </a:pPr>
+            <a:r>
+              <a:rPr lang="en-US" sz="1400" dirty="0">
+                <a:solidFill>
+                  <a:schemeClr val="tx1"/>
+                </a:solidFill>
+              </a:rPr>
+              <a:t>操作の記録（誰が・いつ・何を・なぜ）</a:t>
+            </a:r>
+            <a:endParaRPr lang="en-US" sz="1400" dirty="0"/>
           </a:p>
         </p:txBody>
       </p:sp>
@@ -5394,49 +5315,95 @@
                   <a:schemeClr val="tx2"/>
                 </a:solidFill>
               </a:rPr>
-              <a:t>評価: 数字と、正直な限界</a:t>
+              <a:t>しくみ: 1つのエージェントと、コードの安全装置</a:t>
             </a:r>
             <a:endParaRPr lang="en-US" sz="3400" dirty="0"/>
           </a:p>
         </p:txBody>
       </p:sp>
-      <p:sp>
-        <p:nvSpPr>
-          <p:cNvPr id="3" name="評価カード1"/>
+      <p:pic>
+        <p:nvPicPr>
+          <p:cNvPr id="3" name="図1 全体像" descr="C:\Users\shohe\Agentic AI Hackathon\.claude\worktrees\progress-check-3e6fdb\docs\submission\architecture.png">    </p:cNvPr>
+          <p:cNvPicPr>
+            <a:picLocks noChangeAspect="1"/>
+          </p:cNvPicPr>
+          <p:nvPr/>
+        </p:nvPicPr>
+        <p:blipFill>
+          <a:blip r:embed="rId1"/>
+          <a:stretch>
+            <a:fillRect/>
+          </a:stretch>
+        </p:blipFill>
+        <p:spPr>
+          <a:xfrm>
+            <a:off x="548640" y="1371600"/>
+            <a:ext cx="8074152" cy="4846320"/>
+          </a:xfrm>
+          <a:prstGeom prst="rect">
+            <a:avLst/>
+          </a:prstGeom>
+        </p:spPr>
+      </p:pic>
+      <p:sp>
+        <p:nvSpPr>
+          <p:cNvPr id="4" name="要点アイコン1 円"/>
           <p:cNvSpPr/>
           <p:nvPr/>
         </p:nvSpPr>
         <p:spPr>
           <a:xfrm>
-            <a:off x="548640" y="1463040"/>
-            <a:ext cx="2651760" cy="2194560"/>
-          </a:xfrm>
-          <a:prstGeom prst="roundRect">
-            <a:avLst>
-              <a:gd name="adj" fmla="val 6250"/>
-            </a:avLst>
+            <a:off x="9144000" y="1463040"/>
+            <a:ext cx="640080" cy="640080"/>
+          </a:xfrm>
+          <a:prstGeom prst="ellipse">
+            <a:avLst/>
           </a:prstGeom>
           <a:solidFill>
-            <a:schemeClr val="bg2"/>
+            <a:schemeClr val="accent2"/>
           </a:solidFill>
           <a:ln w="12700">
             <a:solidFill>
-              <a:schemeClr val="bg2"/>
+              <a:schemeClr val="accent2"/>
             </a:solidFill>
             <a:prstDash val="solid"/>
           </a:ln>
         </p:spPr>
       </p:sp>
-      <p:sp>
-        <p:nvSpPr>
-          <p:cNvPr id="4" name="Text 2"/>
+      <p:pic>
+        <p:nvPicPr>
+          <p:cNvPr id="5" name="要点アイコン1" descr="preencoded.png">    </p:cNvPr>
+          <p:cNvPicPr>
+            <a:picLocks noChangeAspect="1"/>
+          </p:cNvPicPr>
+          <p:nvPr/>
+        </p:nvPicPr>
+        <p:blipFill>
+          <a:blip r:embed="rId2"/>
+          <a:stretch>
+            <a:fillRect/>
+          </a:stretch>
+        </p:blipFill>
+        <p:spPr>
+          <a:xfrm>
+            <a:off x="9310421" y="1629461"/>
+            <a:ext cx="307238" cy="307238"/>
+          </a:xfrm>
+          <a:prstGeom prst="rect">
+            <a:avLst/>
+          </a:prstGeom>
+        </p:spPr>
+      </p:pic>
+      <p:sp>
+        <p:nvSpPr>
+          <p:cNvPr id="6" name="Text 2"/>
           <p:cNvSpPr txBox="1"/>
           <p:nvPr/>
         </p:nvSpPr>
         <p:spPr>
           <a:xfrm>
-            <a:off x="731520" y="1600200"/>
-            <a:ext cx="2286000" cy="1005840"/>
+            <a:off x="9921240" y="1417320"/>
+            <a:ext cx="1737360" cy="731520"/>
           </a:xfrm>
           <a:prstGeom prst="rect">
             <a:avLst/>
@@ -5452,30 +5419,30 @@
               <a:buNone/>
             </a:pPr>
             <a:r>
-              <a:rPr lang="en-US" sz="4000" b="1" dirty="0">
-                <a:solidFill>
-                  <a:schemeClr val="accent1"/>
+              <a:rPr lang="en-US" sz="1500" b="1" dirty="0">
+                <a:solidFill>
+                  <a:schemeClr val="tx2"/>
                 </a:solidFill>
                 <a:latin typeface="Yu Gothic" pitchFamily="34" charset="0"/>
                 <a:ea typeface="Yu Gothic" pitchFamily="34" charset="-122"/>
                 <a:cs typeface="Yu Gothic" pitchFamily="34" charset="-120"/>
               </a:rPr>
-              <a:t>176</a:t>
-            </a:r>
-            <a:endParaRPr lang="en-US" sz="4000" dirty="0"/>
-          </a:p>
-        </p:txBody>
-      </p:sp>
-      <p:sp>
-        <p:nvSpPr>
-          <p:cNvPr id="5" name="Text 3"/>
+              <a:t>AI は読み取りだけ</a:t>
+            </a:r>
+            <a:endParaRPr lang="en-US" sz="1500" dirty="0"/>
+          </a:p>
+        </p:txBody>
+      </p:sp>
+      <p:sp>
+        <p:nvSpPr>
+          <p:cNvPr id="7" name="Text 3"/>
           <p:cNvSpPr txBox="1"/>
           <p:nvPr/>
         </p:nvSpPr>
         <p:spPr>
           <a:xfrm>
-            <a:off x="731520" y="2651760"/>
-            <a:ext cx="2286000" cy="868680"/>
+            <a:off x="9144000" y="2194560"/>
+            <a:ext cx="2514600" cy="640080"/>
           </a:xfrm>
           <a:prstGeom prst="rect">
             <a:avLst/>
@@ -5491,57 +5458,79 @@
               <a:buNone/>
             </a:pPr>
             <a:r>
-              <a:rPr lang="en-US" sz="1400" dirty="0">
-                <a:solidFill>
-                  <a:schemeClr val="tx1"/>
+              <a:rPr lang="en-US" sz="1200" dirty="0">
+                <a:solidFill>
+                  <a:schemeClr val="accent6"/>
                 </a:solidFill>
                 <a:latin typeface="Yu Gothic" pitchFamily="34" charset="0"/>
                 <a:ea typeface="Yu Gothic" pitchFamily="34" charset="-122"/>
                 <a:cs typeface="Yu Gothic" pitchFamily="34" charset="-120"/>
               </a:rPr>
-              <a:t>自動テスト（全件合格）</a:t>
-            </a:r>
-            <a:endParaRPr lang="en-US" sz="1400" dirty="0"/>
-          </a:p>
-        </p:txBody>
-      </p:sp>
-      <p:sp>
-        <p:nvSpPr>
-          <p:cNvPr id="6" name="評価カード2"/>
+              <a:t>エージェントは1つ。ツールは3つ</a:t>
+            </a:r>
+            <a:endParaRPr lang="en-US" sz="1200" dirty="0"/>
+          </a:p>
+        </p:txBody>
+      </p:sp>
+      <p:sp>
+        <p:nvSpPr>
+          <p:cNvPr id="8" name="要点アイコン2 円"/>
           <p:cNvSpPr/>
           <p:nvPr/>
         </p:nvSpPr>
         <p:spPr>
           <a:xfrm>
-            <a:off x="3364992" y="1463040"/>
-            <a:ext cx="2651760" cy="2194560"/>
-          </a:xfrm>
-          <a:prstGeom prst="roundRect">
-            <a:avLst>
-              <a:gd name="adj" fmla="val 6250"/>
-            </a:avLst>
+            <a:off x="9144000" y="3063240"/>
+            <a:ext cx="640080" cy="640080"/>
+          </a:xfrm>
+          <a:prstGeom prst="ellipse">
+            <a:avLst/>
           </a:prstGeom>
           <a:solidFill>
-            <a:schemeClr val="bg2"/>
+            <a:schemeClr val="accent1"/>
           </a:solidFill>
           <a:ln w="12700">
             <a:solidFill>
-              <a:schemeClr val="bg2"/>
+              <a:schemeClr val="accent1"/>
             </a:solidFill>
             <a:prstDash val="solid"/>
           </a:ln>
         </p:spPr>
       </p:sp>
-      <p:sp>
-        <p:nvSpPr>
-          <p:cNvPr id="7" name="Text 5"/>
+      <p:pic>
+        <p:nvPicPr>
+          <p:cNvPr id="9" name="要点アイコン2" descr="preencoded.png">    </p:cNvPr>
+          <p:cNvPicPr>
+            <a:picLocks noChangeAspect="1"/>
+          </p:cNvPicPr>
+          <p:nvPr/>
+        </p:nvPicPr>
+        <p:blipFill>
+          <a:blip r:embed="rId3"/>
+          <a:stretch>
+            <a:fillRect/>
+          </a:stretch>
+        </p:blipFill>
+        <p:spPr>
+          <a:xfrm>
+            <a:off x="9310421" y="3229661"/>
+            <a:ext cx="307238" cy="307238"/>
+          </a:xfrm>
+          <a:prstGeom prst="rect">
+            <a:avLst/>
+          </a:prstGeom>
+        </p:spPr>
+      </p:pic>
+      <p:sp>
+        <p:nvSpPr>
+          <p:cNvPr id="10" name="Text 5"/>
           <p:cNvSpPr txBox="1"/>
           <p:nvPr/>
         </p:nvSpPr>
         <p:spPr>
           <a:xfrm>
-            <a:off x="3547872" y="1600200"/>
-            <a:ext cx="2286000" cy="1005840"/>
+            <a:off x="9921240" y="3017520"/>
+            <a:ext cx="1737360" cy="731520"/>
           </a:xfrm>
           <a:prstGeom prst="rect">
             <a:avLst/>
@@ -5557,30 +5546,30 @@
               <a:buNone/>
             </a:pPr>
             <a:r>
-              <a:rPr lang="en-US" sz="4000" b="1" dirty="0">
-                <a:solidFill>
-                  <a:schemeClr val="accent1"/>
+              <a:rPr lang="en-US" sz="1500" b="1" dirty="0">
+                <a:solidFill>
+                  <a:schemeClr val="tx2"/>
                 </a:solidFill>
                 <a:latin typeface="Yu Gothic" pitchFamily="34" charset="0"/>
                 <a:ea typeface="Yu Gothic" pitchFamily="34" charset="-122"/>
                 <a:cs typeface="Yu Gothic" pitchFamily="34" charset="-120"/>
               </a:rPr>
-              <a:t>7</a:t>
-            </a:r>
-            <a:endParaRPr lang="en-US" sz="4000" dirty="0"/>
-          </a:p>
-        </p:txBody>
-      </p:sp>
-      <p:sp>
-        <p:nvSpPr>
-          <p:cNvPr id="8" name="Text 6"/>
+              <a:t>判定・安全はコード</a:t>
+            </a:r>
+            <a:endParaRPr lang="en-US" sz="1500" dirty="0"/>
+          </a:p>
+        </p:txBody>
+      </p:sp>
+      <p:sp>
+        <p:nvSpPr>
+          <p:cNvPr id="11" name="Text 6"/>
           <p:cNvSpPr txBox="1"/>
           <p:nvPr/>
         </p:nvSpPr>
         <p:spPr>
           <a:xfrm>
-            <a:off x="3547872" y="2651760"/>
-            <a:ext cx="2286000" cy="868680"/>
+            <a:off x="9144000" y="3794760"/>
+            <a:ext cx="2514600" cy="640080"/>
           </a:xfrm>
           <a:prstGeom prst="rect">
             <a:avLst/>
@@ -5596,57 +5585,79 @@
               <a:buNone/>
             </a:pPr>
             <a:r>
-              <a:rPr lang="en-US" sz="1400" dirty="0">
-                <a:solidFill>
-                  <a:schemeClr val="tx1"/>
+              <a:rPr lang="en-US" sz="1200" dirty="0">
+                <a:solidFill>
+                  <a:schemeClr val="accent6"/>
                 </a:solidFill>
                 <a:latin typeface="Yu Gothic" pitchFamily="34" charset="0"/>
                 <a:ea typeface="Yu Gothic" pitchFamily="34" charset="-122"/>
                 <a:cs typeface="Yu Gothic" pitchFamily="34" charset="-120"/>
               </a:rPr>
-              <a:t>adk eval のケース（全件合格）</a:t>
-            </a:r>
-            <a:endParaRPr lang="en-US" sz="1400" dirty="0"/>
-          </a:p>
-        </p:txBody>
-      </p:sp>
-      <p:sp>
-        <p:nvSpPr>
-          <p:cNvPr id="9" name="評価カード3"/>
+              <a:t>検査・承認・監査ログ・上限</a:t>
+            </a:r>
+            <a:endParaRPr lang="en-US" sz="1200" dirty="0"/>
+          </a:p>
+        </p:txBody>
+      </p:sp>
+      <p:sp>
+        <p:nvSpPr>
+          <p:cNvPr id="12" name="要点アイコン3 円"/>
           <p:cNvSpPr/>
           <p:nvPr/>
         </p:nvSpPr>
         <p:spPr>
           <a:xfrm>
-            <a:off x="6181344" y="1463040"/>
-            <a:ext cx="2651760" cy="2194560"/>
-          </a:xfrm>
-          <a:prstGeom prst="roundRect">
-            <a:avLst>
-              <a:gd name="adj" fmla="val 6250"/>
-            </a:avLst>
+            <a:off x="9144000" y="4663440"/>
+            <a:ext cx="640080" cy="640080"/>
+          </a:xfrm>
+          <a:prstGeom prst="ellipse">
+            <a:avLst/>
           </a:prstGeom>
           <a:solidFill>
-            <a:schemeClr val="bg2"/>
+            <a:schemeClr val="accent3"/>
           </a:solidFill>
           <a:ln w="12700">
             <a:solidFill>
-              <a:schemeClr val="bg2"/>
+              <a:schemeClr val="accent3"/>
             </a:solidFill>
             <a:prstDash val="solid"/>
           </a:ln>
         </p:spPr>
       </p:sp>
-      <p:sp>
-        <p:nvSpPr>
-          <p:cNvPr id="10" name="Text 8"/>
+      <p:pic>
+        <p:nvPicPr>
+          <p:cNvPr id="13" name="要点アイコン3" descr="preencoded.png">    </p:cNvPr>
+          <p:cNvPicPr>
+            <a:picLocks noChangeAspect="1"/>
+          </p:cNvPicPr>
+          <p:nvPr/>
+        </p:nvPicPr>
+        <p:blipFill>
+          <a:blip r:embed="rId4"/>
+          <a:stretch>
+            <a:fillRect/>
+          </a:stretch>
+        </p:blipFill>
+        <p:spPr>
+          <a:xfrm>
+            <a:off x="9310421" y="4829861"/>
+            <a:ext cx="307238" cy="307238"/>
+          </a:xfrm>
+          <a:prstGeom prst="rect">
+            <a:avLst/>
+          </a:prstGeom>
+        </p:spPr>
+      </p:pic>
+      <p:sp>
+        <p:nvSpPr>
+          <p:cNvPr id="14" name="Text 8"/>
           <p:cNvSpPr txBox="1"/>
           <p:nvPr/>
         </p:nvSpPr>
         <p:spPr>
           <a:xfrm>
-            <a:off x="6364224" y="1600200"/>
-            <a:ext cx="2286000" cy="1005840"/>
+            <a:off x="9921240" y="4617720"/>
+            <a:ext cx="1737360" cy="731520"/>
           </a:xfrm>
           <a:prstGeom prst="rect">
             <a:avLst/>
@@ -5662,30 +5673,30 @@
               <a:buNone/>
             </a:pPr>
             <a:r>
-              <a:rPr lang="en-US" sz="4000" b="1" dirty="0">
-                <a:solidFill>
-                  <a:schemeClr val="accent1"/>
+              <a:rPr lang="en-US" sz="1500" b="1" dirty="0">
+                <a:solidFill>
+                  <a:schemeClr val="tx2"/>
                 </a:solidFill>
                 <a:latin typeface="Yu Gothic" pitchFamily="34" charset="0"/>
                 <a:ea typeface="Yu Gothic" pitchFamily="34" charset="-122"/>
                 <a:cs typeface="Yu Gothic" pitchFamily="34" charset="-120"/>
               </a:rPr>
-              <a:t>12 / 34</a:t>
-            </a:r>
-            <a:endParaRPr lang="en-US" sz="4000" dirty="0"/>
-          </a:p>
-        </p:txBody>
-      </p:sp>
-      <p:sp>
-        <p:nvSpPr>
-          <p:cNvPr id="11" name="Text 9"/>
+              <a:t>最小権限</a:t>
+            </a:r>
+            <a:endParaRPr lang="en-US" sz="1500" dirty="0"/>
+          </a:p>
+        </p:txBody>
+      </p:sp>
+      <p:sp>
+        <p:nvSpPr>
+          <p:cNvPr id="15" name="Text 9"/>
           <p:cNvSpPr txBox="1"/>
           <p:nvPr/>
         </p:nvSpPr>
         <p:spPr>
           <a:xfrm>
-            <a:off x="6364224" y="2651760"/>
-            <a:ext cx="2286000" cy="868680"/>
+            <a:off x="9144000" y="5394960"/>
+            <a:ext cx="2514600" cy="640080"/>
           </a:xfrm>
           <a:prstGeom prst="rect">
             <a:avLst/>
@@ -5701,237 +5712,17 @@
               <a:buNone/>
             </a:pPr>
             <a:r>
-              <a:rPr lang="en-US" sz="1400" dirty="0">
-                <a:solidFill>
-                  <a:schemeClr val="tx1"/>
+              <a:rPr lang="en-US" sz="1200" dirty="0">
+                <a:solidFill>
+                  <a:schemeClr val="accent6"/>
                 </a:solidFill>
                 <a:latin typeface="Yu Gothic" pitchFamily="34" charset="0"/>
                 <a:ea typeface="Yu Gothic" pitchFamily="34" charset="-122"/>
                 <a:cs typeface="Yu Gothic" pitchFamily="34" charset="-120"/>
               </a:rPr>
-              <a:t>素のAIの回答のうち、募集終了</a:t>
-            </a:r>
-            <a:endParaRPr lang="en-US" sz="1400" dirty="0"/>
-          </a:p>
-        </p:txBody>
-      </p:sp>
-      <p:sp>
-        <p:nvSpPr>
-          <p:cNvPr id="12" name="評価カード4"/>
-          <p:cNvSpPr/>
-          <p:nvPr/>
-        </p:nvSpPr>
-        <p:spPr>
-          <a:xfrm>
-            <a:off x="8997696" y="1463040"/>
-            <a:ext cx="2651760" cy="2194560"/>
-          </a:xfrm>
-          <a:prstGeom prst="roundRect">
-            <a:avLst>
-              <a:gd name="adj" fmla="val 6250"/>
-            </a:avLst>
-          </a:prstGeom>
-          <a:solidFill>
-            <a:schemeClr val="bg2"/>
-          </a:solidFill>
-          <a:ln w="12700">
-            <a:solidFill>
-              <a:schemeClr val="bg2"/>
-            </a:solidFill>
-            <a:prstDash val="solid"/>
-          </a:ln>
-        </p:spPr>
-      </p:sp>
-      <p:sp>
-        <p:nvSpPr>
-          <p:cNvPr id="13" name="Text 11"/>
-          <p:cNvSpPr txBox="1"/>
-          <p:nvPr/>
-        </p:nvSpPr>
-        <p:spPr>
-          <a:xfrm>
-            <a:off x="9180576" y="1600200"/>
-            <a:ext cx="2286000" cy="1005840"/>
-          </a:xfrm>
-          <a:prstGeom prst="rect">
-            <a:avLst/>
-          </a:prstGeom>
-          <a:noFill/>
-          <a:ln/>
-        </p:spPr>
-        <p:txBody>
-          <a:bodyPr wrap="square" lIns="0" tIns="0" rIns="0" bIns="0" rtlCol="0" anchor="ctr"/>
-          <a:lstStyle/>
-          <a:p>
-            <a:pPr indent="0" marL="0">
-              <a:buNone/>
-            </a:pPr>
-            <a:r>
-              <a:rPr lang="en-US" sz="4000" b="1" dirty="0">
-                <a:solidFill>
-                  <a:schemeClr val="accent1"/>
-                </a:solidFill>
-                <a:latin typeface="Yu Gothic" pitchFamily="34" charset="0"/>
-                <a:ea typeface="Yu Gothic" pitchFamily="34" charset="-122"/>
-                <a:cs typeface="Yu Gothic" pitchFamily="34" charset="-120"/>
-              </a:rPr>
-              <a:t>17 対 15</a:t>
-            </a:r>
-            <a:endParaRPr lang="en-US" sz="4000" dirty="0"/>
-          </a:p>
-        </p:txBody>
-      </p:sp>
-      <p:sp>
-        <p:nvSpPr>
-          <p:cNvPr id="14" name="Text 12"/>
-          <p:cNvSpPr txBox="1"/>
-          <p:nvPr/>
-        </p:nvSpPr>
-        <p:spPr>
-          <a:xfrm>
-            <a:off x="9180576" y="2651760"/>
-            <a:ext cx="2286000" cy="868680"/>
-          </a:xfrm>
-          <a:prstGeom prst="rect">
-            <a:avLst/>
-          </a:prstGeom>
-          <a:noFill/>
-          <a:ln/>
-        </p:spPr>
-        <p:txBody>
-          <a:bodyPr wrap="square" lIns="0" tIns="0" rIns="0" bIns="0" rtlCol="0" anchor="t"/>
-          <a:lstStyle/>
-          <a:p>
-            <a:pPr indent="0" marL="0">
-              <a:buNone/>
-            </a:pPr>
-            <a:r>
-              <a:rPr lang="en-US" sz="1400" dirty="0">
-                <a:solidFill>
-                  <a:schemeClr val="tx1"/>
-                </a:solidFill>
-                <a:latin typeface="Yu Gothic" pitchFamily="34" charset="0"/>
-                <a:ea typeface="Yu Gothic" pitchFamily="34" charset="-122"/>
-                <a:cs typeface="Yu Gothic" pitchFamily="34" charset="-120"/>
-              </a:rPr>
-              <a:t>見つけた「使える」件数（本エージェント 対 素のAI）</a:t>
-            </a:r>
-            <a:endParaRPr lang="en-US" sz="1400" dirty="0"/>
-          </a:p>
-        </p:txBody>
-      </p:sp>
-      <p:sp>
-        <p:nvSpPr>
-          <p:cNvPr id="15" name="Text 13"/>
-          <p:cNvSpPr txBox="1"/>
-          <p:nvPr/>
-        </p:nvSpPr>
-        <p:spPr>
-          <a:xfrm>
-            <a:off x="548640" y="3977640"/>
-            <a:ext cx="5486400" cy="457200"/>
-          </a:xfrm>
-          <a:prstGeom prst="rect">
-            <a:avLst/>
-          </a:prstGeom>
-          <a:noFill/>
-          <a:ln/>
-        </p:spPr>
-        <p:txBody>
-          <a:bodyPr wrap="square" lIns="0" tIns="0" rIns="0" bIns="0" rtlCol="0" anchor="ctr"/>
-          <a:lstStyle/>
-          <a:p>
-            <a:pPr indent="0" marL="0">
-              <a:buNone/>
-            </a:pPr>
-            <a:r>
-              <a:rPr lang="en-US" sz="2200" b="1" dirty="0">
-                <a:solidFill>
-                  <a:schemeClr val="tx2"/>
-                </a:solidFill>
-                <a:latin typeface="Yu Gothic" pitchFamily="34" charset="0"/>
-                <a:ea typeface="Yu Gothic" pitchFamily="34" charset="-122"/>
-                <a:cs typeface="Yu Gothic" pitchFamily="34" charset="-120"/>
-              </a:rPr>
-              <a:t>正直な限界</a:t>
-            </a:r>
-            <a:endParaRPr lang="en-US" sz="2200" dirty="0"/>
-          </a:p>
-        </p:txBody>
-      </p:sp>
-      <p:sp>
-        <p:nvSpPr>
-          <p:cNvPr id="16" name="Text 14"/>
-          <p:cNvSpPr txBox="1"/>
-          <p:nvPr/>
-        </p:nvSpPr>
-        <p:spPr>
-          <a:xfrm>
-            <a:off x="548640" y="4526280"/>
-            <a:ext cx="11064240" cy="1645920"/>
-          </a:xfrm>
-          <a:prstGeom prst="rect">
-            <a:avLst/>
-          </a:prstGeom>
-          <a:noFill/>
-          <a:ln/>
-        </p:spPr>
-        <p:txBody>
-          <a:bodyPr wrap="square" lIns="0" tIns="0" rIns="0" bIns="0" rtlCol="0" anchor="t"/>
-          <a:lstStyle/>
-          <a:p>
-            <a:pPr marL="342900" indent="-342900">
-              <a:spcAft>
-                <a:spcPts val="800"/>
-              </a:spcAft>
-              <a:buSzPct val="100000"/>
-              <a:buChar char="•"/>
-            </a:pPr>
-            <a:r>
-              <a:rPr lang="en-US" sz="1800" dirty="0">
-                <a:solidFill>
-                  <a:schemeClr val="tx1"/>
-                </a:solidFill>
-              </a:rPr>
-              <a:t>見つかる件数は同程度。差は「確かさ」（募集終了を分ける、引用で確認した締切）</a:t>
-            </a:r>
-            <a:endParaRPr lang="en-US" sz="1800" dirty="0"/>
-          </a:p>
-          <a:p>
-            <a:pPr marL="342900" indent="-342900">
-              <a:spcAft>
-                <a:spcPts val="800"/>
-              </a:spcAft>
-              <a:buSzPct val="100000"/>
-              <a:buChar char="•"/>
-            </a:pPr>
-            <a:r>
-              <a:rPr lang="en-US" sz="1800" dirty="0">
-                <a:solidFill>
-                  <a:schemeClr val="tx1"/>
-                </a:solidFill>
-              </a:rPr>
-              <a:t>比較は4つの立場で各1回。小さな実験で、「大幅に多く見つける」とは言わない</a:t>
-            </a:r>
-            <a:endParaRPr lang="en-US" sz="1800" dirty="0"/>
-          </a:p>
-          <a:p>
-            <a:pPr marL="342900" indent="-342900">
-              <a:spcAft>
-                <a:spcPts val="800"/>
-              </a:spcAft>
-              <a:buSzPct val="100000"/>
-              <a:buChar char="•"/>
-            </a:pPr>
-            <a:r>
-              <a:rPr lang="en-US" sz="1800" dirty="0">
-                <a:solidFill>
-                  <a:schemeClr val="tx1"/>
-                </a:solidFill>
-              </a:rPr>
-              <a:t>最初の検索語（年度の固定）は、この実験で劣る原因と分かり、直した</a:t>
-            </a:r>
-            <a:endParaRPr lang="en-US" sz="1800" dirty="0"/>
+              <a:t>専用アカウント・最大1インスタンス</a:t>
+            </a:r>
+            <a:endParaRPr lang="en-US" sz="1200" dirty="0"/>
           </a:p>
         </p:txBody>
       </p:sp>
@@ -6007,14 +5798,16 @@
       </p:grpSpPr>
       <p:sp>
         <p:nvSpPr>
-          <p:cNvPr id="2" name="Text 0"/>
-          <p:cNvSpPr txBox="1"/>
-          <p:nvPr/>
-        </p:nvSpPr>
-        <p:spPr>
-          <a:xfrm>
-            <a:off x="731520" y="1188720"/>
-            <a:ext cx="10515600" cy="2011680"/>
+          <p:cNvPr id="2" name="Text 1"/>
+          <p:cNvSpPr/>
+          <p:nvPr>
+            <p:ph idx="101" type="title" hasCustomPrompt="1"/>
+          </p:nvPr>
+        </p:nvSpPr>
+        <p:spPr>
+          <a:xfrm>
+            <a:off x="548640" y="365760"/>
+            <a:ext cx="11064240" cy="868680"/>
           </a:xfrm>
           <a:prstGeom prst="rect">
             <a:avLst/>
@@ -6023,54 +5816,166 @@
           <a:ln/>
         </p:spPr>
         <p:txBody>
-          <a:bodyPr wrap="square" lIns="0" tIns="0" rIns="0" bIns="0" rtlCol="0" anchor="t"/>
+          <a:bodyPr wrap="square" lIns="0" tIns="0" rIns="0" bIns="0" rtlCol="0" anchor="ctr"/>
+          <a:lstStyle/>
+          <a:p>
+            <a:pPr algn="l" indent="0" marL="0">
+              <a:buNone/>
+            </a:pPr>
+            <a:r>
+              <a:rPr lang="en-US" sz="3400" b="1" dirty="0">
+                <a:solidFill>
+                  <a:schemeClr val="tx2"/>
+                </a:solidFill>
+              </a:rPr>
+              <a:t>評価: 数字と、正直な限界</a:t>
+            </a:r>
+            <a:endParaRPr lang="en-US" sz="3400" dirty="0"/>
+          </a:p>
+        </p:txBody>
+      </p:sp>
+      <p:sp>
+        <p:nvSpPr>
+          <p:cNvPr id="3" name="評価カード1"/>
+          <p:cNvSpPr/>
+          <p:nvPr/>
+        </p:nvSpPr>
+        <p:spPr>
+          <a:xfrm>
+            <a:off x="548640" y="1463040"/>
+            <a:ext cx="2651760" cy="2194560"/>
+          </a:xfrm>
+          <a:prstGeom prst="roundRect">
+            <a:avLst>
+              <a:gd name="adj" fmla="val 6250"/>
+            </a:avLst>
+          </a:prstGeom>
+          <a:solidFill>
+            <a:schemeClr val="bg2"/>
+          </a:solidFill>
+          <a:ln w="12700">
+            <a:solidFill>
+              <a:schemeClr val="bg2"/>
+            </a:solidFill>
+            <a:prstDash val="solid"/>
+          </a:ln>
+        </p:spPr>
+      </p:sp>
+      <p:sp>
+        <p:nvSpPr>
+          <p:cNvPr id="4" name="Text 2"/>
+          <p:cNvSpPr txBox="1"/>
+          <p:nvPr/>
+        </p:nvSpPr>
+        <p:spPr>
+          <a:xfrm>
+            <a:off x="731520" y="1600200"/>
+            <a:ext cx="2286000" cy="1005840"/>
+          </a:xfrm>
+          <a:prstGeom prst="rect">
+            <a:avLst/>
+          </a:prstGeom>
+          <a:noFill/>
+          <a:ln/>
+        </p:spPr>
+        <p:txBody>
+          <a:bodyPr wrap="square" lIns="0" tIns="0" rIns="0" bIns="0" rtlCol="0" anchor="ctr"/>
           <a:lstStyle/>
           <a:p>
             <a:pPr indent="0" marL="0">
               <a:buNone/>
             </a:pPr>
             <a:r>
-              <a:rPr lang="en-US" sz="5200" b="1" dirty="0">
-                <a:solidFill>
-                  <a:schemeClr val="bg1"/>
+              <a:rPr lang="en-US" sz="4000" b="1" dirty="0">
+                <a:solidFill>
+                  <a:schemeClr val="accent1"/>
                 </a:solidFill>
                 <a:latin typeface="Yu Gothic" pitchFamily="34" charset="0"/>
                 <a:ea typeface="Yu Gothic" pitchFamily="34" charset="-122"/>
                 <a:cs typeface="Yu Gothic" pitchFamily="34" charset="-120"/>
               </a:rPr>
-              <a:t>応募できる奨学金を、</a:t>
-            </a:r>
-            <a:endParaRPr lang="en-US" sz="5200" dirty="0"/>
-          </a:p>
+              <a:t>176</a:t>
+            </a:r>
+            <a:endParaRPr lang="en-US" sz="4000" dirty="0"/>
+          </a:p>
+        </p:txBody>
+      </p:sp>
+      <p:sp>
+        <p:nvSpPr>
+          <p:cNvPr id="5" name="Text 3"/>
+          <p:cNvSpPr txBox="1"/>
+          <p:nvPr/>
+        </p:nvSpPr>
+        <p:spPr>
+          <a:xfrm>
+            <a:off x="731520" y="2651760"/>
+            <a:ext cx="2286000" cy="868680"/>
+          </a:xfrm>
+          <a:prstGeom prst="rect">
+            <a:avLst/>
+          </a:prstGeom>
+          <a:noFill/>
+          <a:ln/>
+        </p:spPr>
+        <p:txBody>
+          <a:bodyPr wrap="square" lIns="0" tIns="0" rIns="0" bIns="0" rtlCol="0" anchor="t"/>
+          <a:lstStyle/>
           <a:p>
             <a:pPr indent="0" marL="0">
               <a:buNone/>
             </a:pPr>
             <a:r>
-              <a:rPr lang="en-US" sz="5200" b="1" dirty="0">
-                <a:solidFill>
-                  <a:schemeClr val="bg1"/>
+              <a:rPr lang="en-US" sz="1400" dirty="0">
+                <a:solidFill>
+                  <a:schemeClr val="tx1"/>
                 </a:solidFill>
                 <a:latin typeface="Yu Gothic" pitchFamily="34" charset="0"/>
                 <a:ea typeface="Yu Gothic" pitchFamily="34" charset="-122"/>
                 <a:cs typeface="Yu Gothic" pitchFamily="34" charset="-120"/>
               </a:rPr>
-              <a:t>間に合ううちに。</a:t>
-            </a:r>
-            <a:endParaRPr lang="en-US" sz="5200" dirty="0"/>
-          </a:p>
-        </p:txBody>
-      </p:sp>
-      <p:sp>
-        <p:nvSpPr>
-          <p:cNvPr id="3" name="Text 1"/>
+              <a:t>自動テスト（全件合格）</a:t>
+            </a:r>
+            <a:endParaRPr lang="en-US" sz="1400" dirty="0"/>
+          </a:p>
+        </p:txBody>
+      </p:sp>
+      <p:sp>
+        <p:nvSpPr>
+          <p:cNvPr id="6" name="評価カード2"/>
+          <p:cNvSpPr/>
+          <p:nvPr/>
+        </p:nvSpPr>
+        <p:spPr>
+          <a:xfrm>
+            <a:off x="3364992" y="1463040"/>
+            <a:ext cx="2651760" cy="2194560"/>
+          </a:xfrm>
+          <a:prstGeom prst="roundRect">
+            <a:avLst>
+              <a:gd name="adj" fmla="val 6250"/>
+            </a:avLst>
+          </a:prstGeom>
+          <a:solidFill>
+            <a:schemeClr val="bg2"/>
+          </a:solidFill>
+          <a:ln w="12700">
+            <a:solidFill>
+              <a:schemeClr val="bg2"/>
+            </a:solidFill>
+            <a:prstDash val="solid"/>
+          </a:ln>
+        </p:spPr>
+      </p:sp>
+      <p:sp>
+        <p:nvSpPr>
+          <p:cNvPr id="7" name="Text 5"/>
           <p:cNvSpPr txBox="1"/>
           <p:nvPr/>
         </p:nvSpPr>
         <p:spPr>
           <a:xfrm>
-            <a:off x="731520" y="3566160"/>
-            <a:ext cx="5486400" cy="457200"/>
+            <a:off x="3547872" y="1600200"/>
+            <a:ext cx="2286000" cy="1005840"/>
           </a:xfrm>
           <a:prstGeom prst="rect">
             <a:avLst/>
@@ -6086,30 +5991,30 @@
               <a:buNone/>
             </a:pPr>
             <a:r>
-              <a:rPr lang="en-US" sz="2000" b="1" dirty="0">
-                <a:solidFill>
-                  <a:srgbClr val="CADCFC"/>
+              <a:rPr lang="en-US" sz="4000" b="1" dirty="0">
+                <a:solidFill>
+                  <a:schemeClr val="accent1"/>
                 </a:solidFill>
                 <a:latin typeface="Yu Gothic" pitchFamily="34" charset="0"/>
                 <a:ea typeface="Yu Gothic" pitchFamily="34" charset="-122"/>
                 <a:cs typeface="Yu Gothic" pitchFamily="34" charset="-120"/>
               </a:rPr>
-              <a:t>これからの拡張</a:t>
-            </a:r>
-            <a:endParaRPr lang="en-US" sz="2000" dirty="0"/>
-          </a:p>
-        </p:txBody>
-      </p:sp>
-      <p:sp>
-        <p:nvSpPr>
-          <p:cNvPr id="4" name="Text 2"/>
+              <a:t>7</a:t>
+            </a:r>
+            <a:endParaRPr lang="en-US" sz="4000" dirty="0"/>
+          </a:p>
+        </p:txBody>
+      </p:sp>
+      <p:sp>
+        <p:nvSpPr>
+          <p:cNvPr id="8" name="Text 6"/>
           <p:cNvSpPr txBox="1"/>
           <p:nvPr/>
         </p:nvSpPr>
         <p:spPr>
           <a:xfrm>
-            <a:off x="731520" y="4114800"/>
-            <a:ext cx="10515600" cy="1463040"/>
+            <a:off x="3547872" y="2651760"/>
+            <a:ext cx="2286000" cy="868680"/>
           </a:xfrm>
           <a:prstGeom prst="rect">
             <a:avLst/>
@@ -6121,9 +6026,297 @@
           <a:bodyPr wrap="square" lIns="0" tIns="0" rIns="0" bIns="0" rtlCol="0" anchor="t"/>
           <a:lstStyle/>
           <a:p>
+            <a:pPr indent="0" marL="0">
+              <a:buNone/>
+            </a:pPr>
+            <a:r>
+              <a:rPr lang="en-US" sz="1400" dirty="0">
+                <a:solidFill>
+                  <a:schemeClr val="tx1"/>
+                </a:solidFill>
+                <a:latin typeface="Yu Gothic" pitchFamily="34" charset="0"/>
+                <a:ea typeface="Yu Gothic" pitchFamily="34" charset="-122"/>
+                <a:cs typeface="Yu Gothic" pitchFamily="34" charset="-120"/>
+              </a:rPr>
+              <a:t>adk eval のケース（全件合格）</a:t>
+            </a:r>
+            <a:endParaRPr lang="en-US" sz="1400" dirty="0"/>
+          </a:p>
+        </p:txBody>
+      </p:sp>
+      <p:sp>
+        <p:nvSpPr>
+          <p:cNvPr id="9" name="評価カード3"/>
+          <p:cNvSpPr/>
+          <p:nvPr/>
+        </p:nvSpPr>
+        <p:spPr>
+          <a:xfrm>
+            <a:off x="6181344" y="1463040"/>
+            <a:ext cx="2651760" cy="2194560"/>
+          </a:xfrm>
+          <a:prstGeom prst="roundRect">
+            <a:avLst>
+              <a:gd name="adj" fmla="val 6250"/>
+            </a:avLst>
+          </a:prstGeom>
+          <a:solidFill>
+            <a:schemeClr val="bg2"/>
+          </a:solidFill>
+          <a:ln w="12700">
+            <a:solidFill>
+              <a:schemeClr val="bg2"/>
+            </a:solidFill>
+            <a:prstDash val="solid"/>
+          </a:ln>
+        </p:spPr>
+      </p:sp>
+      <p:sp>
+        <p:nvSpPr>
+          <p:cNvPr id="10" name="Text 8"/>
+          <p:cNvSpPr txBox="1"/>
+          <p:nvPr/>
+        </p:nvSpPr>
+        <p:spPr>
+          <a:xfrm>
+            <a:off x="6364224" y="1600200"/>
+            <a:ext cx="2286000" cy="1005840"/>
+          </a:xfrm>
+          <a:prstGeom prst="rect">
+            <a:avLst/>
+          </a:prstGeom>
+          <a:noFill/>
+          <a:ln/>
+        </p:spPr>
+        <p:txBody>
+          <a:bodyPr wrap="square" lIns="0" tIns="0" rIns="0" bIns="0" rtlCol="0" anchor="ctr"/>
+          <a:lstStyle/>
+          <a:p>
+            <a:pPr indent="0" marL="0">
+              <a:buNone/>
+            </a:pPr>
+            <a:r>
+              <a:rPr lang="en-US" sz="4000" b="1" dirty="0">
+                <a:solidFill>
+                  <a:schemeClr val="accent1"/>
+                </a:solidFill>
+                <a:latin typeface="Yu Gothic" pitchFamily="34" charset="0"/>
+                <a:ea typeface="Yu Gothic" pitchFamily="34" charset="-122"/>
+                <a:cs typeface="Yu Gothic" pitchFamily="34" charset="-120"/>
+              </a:rPr>
+              <a:t>12 / 34</a:t>
+            </a:r>
+            <a:endParaRPr lang="en-US" sz="4000" dirty="0"/>
+          </a:p>
+        </p:txBody>
+      </p:sp>
+      <p:sp>
+        <p:nvSpPr>
+          <p:cNvPr id="11" name="Text 9"/>
+          <p:cNvSpPr txBox="1"/>
+          <p:nvPr/>
+        </p:nvSpPr>
+        <p:spPr>
+          <a:xfrm>
+            <a:off x="6364224" y="2651760"/>
+            <a:ext cx="2286000" cy="868680"/>
+          </a:xfrm>
+          <a:prstGeom prst="rect">
+            <a:avLst/>
+          </a:prstGeom>
+          <a:noFill/>
+          <a:ln/>
+        </p:spPr>
+        <p:txBody>
+          <a:bodyPr wrap="square" lIns="0" tIns="0" rIns="0" bIns="0" rtlCol="0" anchor="t"/>
+          <a:lstStyle/>
+          <a:p>
+            <a:pPr indent="0" marL="0">
+              <a:buNone/>
+            </a:pPr>
+            <a:r>
+              <a:rPr lang="en-US" sz="1400" dirty="0">
+                <a:solidFill>
+                  <a:schemeClr val="tx1"/>
+                </a:solidFill>
+                <a:latin typeface="Yu Gothic" pitchFamily="34" charset="0"/>
+                <a:ea typeface="Yu Gothic" pitchFamily="34" charset="-122"/>
+                <a:cs typeface="Yu Gothic" pitchFamily="34" charset="-120"/>
+              </a:rPr>
+              <a:t>素のAIの回答のうち、募集終了</a:t>
+            </a:r>
+            <a:endParaRPr lang="en-US" sz="1400" dirty="0"/>
+          </a:p>
+        </p:txBody>
+      </p:sp>
+      <p:sp>
+        <p:nvSpPr>
+          <p:cNvPr id="12" name="評価カード4"/>
+          <p:cNvSpPr/>
+          <p:nvPr/>
+        </p:nvSpPr>
+        <p:spPr>
+          <a:xfrm>
+            <a:off x="8997696" y="1463040"/>
+            <a:ext cx="2651760" cy="2194560"/>
+          </a:xfrm>
+          <a:prstGeom prst="roundRect">
+            <a:avLst>
+              <a:gd name="adj" fmla="val 6250"/>
+            </a:avLst>
+          </a:prstGeom>
+          <a:solidFill>
+            <a:schemeClr val="bg2"/>
+          </a:solidFill>
+          <a:ln w="12700">
+            <a:solidFill>
+              <a:schemeClr val="bg2"/>
+            </a:solidFill>
+            <a:prstDash val="solid"/>
+          </a:ln>
+        </p:spPr>
+      </p:sp>
+      <p:sp>
+        <p:nvSpPr>
+          <p:cNvPr id="13" name="Text 11"/>
+          <p:cNvSpPr txBox="1"/>
+          <p:nvPr/>
+        </p:nvSpPr>
+        <p:spPr>
+          <a:xfrm>
+            <a:off x="9180576" y="1600200"/>
+            <a:ext cx="2286000" cy="1005840"/>
+          </a:xfrm>
+          <a:prstGeom prst="rect">
+            <a:avLst/>
+          </a:prstGeom>
+          <a:noFill/>
+          <a:ln/>
+        </p:spPr>
+        <p:txBody>
+          <a:bodyPr wrap="square" lIns="0" tIns="0" rIns="0" bIns="0" rtlCol="0" anchor="ctr"/>
+          <a:lstStyle/>
+          <a:p>
+            <a:pPr indent="0" marL="0">
+              <a:buNone/>
+            </a:pPr>
+            <a:r>
+              <a:rPr lang="en-US" sz="4000" b="1" dirty="0">
+                <a:solidFill>
+                  <a:schemeClr val="accent1"/>
+                </a:solidFill>
+                <a:latin typeface="Yu Gothic" pitchFamily="34" charset="0"/>
+                <a:ea typeface="Yu Gothic" pitchFamily="34" charset="-122"/>
+                <a:cs typeface="Yu Gothic" pitchFamily="34" charset="-120"/>
+              </a:rPr>
+              <a:t>17 対 15</a:t>
+            </a:r>
+            <a:endParaRPr lang="en-US" sz="4000" dirty="0"/>
+          </a:p>
+        </p:txBody>
+      </p:sp>
+      <p:sp>
+        <p:nvSpPr>
+          <p:cNvPr id="14" name="Text 12"/>
+          <p:cNvSpPr txBox="1"/>
+          <p:nvPr/>
+        </p:nvSpPr>
+        <p:spPr>
+          <a:xfrm>
+            <a:off x="9180576" y="2651760"/>
+            <a:ext cx="2286000" cy="868680"/>
+          </a:xfrm>
+          <a:prstGeom prst="rect">
+            <a:avLst/>
+          </a:prstGeom>
+          <a:noFill/>
+          <a:ln/>
+        </p:spPr>
+        <p:txBody>
+          <a:bodyPr wrap="square" lIns="0" tIns="0" rIns="0" bIns="0" rtlCol="0" anchor="t"/>
+          <a:lstStyle/>
+          <a:p>
+            <a:pPr indent="0" marL="0">
+              <a:buNone/>
+            </a:pPr>
+            <a:r>
+              <a:rPr lang="en-US" sz="1400" dirty="0">
+                <a:solidFill>
+                  <a:schemeClr val="tx1"/>
+                </a:solidFill>
+                <a:latin typeface="Yu Gothic" pitchFamily="34" charset="0"/>
+                <a:ea typeface="Yu Gothic" pitchFamily="34" charset="-122"/>
+                <a:cs typeface="Yu Gothic" pitchFamily="34" charset="-120"/>
+              </a:rPr>
+              <a:t>見つけた「使える」件数（本エージェント 対 素のAI）</a:t>
+            </a:r>
+            <a:endParaRPr lang="en-US" sz="1400" dirty="0"/>
+          </a:p>
+        </p:txBody>
+      </p:sp>
+      <p:sp>
+        <p:nvSpPr>
+          <p:cNvPr id="15" name="Text 13"/>
+          <p:cNvSpPr txBox="1"/>
+          <p:nvPr/>
+        </p:nvSpPr>
+        <p:spPr>
+          <a:xfrm>
+            <a:off x="548640" y="3977640"/>
+            <a:ext cx="5486400" cy="457200"/>
+          </a:xfrm>
+          <a:prstGeom prst="rect">
+            <a:avLst/>
+          </a:prstGeom>
+          <a:noFill/>
+          <a:ln/>
+        </p:spPr>
+        <p:txBody>
+          <a:bodyPr wrap="square" lIns="0" tIns="0" rIns="0" bIns="0" rtlCol="0" anchor="ctr"/>
+          <a:lstStyle/>
+          <a:p>
+            <a:pPr indent="0" marL="0">
+              <a:buNone/>
+            </a:pPr>
+            <a:r>
+              <a:rPr lang="en-US" sz="2200" b="1" dirty="0">
+                <a:solidFill>
+                  <a:schemeClr val="tx2"/>
+                </a:solidFill>
+                <a:latin typeface="Yu Gothic" pitchFamily="34" charset="0"/>
+                <a:ea typeface="Yu Gothic" pitchFamily="34" charset="-122"/>
+                <a:cs typeface="Yu Gothic" pitchFamily="34" charset="-120"/>
+              </a:rPr>
+              <a:t>正直な限界</a:t>
+            </a:r>
+            <a:endParaRPr lang="en-US" sz="2200" dirty="0"/>
+          </a:p>
+        </p:txBody>
+      </p:sp>
+      <p:sp>
+        <p:nvSpPr>
+          <p:cNvPr id="16" name="Text 14"/>
+          <p:cNvSpPr txBox="1"/>
+          <p:nvPr/>
+        </p:nvSpPr>
+        <p:spPr>
+          <a:xfrm>
+            <a:off x="548640" y="4526280"/>
+            <a:ext cx="11064240" cy="1645920"/>
+          </a:xfrm>
+          <a:prstGeom prst="rect">
+            <a:avLst/>
+          </a:prstGeom>
+          <a:noFill/>
+          <a:ln/>
+        </p:spPr>
+        <p:txBody>
+          <a:bodyPr wrap="square" lIns="0" tIns="0" rIns="0" bIns="0" rtlCol="0" anchor="t"/>
+          <a:lstStyle/>
+          <a:p>
             <a:pPr marL="342900" indent="-342900">
               <a:spcAft>
-                <a:spcPts val="600"/>
+                <a:spcPts val="800"/>
               </a:spcAft>
               <a:buSzPct val="100000"/>
               <a:buChar char="•"/>
@@ -6131,17 +6324,17 @@
             <a:r>
               <a:rPr lang="en-US" sz="1800" dirty="0">
                 <a:solidFill>
-                  <a:srgbClr val="EADDFF"/>
-                </a:solidFill>
-              </a:rPr>
-              <a:t>一覧ページの展開（実験では有効。本番への組み込みは今後）</a:t>
+                  <a:schemeClr val="tx1"/>
+                </a:solidFill>
+              </a:rPr>
+              <a:t>見つかる件数は同程度。差は「確かさ」（募集終了を分ける、引用で確認した締切）</a:t>
             </a:r>
             <a:endParaRPr lang="en-US" sz="1800" dirty="0"/>
           </a:p>
           <a:p>
             <a:pPr marL="342900" indent="-342900">
               <a:spcAft>
-                <a:spcPts val="600"/>
+                <a:spcPts val="800"/>
               </a:spcAft>
               <a:buSzPct val="100000"/>
               <a:buChar char="•"/>
@@ -6149,17 +6342,17 @@
             <a:r>
               <a:rPr lang="en-US" sz="1800" dirty="0">
                 <a:solidFill>
-                  <a:srgbClr val="EADDFF"/>
-                </a:solidFill>
-              </a:rPr>
-              <a:t>検索語の自動選択と、再現率の数値化</a:t>
+                  <a:schemeClr val="tx1"/>
+                </a:solidFill>
+              </a:rPr>
+              <a:t>比較は4つの立場で各1回。小さな実験で、「大幅に多く見つける」とは言わない</a:t>
             </a:r>
             <a:endParaRPr lang="en-US" sz="1800" dirty="0"/>
           </a:p>
           <a:p>
             <a:pPr marL="342900" indent="-342900">
               <a:spcAft>
-                <a:spcPts val="600"/>
+                <a:spcPts val="800"/>
               </a:spcAft>
               <a:buSzPct val="100000"/>
               <a:buChar char="•"/>
@@ -6167,51 +6360,12 @@
             <a:r>
               <a:rPr lang="en-US" sz="1800" dirty="0">
                 <a:solidFill>
-                  <a:srgbClr val="EADDFF"/>
-                </a:solidFill>
-              </a:rPr>
-              <a:t>他大学の公開一覧への対応</a:t>
+                  <a:schemeClr val="tx1"/>
+                </a:solidFill>
+              </a:rPr>
+              <a:t>最初の検索語（年度の固定）は、この実験で劣る原因と分かり、直した</a:t>
             </a:r>
             <a:endParaRPr lang="en-US" sz="1800" dirty="0"/>
-          </a:p>
-        </p:txBody>
-      </p:sp>
-      <p:sp>
-        <p:nvSpPr>
-          <p:cNvPr id="5" name="Text 3"/>
-          <p:cNvSpPr txBox="1"/>
-          <p:nvPr/>
-        </p:nvSpPr>
-        <p:spPr>
-          <a:xfrm>
-            <a:off x="731520" y="5943600"/>
-            <a:ext cx="10058400" cy="365760"/>
-          </a:xfrm>
-          <a:prstGeom prst="rect">
-            <a:avLst/>
-          </a:prstGeom>
-          <a:noFill/>
-          <a:ln/>
-        </p:spPr>
-        <p:txBody>
-          <a:bodyPr wrap="square" lIns="0" tIns="0" rIns="0" bIns="0" rtlCol="0" anchor="ctr"/>
-          <a:lstStyle/>
-          <a:p>
-            <a:pPr indent="0" marL="0">
-              <a:buNone/>
-            </a:pPr>
-            <a:r>
-              <a:rPr lang="en-US" sz="1400" dirty="0">
-                <a:solidFill>
-                  <a:srgbClr val="CAC4D0"/>
-                </a:solidFill>
-                <a:latin typeface="Yu Gothic" pitchFamily="34" charset="0"/>
-                <a:ea typeface="Yu Gothic" pitchFamily="34" charset="-122"/>
-                <a:cs typeface="Yu Gothic" pitchFamily="34" charset="-120"/>
-              </a:rPr>
-              <a:t>GitHub: ShoheiFujieda/agentic-ai-hackathon-2026</a:t>
-            </a:r>
-            <a:endParaRPr lang="en-US" sz="1400" dirty="0"/>
           </a:p>
         </p:txBody>
       </p:sp>
@@ -6245,7 +6399,7 @@
             <a:lvl1pPr>
               <a:defRPr sz="1000">
                 <a:solidFill>
-                  <a:srgbClr val="CAC4D0"/>
+                  <a:schemeClr val="accent6"/>
                 </a:solidFill>
               </a:defRPr>
             </a:lvl1pPr>
@@ -6287,16 +6441,14 @@
       </p:grpSpPr>
       <p:sp>
         <p:nvSpPr>
-          <p:cNvPr id="2" name="Text 1"/>
-          <p:cNvSpPr/>
-          <p:nvPr>
-            <p:ph idx="101" type="title" hasCustomPrompt="1"/>
-          </p:nvPr>
-        </p:nvSpPr>
-        <p:spPr>
-          <a:xfrm>
-            <a:off x="548640" y="365760"/>
-            <a:ext cx="11064240" cy="868680"/>
+          <p:cNvPr id="2" name="Text 0"/>
+          <p:cNvSpPr txBox="1"/>
+          <p:nvPr/>
+        </p:nvSpPr>
+        <p:spPr>
+          <a:xfrm>
+            <a:off x="731520" y="1188720"/>
+            <a:ext cx="10515600" cy="2011680"/>
           </a:xfrm>
           <a:prstGeom prst="rect">
             <a:avLst/>
@@ -6305,48 +6457,198 @@
           <a:ln/>
         </p:spPr>
         <p:txBody>
+          <a:bodyPr wrap="square" lIns="0" tIns="0" rIns="0" bIns="0" rtlCol="0" anchor="t"/>
+          <a:lstStyle/>
+          <a:p>
+            <a:pPr indent="0" marL="0">
+              <a:buNone/>
+            </a:pPr>
+            <a:r>
+              <a:rPr lang="en-US" sz="5200" b="1" dirty="0">
+                <a:solidFill>
+                  <a:schemeClr val="bg1"/>
+                </a:solidFill>
+                <a:latin typeface="Yu Gothic" pitchFamily="34" charset="0"/>
+                <a:ea typeface="Yu Gothic" pitchFamily="34" charset="-122"/>
+                <a:cs typeface="Yu Gothic" pitchFamily="34" charset="-120"/>
+              </a:rPr>
+              <a:t>応募できる奨学金を、</a:t>
+            </a:r>
+            <a:endParaRPr lang="en-US" sz="5200" dirty="0"/>
+          </a:p>
+          <a:p>
+            <a:pPr indent="0" marL="0">
+              <a:buNone/>
+            </a:pPr>
+            <a:r>
+              <a:rPr lang="en-US" sz="5200" b="1" dirty="0">
+                <a:solidFill>
+                  <a:schemeClr val="bg1"/>
+                </a:solidFill>
+                <a:latin typeface="Yu Gothic" pitchFamily="34" charset="0"/>
+                <a:ea typeface="Yu Gothic" pitchFamily="34" charset="-122"/>
+                <a:cs typeface="Yu Gothic" pitchFamily="34" charset="-120"/>
+              </a:rPr>
+              <a:t>間に合ううちに。</a:t>
+            </a:r>
+            <a:endParaRPr lang="en-US" sz="5200" dirty="0"/>
+          </a:p>
+        </p:txBody>
+      </p:sp>
+      <p:sp>
+        <p:nvSpPr>
+          <p:cNvPr id="3" name="Text 1"/>
+          <p:cNvSpPr txBox="1"/>
+          <p:nvPr/>
+        </p:nvSpPr>
+        <p:spPr>
+          <a:xfrm>
+            <a:off x="731520" y="3566160"/>
+            <a:ext cx="5486400" cy="457200"/>
+          </a:xfrm>
+          <a:prstGeom prst="rect">
+            <a:avLst/>
+          </a:prstGeom>
+          <a:noFill/>
+          <a:ln/>
+        </p:spPr>
+        <p:txBody>
           <a:bodyPr wrap="square" lIns="0" tIns="0" rIns="0" bIns="0" rtlCol="0" anchor="ctr"/>
           <a:lstStyle/>
           <a:p>
-            <a:pPr algn="l" indent="0" marL="0">
+            <a:pPr indent="0" marL="0">
               <a:buNone/>
             </a:pPr>
             <a:r>
-              <a:rPr lang="en-US" sz="3400" b="1" dirty="0">
-                <a:solidFill>
-                  <a:schemeClr val="tx2"/>
-                </a:solidFill>
-              </a:rPr>
-              <a:t>付録: 検索の流れ（探すのは AI、判定はコード）</a:t>
-            </a:r>
-            <a:endParaRPr lang="en-US" sz="3400" dirty="0"/>
-          </a:p>
-        </p:txBody>
-      </p:sp>
-      <p:pic>
-        <p:nvPicPr>
-          <p:cNvPr id="3" name="付録: 検索の流れ（探すのは AI、判定はコード）" descr="C:\Users\shohe\Agentic AI Hackathon\.claude\worktrees\progress-check-3e6fdb\docs\submission\architecture_pipeline.png">    </p:cNvPr>
-          <p:cNvPicPr>
-            <a:picLocks noChangeAspect="1"/>
-          </p:cNvPicPr>
-          <p:nvPr/>
-        </p:nvPicPr>
-        <p:blipFill>
-          <a:blip r:embed="rId1"/>
-          <a:stretch>
-            <a:fillRect/>
-          </a:stretch>
-        </p:blipFill>
-        <p:spPr>
-          <a:xfrm>
-            <a:off x="1737360" y="1371600"/>
-            <a:ext cx="8595360" cy="4837176"/>
-          </a:xfrm>
-          <a:prstGeom prst="rect">
-            <a:avLst/>
-          </a:prstGeom>
-        </p:spPr>
-      </p:pic>
+              <a:rPr lang="en-US" sz="2000" b="1" dirty="0">
+                <a:solidFill>
+                  <a:srgbClr val="CADCFC"/>
+                </a:solidFill>
+                <a:latin typeface="Yu Gothic" pitchFamily="34" charset="0"/>
+                <a:ea typeface="Yu Gothic" pitchFamily="34" charset="-122"/>
+                <a:cs typeface="Yu Gothic" pitchFamily="34" charset="-120"/>
+              </a:rPr>
+              <a:t>これからの拡張</a:t>
+            </a:r>
+            <a:endParaRPr lang="en-US" sz="2000" dirty="0"/>
+          </a:p>
+        </p:txBody>
+      </p:sp>
+      <p:sp>
+        <p:nvSpPr>
+          <p:cNvPr id="4" name="Text 2"/>
+          <p:cNvSpPr txBox="1"/>
+          <p:nvPr/>
+        </p:nvSpPr>
+        <p:spPr>
+          <a:xfrm>
+            <a:off x="731520" y="4114800"/>
+            <a:ext cx="10515600" cy="1463040"/>
+          </a:xfrm>
+          <a:prstGeom prst="rect">
+            <a:avLst/>
+          </a:prstGeom>
+          <a:noFill/>
+          <a:ln/>
+        </p:spPr>
+        <p:txBody>
+          <a:bodyPr wrap="square" lIns="0" tIns="0" rIns="0" bIns="0" rtlCol="0" anchor="t"/>
+          <a:lstStyle/>
+          <a:p>
+            <a:pPr marL="342900" indent="-342900">
+              <a:spcAft>
+                <a:spcPts val="600"/>
+              </a:spcAft>
+              <a:buSzPct val="100000"/>
+              <a:buChar char="•"/>
+            </a:pPr>
+            <a:r>
+              <a:rPr lang="en-US" sz="1800" dirty="0">
+                <a:solidFill>
+                  <a:srgbClr val="EADDFF"/>
+                </a:solidFill>
+              </a:rPr>
+              <a:t>一覧ページの展開（実験では有効。本番への組み込みは今後）</a:t>
+            </a:r>
+            <a:endParaRPr lang="en-US" sz="1800" dirty="0"/>
+          </a:p>
+          <a:p>
+            <a:pPr marL="342900" indent="-342900">
+              <a:spcAft>
+                <a:spcPts val="600"/>
+              </a:spcAft>
+              <a:buSzPct val="100000"/>
+              <a:buChar char="•"/>
+            </a:pPr>
+            <a:r>
+              <a:rPr lang="en-US" sz="1800" dirty="0">
+                <a:solidFill>
+                  <a:srgbClr val="EADDFF"/>
+                </a:solidFill>
+              </a:rPr>
+              <a:t>検索語の自動選択と、再現率の数値化</a:t>
+            </a:r>
+            <a:endParaRPr lang="en-US" sz="1800" dirty="0"/>
+          </a:p>
+          <a:p>
+            <a:pPr marL="342900" indent="-342900">
+              <a:spcAft>
+                <a:spcPts val="600"/>
+              </a:spcAft>
+              <a:buSzPct val="100000"/>
+              <a:buChar char="•"/>
+            </a:pPr>
+            <a:r>
+              <a:rPr lang="en-US" sz="1800" dirty="0">
+                <a:solidFill>
+                  <a:srgbClr val="EADDFF"/>
+                </a:solidFill>
+              </a:rPr>
+              <a:t>他大学の公開一覧への対応</a:t>
+            </a:r>
+            <a:endParaRPr lang="en-US" sz="1800" dirty="0"/>
+          </a:p>
+        </p:txBody>
+      </p:sp>
+      <p:sp>
+        <p:nvSpPr>
+          <p:cNvPr id="5" name="Text 3"/>
+          <p:cNvSpPr txBox="1"/>
+          <p:nvPr/>
+        </p:nvSpPr>
+        <p:spPr>
+          <a:xfrm>
+            <a:off x="731520" y="5943600"/>
+            <a:ext cx="10058400" cy="365760"/>
+          </a:xfrm>
+          <a:prstGeom prst="rect">
+            <a:avLst/>
+          </a:prstGeom>
+          <a:noFill/>
+          <a:ln/>
+        </p:spPr>
+        <p:txBody>
+          <a:bodyPr wrap="square" lIns="0" tIns="0" rIns="0" bIns="0" rtlCol="0" anchor="ctr"/>
+          <a:lstStyle/>
+          <a:p>
+            <a:pPr indent="0" marL="0">
+              <a:buNone/>
+            </a:pPr>
+            <a:r>
+              <a:rPr lang="en-US" sz="1400" dirty="0">
+                <a:solidFill>
+                  <a:srgbClr val="CAC4D0"/>
+                </a:solidFill>
+                <a:latin typeface="Yu Gothic" pitchFamily="34" charset="0"/>
+                <a:ea typeface="Yu Gothic" pitchFamily="34" charset="-122"/>
+                <a:cs typeface="Yu Gothic" pitchFamily="34" charset="-120"/>
+              </a:rPr>
+              <a:t>GitHub: ShoheiFujieda/agentic-ai-hackathon-2026</a:t>
+            </a:r>
+            <a:endParaRPr lang="en-US" sz="1400" dirty="0"/>
+          </a:p>
+        </p:txBody>
+      </p:sp>
       <p:sp>
         <p:nvSpPr>
           <p:cNvPr id="25" name="Slide Number Placeholder 0"/>
@@ -6377,7 +6679,7 @@
             <a:lvl1pPr>
               <a:defRPr sz="1000">
                 <a:solidFill>
-                  <a:schemeClr val="accent6"/>
+                  <a:srgbClr val="CAC4D0"/>
                 </a:solidFill>
               </a:defRPr>
             </a:lvl1pPr>
